--- a/packages/axiom-dossier/examples/out/hyper3-full.pptx
+++ b/packages/axiom-dossier/examples/out/hyper3-full.pptx
@@ -17,6 +17,8 @@
     <p:sldId id="265" r:id="rId16"/>
     <p:sldId id="266" r:id="rId17"/>
     <p:sldId id="267" r:id="rId18"/>
+    <p:sldId id="268" r:id="rId19"/>
+    <p:sldId id="269" r:id="rId20"/>
   </p:sldIdLst>
   <p:sldSz cx="12192000" cy="6858000" type="screen4x3"/>
   <p:notesSz cx="6858000" cy="9144000"/>
@@ -3188,7 +3190,7 @@
                   <a:srgbClr val="111111"/>
                 </a:solidFill>
               </a:rPr>
-              <a:t>6. Conclusions</a:t>
+              <a:t>4. Model checking (cont.)</a:t>
             </a:r>
           </a:p>
         </p:txBody>
@@ -3202,7 +3204,7 @@
         <p:spPr>
           <a:xfrm>
             <a:off x="812800" y="914400"/>
-            <a:ext cx="10566400" cy="508000"/>
+            <a:ext cx="10464800" cy="889000"/>
           </a:xfrm>
           <a:prstGeom prst="rect">
             <a:avLst/>
@@ -3216,16 +3218,474 @@
           <a:lstStyle/>
           <a:p>
             <a:r>
-              <a:rPr sz="1050" b="0">
+              <a:rPr sz="892" b="0">
                 <a:solidFill>
-                  <a:srgbClr val="111111"/>
+                  <a:srgbClr val="555555"/>
                 </a:solidFill>
               </a:rPr>
-              <a:t>The determination of which daily dose should go into phase III and whether harm occurs cannot be answered by a single pooled estimate, conditional on the assumptions that dropout is ignorable given baseline and that the pooled contrast answers the question. The contrast for 40 mg versus control in the age 51+ band is 6.20 mmHg (90% WALD 3.98 to 8.42 mmHg), which sits on the unfavourable side of the threshold. In contrast, 40 mg versus control in the age 25-35 band is -5.26 mmHg (90% WALD -8.17 to -2.36 mmHg). When pooled across age bands, 40 mg versus control is -1.53 mmHg (90% WALD -2.97 to -0.10 mmHg). The pooled contrast for 20 mg versus control is -4.80 mmHg (90% WALD -6.17 to -3.44 mmHg). The pooled contrast for 10 mg versus control is -5.27 mmHg (90% WALD -6.63 to -3.91 mmHg). These other findings sit on the favourable side of the threshold. Any single summary averages harm with benefit across age strata. Because an average combines opposing effects, the disaggregated findings are the result. The pooled figure is not a substitute for the disaggregated stratum estimates. Each contrast is identified via the backdoor route. All findings hold under the unresolved assumptions that dropout is ignorable given baseline and that the pooled contrast answers the question.</a:t>
-            </a:r>
-          </a:p>
-        </p:txBody>
-      </p:sp>
+              <a:t>UNITS RANDOMIZED IN BAND AGE 51 PLUS</a:t>
+            </a:r>
+          </a:p>
+          <a:p>
+            <a:r>
+              <a:rPr sz="1520" b="1">
+                <a:solidFill>
+                  <a:srgbClr val="1A1A1A"/>
+                </a:solidFill>
+              </a:rPr>
+              <a:t>140</a:t>
+            </a:r>
+          </a:p>
+        </p:txBody>
+      </p:sp>
+      <p:graphicFrame>
+        <p:nvGraphicFramePr>
+          <p:cNvPr id="4" name="Table 3"/>
+          <p:cNvGraphicFramePr>
+            <a:graphicFrameLocks noGrp="1"/>
+          </p:cNvGraphicFramePr>
+          <p:nvPr/>
+        </p:nvGraphicFramePr>
+        <p:xfrm>
+          <a:off x="812800" y="1955800"/>
+          <a:ext cx="10566400" cy="1828800"/>
+        </p:xfrm>
+        <a:graphic>
+          <a:graphicData uri="http://schemas.openxmlformats.org/drawingml/2006/table">
+            <a:tbl>
+              <a:tblPr firstRow="1" bandRow="1">
+                <a:tableStyleId>{5C22544A-7EE6-4342-B048-85BDC9FD1C3A}</a:tableStyleId>
+              </a:tblPr>
+              <a:tblGrid>
+                <a:gridCol w="2641600"/>
+                <a:gridCol w="2641600"/>
+                <a:gridCol w="2641600"/>
+                <a:gridCol w="2641600"/>
+              </a:tblGrid>
+              <a:tr h="304800">
+                <a:tc>
+                  <a:txBody>
+                    <a:bodyPr/>
+                    <a:lstStyle/>
+                    <a:p>
+                      <a:r>
+                        <a:rPr sz="892" b="1">
+                          <a:solidFill>
+                            <a:srgbClr val="111111"/>
+                          </a:solidFill>
+                        </a:rPr>
+                        <a:t>Check</a:t>
+                      </a:r>
+                    </a:p>
+                  </a:txBody>
+                  <a:tcPr/>
+                </a:tc>
+                <a:tc>
+                  <a:txBody>
+                    <a:bodyPr/>
+                    <a:lstStyle/>
+                    <a:p>
+                      <a:r>
+                        <a:rPr sz="892" b="1">
+                          <a:solidFill>
+                            <a:srgbClr val="111111"/>
+                          </a:solidFill>
+                        </a:rPr>
+                        <a:t>Value</a:t>
+                      </a:r>
+                    </a:p>
+                  </a:txBody>
+                  <a:tcPr/>
+                </a:tc>
+                <a:tc>
+                  <a:txBody>
+                    <a:bodyPr/>
+                    <a:lstStyle/>
+                    <a:p>
+                      <a:r>
+                        <a:rPr sz="892" b="1">
+                          <a:solidFill>
+                            <a:srgbClr val="111111"/>
+                          </a:solidFill>
+                        </a:rPr>
+                        <a:t>Unit</a:t>
+                      </a:r>
+                    </a:p>
+                  </a:txBody>
+                  <a:tcPr/>
+                </a:tc>
+                <a:tc>
+                  <a:txBody>
+                    <a:bodyPr/>
+                    <a:lstStyle/>
+                    <a:p>
+                      <a:r>
+                        <a:rPr sz="892" b="1">
+                          <a:solidFill>
+                            <a:srgbClr val="111111"/>
+                          </a:solidFill>
+                        </a:rPr>
+                        <a:t>Interval</a:t>
+                      </a:r>
+                    </a:p>
+                  </a:txBody>
+                  <a:tcPr/>
+                </a:tc>
+              </a:tr>
+              <a:tr h="304800">
+                <a:tc>
+                  <a:txBody>
+                    <a:bodyPr/>
+                    <a:lstStyle/>
+                    <a:p>
+                      <a:r>
+                        <a:rPr sz="892" b="0">
+                          <a:solidFill>
+                            <a:srgbClr val="111111"/>
+                          </a:solidFill>
+                        </a:rPr>
+                        <a:t>Units still on study at the final week</a:t>
+                      </a:r>
+                    </a:p>
+                  </a:txBody>
+                  <a:tcPr/>
+                </a:tc>
+                <a:tc>
+                  <a:txBody>
+                    <a:bodyPr/>
+                    <a:lstStyle/>
+                    <a:p>
+                      <a:r>
+                        <a:rPr sz="892" b="0">
+                          <a:solidFill>
+                            <a:srgbClr val="111111"/>
+                          </a:solidFill>
+                        </a:rPr>
+                        <a:t>0.797</a:t>
+                      </a:r>
+                    </a:p>
+                  </a:txBody>
+                  <a:tcPr/>
+                </a:tc>
+                <a:tc>
+                  <a:txBody>
+                    <a:bodyPr/>
+                    <a:lstStyle/>
+                    <a:p>
+                      <a:r>
+                        <a:rPr sz="892" b="0">
+                          <a:solidFill>
+                            <a:srgbClr val="111111"/>
+                          </a:solidFill>
+                        </a:rPr>
+                        <a:t>—</a:t>
+                      </a:r>
+                    </a:p>
+                  </a:txBody>
+                  <a:tcPr/>
+                </a:tc>
+                <a:tc>
+                  <a:txBody>
+                    <a:bodyPr/>
+                    <a:lstStyle/>
+                    <a:p>
+                      <a:r>
+                        <a:rPr sz="892" b="0">
+                          <a:solidFill>
+                            <a:srgbClr val="111111"/>
+                          </a:solidFill>
+                        </a:rPr>
+                        <a:t>—</a:t>
+                      </a:r>
+                    </a:p>
+                  </a:txBody>
+                  <a:tcPr/>
+                </a:tc>
+              </a:tr>
+              <a:tr h="304800">
+                <a:tc>
+                  <a:txBody>
+                    <a:bodyPr/>
+                    <a:lstStyle/>
+                    <a:p>
+                      <a:r>
+                        <a:rPr sz="892" b="0">
+                          <a:solidFill>
+                            <a:srgbClr val="111111"/>
+                          </a:solidFill>
+                        </a:rPr>
+                        <a:t>Units contributing to the primary endpoint</a:t>
+                      </a:r>
+                    </a:p>
+                  </a:txBody>
+                  <a:tcPr/>
+                </a:tc>
+                <a:tc>
+                  <a:txBody>
+                    <a:bodyPr/>
+                    <a:lstStyle/>
+                    <a:p>
+                      <a:r>
+                        <a:rPr sz="892" b="0">
+                          <a:solidFill>
+                            <a:srgbClr val="111111"/>
+                          </a:solidFill>
+                        </a:rPr>
+                        <a:t>372</a:t>
+                      </a:r>
+                    </a:p>
+                  </a:txBody>
+                  <a:tcPr/>
+                </a:tc>
+                <a:tc>
+                  <a:txBody>
+                    <a:bodyPr/>
+                    <a:lstStyle/>
+                    <a:p>
+                      <a:r>
+                        <a:rPr sz="892" b="0">
+                          <a:solidFill>
+                            <a:srgbClr val="111111"/>
+                          </a:solidFill>
+                        </a:rPr>
+                        <a:t>—</a:t>
+                      </a:r>
+                    </a:p>
+                  </a:txBody>
+                  <a:tcPr/>
+                </a:tc>
+                <a:tc>
+                  <a:txBody>
+                    <a:bodyPr/>
+                    <a:lstStyle/>
+                    <a:p>
+                      <a:r>
+                        <a:rPr sz="892" b="0">
+                          <a:solidFill>
+                            <a:srgbClr val="111111"/>
+                          </a:solidFill>
+                        </a:rPr>
+                        <a:t>—</a:t>
+                      </a:r>
+                    </a:p>
+                  </a:txBody>
+                  <a:tcPr/>
+                </a:tc>
+              </a:tr>
+              <a:tr h="304800">
+                <a:tc>
+                  <a:txBody>
+                    <a:bodyPr/>
+                    <a:lstStyle/>
+                    <a:p>
+                      <a:r>
+                        <a:rPr sz="892" b="0">
+                          <a:solidFill>
+                            <a:srgbClr val="111111"/>
+                          </a:solidFill>
+                        </a:rPr>
+                        <a:t>Units randomized in band age 25 35</a:t>
+                      </a:r>
+                    </a:p>
+                  </a:txBody>
+                  <a:tcPr/>
+                </a:tc>
+                <a:tc>
+                  <a:txBody>
+                    <a:bodyPr/>
+                    <a:lstStyle/>
+                    <a:p>
+                      <a:r>
+                        <a:rPr sz="892" b="0">
+                          <a:solidFill>
+                            <a:srgbClr val="111111"/>
+                          </a:solidFill>
+                        </a:rPr>
+                        <a:t>100</a:t>
+                      </a:r>
+                    </a:p>
+                  </a:txBody>
+                  <a:tcPr/>
+                </a:tc>
+                <a:tc>
+                  <a:txBody>
+                    <a:bodyPr/>
+                    <a:lstStyle/>
+                    <a:p>
+                      <a:r>
+                        <a:rPr sz="892" b="0">
+                          <a:solidFill>
+                            <a:srgbClr val="111111"/>
+                          </a:solidFill>
+                        </a:rPr>
+                        <a:t>—</a:t>
+                      </a:r>
+                    </a:p>
+                  </a:txBody>
+                  <a:tcPr/>
+                </a:tc>
+                <a:tc>
+                  <a:txBody>
+                    <a:bodyPr/>
+                    <a:lstStyle/>
+                    <a:p>
+                      <a:r>
+                        <a:rPr sz="892" b="0">
+                          <a:solidFill>
+                            <a:srgbClr val="111111"/>
+                          </a:solidFill>
+                        </a:rPr>
+                        <a:t>—</a:t>
+                      </a:r>
+                    </a:p>
+                  </a:txBody>
+                  <a:tcPr/>
+                </a:tc>
+              </a:tr>
+              <a:tr h="304800">
+                <a:tc>
+                  <a:txBody>
+                    <a:bodyPr/>
+                    <a:lstStyle/>
+                    <a:p>
+                      <a:r>
+                        <a:rPr sz="892" b="0">
+                          <a:solidFill>
+                            <a:srgbClr val="111111"/>
+                          </a:solidFill>
+                        </a:rPr>
+                        <a:t>Units randomized in band age 36 50</a:t>
+                      </a:r>
+                    </a:p>
+                  </a:txBody>
+                  <a:tcPr/>
+                </a:tc>
+                <a:tc>
+                  <a:txBody>
+                    <a:bodyPr/>
+                    <a:lstStyle/>
+                    <a:p>
+                      <a:r>
+                        <a:rPr sz="892" b="0">
+                          <a:solidFill>
+                            <a:srgbClr val="111111"/>
+                          </a:solidFill>
+                        </a:rPr>
+                        <a:t>160</a:t>
+                      </a:r>
+                    </a:p>
+                  </a:txBody>
+                  <a:tcPr/>
+                </a:tc>
+                <a:tc>
+                  <a:txBody>
+                    <a:bodyPr/>
+                    <a:lstStyle/>
+                    <a:p>
+                      <a:r>
+                        <a:rPr sz="892" b="0">
+                          <a:solidFill>
+                            <a:srgbClr val="111111"/>
+                          </a:solidFill>
+                        </a:rPr>
+                        <a:t>—</a:t>
+                      </a:r>
+                    </a:p>
+                  </a:txBody>
+                  <a:tcPr/>
+                </a:tc>
+                <a:tc>
+                  <a:txBody>
+                    <a:bodyPr/>
+                    <a:lstStyle/>
+                    <a:p>
+                      <a:r>
+                        <a:rPr sz="892" b="0">
+                          <a:solidFill>
+                            <a:srgbClr val="111111"/>
+                          </a:solidFill>
+                        </a:rPr>
+                        <a:t>—</a:t>
+                      </a:r>
+                    </a:p>
+                  </a:txBody>
+                  <a:tcPr/>
+                </a:tc>
+              </a:tr>
+              <a:tr h="304800">
+                <a:tc>
+                  <a:txBody>
+                    <a:bodyPr/>
+                    <a:lstStyle/>
+                    <a:p>
+                      <a:r>
+                        <a:rPr sz="892" b="0">
+                          <a:solidFill>
+                            <a:srgbClr val="111111"/>
+                          </a:solidFill>
+                        </a:rPr>
+                        <a:t>Units randomized in band age 51 plus</a:t>
+                      </a:r>
+                    </a:p>
+                  </a:txBody>
+                  <a:tcPr/>
+                </a:tc>
+                <a:tc>
+                  <a:txBody>
+                    <a:bodyPr/>
+                    <a:lstStyle/>
+                    <a:p>
+                      <a:r>
+                        <a:rPr sz="892" b="0">
+                          <a:solidFill>
+                            <a:srgbClr val="111111"/>
+                          </a:solidFill>
+                        </a:rPr>
+                        <a:t>140</a:t>
+                      </a:r>
+                    </a:p>
+                  </a:txBody>
+                  <a:tcPr/>
+                </a:tc>
+                <a:tc>
+                  <a:txBody>
+                    <a:bodyPr/>
+                    <a:lstStyle/>
+                    <a:p>
+                      <a:r>
+                        <a:rPr sz="892" b="0">
+                          <a:solidFill>
+                            <a:srgbClr val="111111"/>
+                          </a:solidFill>
+                        </a:rPr>
+                        <a:t>—</a:t>
+                      </a:r>
+                    </a:p>
+                  </a:txBody>
+                  <a:tcPr/>
+                </a:tc>
+                <a:tc>
+                  <a:txBody>
+                    <a:bodyPr/>
+                    <a:lstStyle/>
+                    <a:p>
+                      <a:r>
+                        <a:rPr sz="892" b="0">
+                          <a:solidFill>
+                            <a:srgbClr val="111111"/>
+                          </a:solidFill>
+                        </a:rPr>
+                        <a:t>—</a:t>
+                      </a:r>
+                    </a:p>
+                  </a:txBody>
+                  <a:tcPr/>
+                </a:tc>
+              </a:tr>
+            </a:tbl>
+          </a:graphicData>
+        </a:graphic>
+      </p:graphicFrame>
     </p:spTree>
   </p:cSld>
   <p:clrMapOvr>
@@ -3272,7 +3732,7 @@
                   <a:srgbClr val="111111"/>
                 </a:solidFill>
               </a:rPr>
-              <a:t>7. Limitations</a:t>
+              <a:t>5. Discussion</a:t>
             </a:r>
           </a:p>
         </p:txBody>
@@ -3305,7 +3765,7 @@
                   <a:srgbClr val="111111"/>
                 </a:solidFill>
               </a:rPr>
-              <a:t>Two unresolved assumptions remain in the analysis. The first assumption is that dropout is ignorable given baseline. This assumption holds that units who left the study differ from those who stayed only through characteristics measured before randomization. This is assumed and has not been checked against the data. It licenses the analysis to proceed under baseline conditioning. A tipping-point analysis across plausible departures from ignorability would challenge this assumption. The second assumption is that the pooled contrast answers the question. This requires that a single number across all age bands describes the effect the decision is about. This assumption is known to fail. Heterogeneity across the pre-specified strata challenges reliance on the pooled contrast. Specifying each assumption clarifies the analytical steps that the data alone do not establish. It also identifies the precise conditions that would challenge each premise.</a:t>
+              <a:t>The effect is identified via the backdoor route, which licenses interpreting these estimates as treatment effects rather than associations under the trial assumptions. For the 10 mg dose versus control, the pooled effect is -5.27 mmHg (90% WALD -6.63 to -3.91 mmHg), where the interval lies entirely below the 0.00 mmHg threshold on the favourable side. For the 20 mg dose versus control, the pooled effect is -4.80 mmHg (90% WALD -6.17 to -3.44 mmHg), with the interval also falling entirely below the 0.00 mmHg threshold on the favourable side. For the 40 mg dose versus control, the pooled effect is -1.53 mmHg (90% WALD -2.97 to -0.10 mmHg), with an interval located entirely below 0.00 mmHg on the favourable side. This pooled estimate for the 40 mg dose should not be evaluated alone, as it averages across an age band that benefits and an age band that is harmed. For participants in the age band 25-35, the 40 mg dose versus control yields an effect of -5.26 mmHg (90% WALD -8.17 to -2.36 mmHg), lying entirely below the 0.00 mmHg threshold on the favourable side. For participants in the age band 51+, the 40 mg dose versus control yields an effect of 6.20 mmHg (90% WALD 3.98 to 8.42 mmHg). Because this interval lies entirely above 0.00 mmHg on the unfavourable side, it reflects the harm contrast that the pooled figure conceals and that the safety boundary was designed to monitor. All of these conclusions remain conditional on two unresolved assumptions: that dropout is ignorable given baseline, and that the pooled contrast answers the question.</a:t>
             </a:r>
           </a:p>
         </p:txBody>
@@ -3319,6 +3779,174 @@
 </file>
 
 <file path=ppt/slides/slide12.xml><?xml version="1.0" encoding="utf-8"?>
+<p:sld xmlns:a="http://schemas.openxmlformats.org/drawingml/2006/main" xmlns:p="http://schemas.openxmlformats.org/presentationml/2006/main" xmlns:r="http://schemas.openxmlformats.org/officeDocument/2006/relationships">
+  <p:cSld>
+    <p:spTree>
+      <p:nvGrpSpPr>
+        <p:cNvPr id="1" name=""/>
+        <p:cNvGrpSpPr/>
+        <p:nvPr/>
+      </p:nvGrpSpPr>
+      <p:grpSpPr/>
+      <p:sp>
+        <p:nvSpPr>
+          <p:cNvPr id="2" name="TextBox 1"/>
+          <p:cNvSpPr txBox="1"/>
+          <p:nvPr/>
+        </p:nvSpPr>
+        <p:spPr>
+          <a:xfrm>
+            <a:off x="812800" y="406400"/>
+            <a:ext cx="10566400" cy="431800"/>
+          </a:xfrm>
+          <a:prstGeom prst="rect">
+            <a:avLst/>
+          </a:prstGeom>
+          <a:noFill/>
+        </p:spPr>
+        <p:txBody>
+          <a:bodyPr wrap="square">
+            <a:spAutoFit/>
+          </a:bodyPr>
+          <a:lstStyle/>
+          <a:p>
+            <a:r>
+              <a:rPr sz="1350" b="1">
+                <a:solidFill>
+                  <a:srgbClr val="111111"/>
+                </a:solidFill>
+              </a:rPr>
+              <a:t>6. Conclusions</a:t>
+            </a:r>
+          </a:p>
+        </p:txBody>
+      </p:sp>
+      <p:sp>
+        <p:nvSpPr>
+          <p:cNvPr id="3" name="TextBox 2"/>
+          <p:cNvSpPr txBox="1"/>
+          <p:nvPr/>
+        </p:nvSpPr>
+        <p:spPr>
+          <a:xfrm>
+            <a:off x="812800" y="914400"/>
+            <a:ext cx="10566400" cy="508000"/>
+          </a:xfrm>
+          <a:prstGeom prst="rect">
+            <a:avLst/>
+          </a:prstGeom>
+          <a:noFill/>
+        </p:spPr>
+        <p:txBody>
+          <a:bodyPr wrap="square">
+            <a:spAutoFit/>
+          </a:bodyPr>
+          <a:lstStyle/>
+          <a:p>
+            <a:r>
+              <a:rPr sz="1050" b="0">
+                <a:solidFill>
+                  <a:srgbClr val="111111"/>
+                </a:solidFill>
+              </a:rPr>
+              <a:t>The selection of a dose for phase III and the assessment of harm cannot be resolved with a single pooled figure, conditional on dropout being ignorable given baseline and the pooled contrast answering the question. For the 40 mg dose versus control among participants aged 51 and older, the estimated effect is 6.20 mmHg (90% WALD 3.98 to 8.42 mmHg), which sits on the unfavorable side of the threshold. Four other findings sit on the favorable side of the threshold. The 40 mg dose versus control in the age 25 to 35 band is -5.26 mmHg (90% WALD -8.17 to -2.36 mmHg). Across pooled age bands, the 10 mg dose versus control is -5.27 mmHg (90% WALD -6.63 to -3.91 mmHg). The pooled 20 mg dose versus control is -4.80 mmHg (90% WALD -6.17 to -3.44 mmHg). The pooled 40 mg dose versus control is -1.53 mmHg (90% WALD -2.97 to -0.10 mmHg). A single pooled summary averages harm in one age stratum with benefit in another. Consequently, the pooled figure is not a substitute for the stratum-specific estimates, and the disaggregated findings form the substantive result. The effect is identified via the backdoor route. These conclusions hold under the unresolved assumptions that dropout is ignorable given baseline and that the pooled contrast answers the question.</a:t>
+            </a:r>
+          </a:p>
+        </p:txBody>
+      </p:sp>
+    </p:spTree>
+  </p:cSld>
+  <p:clrMapOvr>
+    <a:masterClrMapping/>
+  </p:clrMapOvr>
+</p:sld>
+</file>
+
+<file path=ppt/slides/slide13.xml><?xml version="1.0" encoding="utf-8"?>
+<p:sld xmlns:a="http://schemas.openxmlformats.org/drawingml/2006/main" xmlns:p="http://schemas.openxmlformats.org/presentationml/2006/main" xmlns:r="http://schemas.openxmlformats.org/officeDocument/2006/relationships">
+  <p:cSld>
+    <p:spTree>
+      <p:nvGrpSpPr>
+        <p:cNvPr id="1" name=""/>
+        <p:cNvGrpSpPr/>
+        <p:nvPr/>
+      </p:nvGrpSpPr>
+      <p:grpSpPr/>
+      <p:sp>
+        <p:nvSpPr>
+          <p:cNvPr id="2" name="TextBox 1"/>
+          <p:cNvSpPr txBox="1"/>
+          <p:nvPr/>
+        </p:nvSpPr>
+        <p:spPr>
+          <a:xfrm>
+            <a:off x="812800" y="406400"/>
+            <a:ext cx="10566400" cy="431800"/>
+          </a:xfrm>
+          <a:prstGeom prst="rect">
+            <a:avLst/>
+          </a:prstGeom>
+          <a:noFill/>
+        </p:spPr>
+        <p:txBody>
+          <a:bodyPr wrap="square">
+            <a:spAutoFit/>
+          </a:bodyPr>
+          <a:lstStyle/>
+          <a:p>
+            <a:r>
+              <a:rPr sz="1350" b="1">
+                <a:solidFill>
+                  <a:srgbClr val="111111"/>
+                </a:solidFill>
+              </a:rPr>
+              <a:t>7. Limitations</a:t>
+            </a:r>
+          </a:p>
+        </p:txBody>
+      </p:sp>
+      <p:sp>
+        <p:nvSpPr>
+          <p:cNvPr id="3" name="TextBox 2"/>
+          <p:cNvSpPr txBox="1"/>
+          <p:nvPr/>
+        </p:nvSpPr>
+        <p:spPr>
+          <a:xfrm>
+            <a:off x="812800" y="914400"/>
+            <a:ext cx="10566400" cy="508000"/>
+          </a:xfrm>
+          <a:prstGeom prst="rect">
+            <a:avLst/>
+          </a:prstGeom>
+          <a:noFill/>
+        </p:spPr>
+        <p:txBody>
+          <a:bodyPr wrap="square">
+            <a:spAutoFit/>
+          </a:bodyPr>
+          <a:lstStyle/>
+          <a:p>
+            <a:r>
+              <a:rPr sz="1050" b="0">
+                <a:solidFill>
+                  <a:srgbClr val="111111"/>
+                </a:solidFill>
+              </a:rPr>
+              <a:t>Two unresolved assumptions perform inferential work that the data alone cannot settle. Stating each assumption explicitly identifies what it licenses and what would challenge its validity. The first assumption is that dropout is ignorable given baseline measurements. Under this condition, units who left the study are assumed to differ from those who remained only through characteristics recorded prior to randomization. This assumption licenses evaluating treatment effects from the observed outcomes conditional on baseline adjustments. The ignorability of dropout remains an assumption and has not been verified. It would be challenged by a tipping-point analysis evaluating plausible departures from ignorability. The second assumption is that the pooled contrast answers the decision question. This assumes that a single summary measure across all age bands adequately describes the effect under evaluation. It licenses relying on the aggregate contrast rather than stratum-specific estimates to guide dose selection. This assumption is known to fail. It is challenged by treatment effect heterogeneity across the pre-specified age strata.</a:t>
+            </a:r>
+          </a:p>
+        </p:txBody>
+      </p:sp>
+    </p:spTree>
+  </p:cSld>
+  <p:clrMapOvr>
+    <a:masterClrMapping/>
+  </p:clrMapOvr>
+</p:sld>
+</file>
+
+<file path=ppt/slides/slide14.xml><?xml version="1.0" encoding="utf-8"?>
 <p:sld xmlns:a="http://schemas.openxmlformats.org/drawingml/2006/main" xmlns:p="http://schemas.openxmlformats.org/presentationml/2006/main" xmlns:r="http://schemas.openxmlformats.org/officeDocument/2006/relationships">
   <p:cSld>
     <p:spTree>
@@ -4801,7 +5429,7 @@
                   <a:srgbClr val="111111"/>
                 </a:solidFill>
               </a:rPr>
-              <a:t>The study addresses which of three daily doses should go into phase III and whether any of them harms the people taking it. The effect of arm on change is identified via the backdoor route. Four hundred adults with elevated or stage-1 hypertension were randomized to standard of care or to one of three daily doses, stratified by age band. Seated systolic pressure was measured weekly, averaging readings inside windows for safety and primary endpoints. Each dose was compared with control by ANCOVA on the change from baseline, adjusting for baseline pressure and age band for pooled contrasts. Twelve harm contrasts were monitored against a posterior-probability boundary. For the pooled analysis, the 40 mg versus control contrast was -1.53 mmHg with a 90% WALD interval of -2.97 to -0.10 mmHg, the 20 mg versus control contrast was -4.80 mmHg with a 90% WALD interval of -6.17 to -3.44 mmHg, and the 10 mg versus control contrast was -5.27 mmHg with a 90% WALD interval of -6.63 to -3.91 mmHg. Within age bands, the 40 mg versus control contrast for age 51+ was 6.20 mmHg with a 90% WALD interval of 3.98 to 8.42 mmHg, and for age 25-35 was -5.26 mmHg with a 90% WALD interval of -8.17 to -2.36 mmHg. The analysis rests on the assumptions that dropout is ignorable given baseline and that the pooled contrast answers the question.</a:t>
+              <a:t>The study addresses which of three daily doses should go into phase III and whether any of them is harming the people taking it. The effect of arm on change is identified via the backdoor route. Four hundred adults with elevated or stage-1 hypertension were randomized to standard of care or to one of three daily doses, stratified by age band. Seated systolic pressure was measured weekly, with endpoints averaging readings inside windows. Each dose was compared with control by ANCOVA on the change from baseline, adjusting for baseline pressure and for age band when pooled. For the pooled analysis, the 40 mg dose compared with control was -1.53 mmHg (90% WALD -2.97 to -0.10 mmHg), the 20 mg dose compared with control was -4.80 mmHg (90% WALD -6.17 to -3.44 mmHg), and the 10 mg dose compared with control was -5.27 mmHg (90% WALD -6.63 to -3.91 mmHg). Subgroup analysis of the 40 mg dose compared with control yielded 6.20 mmHg (90% WALD 3.98 to 8.42 mmHg) for age 51+ and -5.26 mmHg (90% WALD -8.17 to -2.36 mmHg) for age 25-35. Twelve harm contrasts were monitored at scheduled safety reviews. The strongest standing assumptions are that dropout is ignorable given baseline and that the pooled contrast answers the question.</a:t>
             </a:r>
           </a:p>
         </p:txBody>
@@ -4814,7 +5442,7 @@
         </p:nvSpPr>
         <p:spPr>
           <a:xfrm>
-            <a:off x="812800" y="2082800"/>
+            <a:off x="812800" y="2006600"/>
             <a:ext cx="10566400" cy="508000"/>
           </a:xfrm>
           <a:prstGeom prst="rect">
@@ -4918,7 +5546,7 @@
                   <a:srgbClr val="111111"/>
                 </a:solidFill>
               </a:rPr>
-              <a:t>This study addresses which of three daily doses should go into phase III, and whether any of them is harming the people taking it. The primary evaluation turns on the pooled contrast of 40 mg versus control. The target effect of arm on change is identified via the backdoor route. The evaluation of this contrast turns on a reference value of 0.00 mmHg. What counts as an answer depends directly on the location of the interval estimate relative to that value. An interval lying wholly on one side of 0.00 mmHg settles the question. An interval spanning 0.00 mmHg leaves the question unsettled and does not indicate the absence of an effect. The conclusions remain conditional throughout the analysis. Two unresolved assumptions carry the identification of the target contrast. First, the analysis assumes that dropout is ignorable given baseline. Second, it assumes that the pooled contrast answers the question. Both assumptions are maintained across the methods and qualify the interpretation of the contrast.</a:t>
+              <a:t>This study evaluates which of three daily doses should advance to phase III and assesses whether any of the doses harms the participants taking it. The inquiry centers on the pooled contrast comparing the 40 mg dose against control. The decision criterion turns on a reference threshold of 0.00 mmHg. An interval estimate that lies entirely on one side of 0.00 mmHg settles the question. An interval that spans 0.00 mmHg leaves the question unsettled. In addition to average dose effects, the assessment requires determining whether harm occurs across the studied groups. The conclusions of the study are conditional throughout. Specifically, the findings depend on two unresolved assumptions: that dropout is ignorable given baseline and that the pooled contrast answers the question. These assumptions govern the interpretation of both the comparative efficacy and safety evaluations.</a:t>
             </a:r>
           </a:p>
         </p:txBody>
@@ -5002,7 +5630,7 @@
                   <a:srgbClr val="111111"/>
                 </a:solidFill>
               </a:rPr>
-              <a:t>The target of evaluation is the effect of arm on change, which is identified via the backdoor route. To evaluate which of three daily doses should advance to phase III and whether any dose causes harm, 400 adults with elevated or stage-1 hypertension were randomized 2:1:1:1 to standard of care or to one of three daily doses, stratified by age band. The design estimates three contrasts against a shared control rather than evaluating one dose against another. Seated systolic pressure was measured weekly. Both endpoints average readings inside a window—weeks 5–8 for safety and weeks 9–12 for the primary endpoint—rather than using a single visit. Averaging several correlated readings roughly halves the variance of a unit's endpoint, allowing safety boundaries to operate within individual strata. Each dose was compared with control by ANCOVA on the change from baseline, adjusting for baseline pressure, and additionally adjusting for age band when pooling across bands. Randomization licenses the intent-to-treat contrast, and adjusting for pre-randomization covariates improves precision without forfeiting identification. Twelve harm contrasts, evaluating each dose against control overall and inside each age band, were monitored at scheduled safety reviews against a posterior-probability boundary with a 2 mmHg clinical margin. Pre-specifying the age bands as monitored contrasts enables detection of stratum-specific harms before the trial ends. The validity of these procedures rests on the assumptions that dropout is ignorable given baseline and that the pooled contrast answers the target question.</a:t>
+              <a:t>The target of estimation is the effect of treatment arm on change in blood pressure, identified via the backdoor route. In the trial protocol, 400 adults with elevated or stage-1 hypertension were randomized 2:1:1:1 to standard of care or to one of three daily doses, stratified by age band. The design estimates three contrasts against a shared control rather than evaluating active doses against one another. Seated systolic pressure was measured weekly. Both study endpoints average readings across a window—weeks 5–8 for safety and weeks 9–12 for the primary endpoint—rather than relying on a single visit. Averaging correlated readings reduces the variance of an individual endpoint, enabling the safety boundary to operate within strata. Each dose was compared with control using ANCOVA on the change from baseline, adjusting for baseline pressure, and for age band when the contrast was pooled across bands. Randomization licenses the intent-to-treat contrast. Adjusting for pre-randomization covariates provides precision without altering the identification established by randomization. Twelve harm contrasts, evaluating each dose against control overall and within each age band, were monitored at scheduled safety reviews against a posterior-probability boundary with a 2 mmHg clinical margin. Pre-specifying the age bands as monitored contrasts permits harm within a specific stratum to be identified prior to study completion.</a:t>
             </a:r>
           </a:p>
         </p:txBody>
@@ -5015,7 +5643,7 @@
         </p:nvSpPr>
         <p:spPr>
           <a:xfrm>
-            <a:off x="812800" y="2235200"/>
+            <a:off x="812800" y="2159000"/>
             <a:ext cx="10566400" cy="508000"/>
           </a:xfrm>
           <a:prstGeom prst="rect">
@@ -5049,7 +5677,7 @@
           <p:nvPr/>
         </p:nvGraphicFramePr>
         <p:xfrm>
-          <a:off x="812800" y="2489200"/>
+          <a:off x="812800" y="2413000"/>
           <a:ext cx="10566400" cy="914400"/>
         </p:xfrm>
         <a:graphic>
@@ -5286,8 +5914,8 @@
         </p:nvSpPr>
         <p:spPr>
           <a:xfrm>
-            <a:off x="812800" y="3556000"/>
-            <a:ext cx="10566400" cy="2489200"/>
+            <a:off x="812800" y="3479800"/>
+            <a:ext cx="10566400" cy="2565400"/>
           </a:xfrm>
           <a:prstGeom prst="rect">
             <a:avLst/>
@@ -5337,6 +5965,987 @@
           </a:p>
         </p:txBody>
       </p:sp>
+      <p:graphicFrame>
+        <p:nvGraphicFramePr>
+          <p:cNvPr id="7" name="Table 6"/>
+          <p:cNvGraphicFramePr>
+            <a:graphicFrameLocks noGrp="1"/>
+          </p:cNvGraphicFramePr>
+          <p:nvPr/>
+        </p:nvGraphicFramePr>
+        <p:xfrm>
+          <a:off x="812800" y="4165600"/>
+          <a:ext cx="10566400" cy="1879600"/>
+        </p:xfrm>
+        <a:graphic>
+          <a:graphicData uri="http://schemas.openxmlformats.org/drawingml/2006/table">
+            <a:tbl>
+              <a:tblPr firstRow="1" bandRow="1">
+                <a:tableStyleId>{5C22544A-7EE6-4342-B048-85BDC9FD1C3A}</a:tableStyleId>
+              </a:tblPr>
+              <a:tblGrid>
+                <a:gridCol w="3522133"/>
+                <a:gridCol w="3522133"/>
+                <a:gridCol w="3522134"/>
+              </a:tblGrid>
+              <a:tr h="104422">
+                <a:tc>
+                  <a:txBody>
+                    <a:bodyPr/>
+                    <a:lstStyle/>
+                    <a:p>
+                      <a:r>
+                        <a:rPr sz="892" b="1">
+                          <a:solidFill>
+                            <a:srgbClr val="111111"/>
+                          </a:solidFill>
+                        </a:rPr>
+                        <a:t>Step</a:t>
+                      </a:r>
+                    </a:p>
+                  </a:txBody>
+                  <a:tcPr/>
+                </a:tc>
+                <a:tc>
+                  <a:txBody>
+                    <a:bodyPr/>
+                    <a:lstStyle/>
+                    <a:p>
+                      <a:r>
+                        <a:rPr sz="892" b="1">
+                          <a:solidFill>
+                            <a:srgbClr val="111111"/>
+                          </a:solidFill>
+                        </a:rPr>
+                        <a:t>Parameter</a:t>
+                      </a:r>
+                    </a:p>
+                  </a:txBody>
+                  <a:tcPr/>
+                </a:tc>
+                <a:tc>
+                  <a:txBody>
+                    <a:bodyPr/>
+                    <a:lstStyle/>
+                    <a:p>
+                      <a:r>
+                        <a:rPr sz="892" b="1">
+                          <a:solidFill>
+                            <a:srgbClr val="111111"/>
+                          </a:solidFill>
+                        </a:rPr>
+                        <a:t>Value</a:t>
+                      </a:r>
+                    </a:p>
+                  </a:txBody>
+                  <a:tcPr/>
+                </a:tc>
+              </a:tr>
+              <a:tr h="104422">
+                <a:tc>
+                  <a:txBody>
+                    <a:bodyPr/>
+                    <a:lstStyle/>
+                    <a:p>
+                      <a:r>
+                        <a:rPr sz="892" b="0">
+                          <a:solidFill>
+                            <a:srgbClr val="111111"/>
+                          </a:solidFill>
+                        </a:rPr>
+                        <a:t>Identification</a:t>
+                      </a:r>
+                    </a:p>
+                  </a:txBody>
+                  <a:tcPr/>
+                </a:tc>
+                <a:tc>
+                  <a:txBody>
+                    <a:bodyPr/>
+                    <a:lstStyle/>
+                    <a:p>
+                      <a:r>
+                        <a:rPr sz="892" b="0">
+                          <a:solidFill>
+                            <a:srgbClr val="111111"/>
+                          </a:solidFill>
+                        </a:rPr>
+                        <a:t>route</a:t>
+                      </a:r>
+                    </a:p>
+                  </a:txBody>
+                  <a:tcPr/>
+                </a:tc>
+                <a:tc>
+                  <a:txBody>
+                    <a:bodyPr/>
+                    <a:lstStyle/>
+                    <a:p>
+                      <a:r>
+                        <a:rPr sz="892" b="0">
+                          <a:solidFill>
+                            <a:srgbClr val="111111"/>
+                          </a:solidFill>
+                        </a:rPr>
+                        <a:t>backdoor</a:t>
+                      </a:r>
+                    </a:p>
+                  </a:txBody>
+                  <a:tcPr/>
+                </a:tc>
+              </a:tr>
+              <a:tr h="104422">
+                <a:tc>
+                  <a:txBody>
+                    <a:bodyPr/>
+                    <a:lstStyle/>
+                    <a:p>
+                      <a:r>
+                        <a:rPr sz="892" b="0">
+                          <a:solidFill>
+                            <a:srgbClr val="111111"/>
+                          </a:solidFill>
+                        </a:rPr>
+                        <a:t>Identification</a:t>
+                      </a:r>
+                    </a:p>
+                  </a:txBody>
+                  <a:tcPr/>
+                </a:tc>
+                <a:tc>
+                  <a:txBody>
+                    <a:bodyPr/>
+                    <a:lstStyle/>
+                    <a:p>
+                      <a:r>
+                        <a:rPr sz="892" b="0">
+                          <a:solidFill>
+                            <a:srgbClr val="111111"/>
+                          </a:solidFill>
+                        </a:rPr>
+                        <a:t>status</a:t>
+                      </a:r>
+                    </a:p>
+                  </a:txBody>
+                  <a:tcPr/>
+                </a:tc>
+                <a:tc>
+                  <a:txBody>
+                    <a:bodyPr/>
+                    <a:lstStyle/>
+                    <a:p>
+                      <a:r>
+                        <a:rPr sz="892" b="0">
+                          <a:solidFill>
+                            <a:srgbClr val="111111"/>
+                          </a:solidFill>
+                        </a:rPr>
+                        <a:t>identified</a:t>
+                      </a:r>
+                    </a:p>
+                  </a:txBody>
+                  <a:tcPr/>
+                </a:tc>
+              </a:tr>
+              <a:tr h="104422">
+                <a:tc>
+                  <a:txBody>
+                    <a:bodyPr/>
+                    <a:lstStyle/>
+                    <a:p>
+                      <a:r>
+                        <a:rPr sz="892" b="0">
+                          <a:solidFill>
+                            <a:srgbClr val="111111"/>
+                          </a:solidFill>
+                        </a:rPr>
+                        <a:t>Protocol</a:t>
+                      </a:r>
+                    </a:p>
+                  </a:txBody>
+                  <a:tcPr/>
+                </a:tc>
+                <a:tc>
+                  <a:txBody>
+                    <a:bodyPr/>
+                    <a:lstStyle/>
+                    <a:p>
+                      <a:r>
+                        <a:rPr sz="892" b="0">
+                          <a:solidFill>
+                            <a:srgbClr val="111111"/>
+                          </a:solidFill>
+                        </a:rPr>
+                        <a:t>allocation</a:t>
+                      </a:r>
+                    </a:p>
+                  </a:txBody>
+                  <a:tcPr/>
+                </a:tc>
+                <a:tc>
+                  <a:txBody>
+                    <a:bodyPr/>
+                    <a:lstStyle/>
+                    <a:p>
+                      <a:r>
+                        <a:rPr sz="892" b="0">
+                          <a:solidFill>
+                            <a:srgbClr val="111111"/>
+                          </a:solidFill>
+                        </a:rPr>
+                        <a:t>2:1:1:1</a:t>
+                      </a:r>
+                    </a:p>
+                  </a:txBody>
+                  <a:tcPr/>
+                </a:tc>
+              </a:tr>
+              <a:tr h="104422">
+                <a:tc>
+                  <a:txBody>
+                    <a:bodyPr/>
+                    <a:lstStyle/>
+                    <a:p>
+                      <a:r>
+                        <a:rPr sz="892" b="0">
+                          <a:solidFill>
+                            <a:srgbClr val="111111"/>
+                          </a:solidFill>
+                        </a:rPr>
+                        <a:t>Protocol</a:t>
+                      </a:r>
+                    </a:p>
+                  </a:txBody>
+                  <a:tcPr/>
+                </a:tc>
+                <a:tc>
+                  <a:txBody>
+                    <a:bodyPr/>
+                    <a:lstStyle/>
+                    <a:p>
+                      <a:r>
+                        <a:rPr sz="892" b="0">
+                          <a:solidFill>
+                            <a:srgbClr val="111111"/>
+                          </a:solidFill>
+                        </a:rPr>
+                        <a:t>arms</a:t>
+                      </a:r>
+                    </a:p>
+                  </a:txBody>
+                  <a:tcPr/>
+                </a:tc>
+                <a:tc>
+                  <a:txBody>
+                    <a:bodyPr/>
+                    <a:lstStyle/>
+                    <a:p>
+                      <a:r>
+                        <a:rPr sz="892" b="0">
+                          <a:solidFill>
+                            <a:srgbClr val="111111"/>
+                          </a:solidFill>
+                        </a:rPr>
+                        <a:t>standard_of_care, dose_10, dose_20, dose_40</a:t>
+                      </a:r>
+                    </a:p>
+                  </a:txBody>
+                  <a:tcPr/>
+                </a:tc>
+              </a:tr>
+              <a:tr h="104422">
+                <a:tc>
+                  <a:txBody>
+                    <a:bodyPr/>
+                    <a:lstStyle/>
+                    <a:p>
+                      <a:r>
+                        <a:rPr sz="892" b="0">
+                          <a:solidFill>
+                            <a:srgbClr val="111111"/>
+                          </a:solidFill>
+                        </a:rPr>
+                        <a:t>Protocol</a:t>
+                      </a:r>
+                    </a:p>
+                  </a:txBody>
+                  <a:tcPr/>
+                </a:tc>
+                <a:tc>
+                  <a:txBody>
+                    <a:bodyPr/>
+                    <a:lstStyle/>
+                    <a:p>
+                      <a:r>
+                        <a:rPr sz="892" b="0">
+                          <a:solidFill>
+                            <a:srgbClr val="111111"/>
+                          </a:solidFill>
+                        </a:rPr>
+                        <a:t>enrollment weeks</a:t>
+                      </a:r>
+                    </a:p>
+                  </a:txBody>
+                  <a:tcPr/>
+                </a:tc>
+                <a:tc>
+                  <a:txBody>
+                    <a:bodyPr/>
+                    <a:lstStyle/>
+                    <a:p>
+                      <a:r>
+                        <a:rPr sz="892" b="0">
+                          <a:solidFill>
+                            <a:srgbClr val="111111"/>
+                          </a:solidFill>
+                        </a:rPr>
+                        <a:t>16</a:t>
+                      </a:r>
+                    </a:p>
+                  </a:txBody>
+                  <a:tcPr/>
+                </a:tc>
+              </a:tr>
+              <a:tr h="104422">
+                <a:tc>
+                  <a:txBody>
+                    <a:bodyPr/>
+                    <a:lstStyle/>
+                    <a:p>
+                      <a:r>
+                        <a:rPr sz="892" b="0">
+                          <a:solidFill>
+                            <a:srgbClr val="111111"/>
+                          </a:solidFill>
+                        </a:rPr>
+                        <a:t>Protocol</a:t>
+                      </a:r>
+                    </a:p>
+                  </a:txBody>
+                  <a:tcPr/>
+                </a:tc>
+                <a:tc>
+                  <a:txBody>
+                    <a:bodyPr/>
+                    <a:lstStyle/>
+                    <a:p>
+                      <a:r>
+                        <a:rPr sz="892" b="0">
+                          <a:solidFill>
+                            <a:srgbClr val="111111"/>
+                          </a:solidFill>
+                        </a:rPr>
+                        <a:t>follow-up weeks</a:t>
+                      </a:r>
+                    </a:p>
+                  </a:txBody>
+                  <a:tcPr/>
+                </a:tc>
+                <a:tc>
+                  <a:txBody>
+                    <a:bodyPr/>
+                    <a:lstStyle/>
+                    <a:p>
+                      <a:r>
+                        <a:rPr sz="892" b="0">
+                          <a:solidFill>
+                            <a:srgbClr val="111111"/>
+                          </a:solidFill>
+                        </a:rPr>
+                        <a:t>24</a:t>
+                      </a:r>
+                    </a:p>
+                  </a:txBody>
+                  <a:tcPr/>
+                </a:tc>
+              </a:tr>
+              <a:tr h="104422">
+                <a:tc>
+                  <a:txBody>
+                    <a:bodyPr/>
+                    <a:lstStyle/>
+                    <a:p>
+                      <a:r>
+                        <a:rPr sz="892" b="0">
+                          <a:solidFill>
+                            <a:srgbClr val="111111"/>
+                          </a:solidFill>
+                        </a:rPr>
+                        <a:t>Protocol</a:t>
+                      </a:r>
+                    </a:p>
+                  </a:txBody>
+                  <a:tcPr/>
+                </a:tc>
+                <a:tc>
+                  <a:txBody>
+                    <a:bodyPr/>
+                    <a:lstStyle/>
+                    <a:p>
+                      <a:r>
+                        <a:rPr sz="892" b="0">
+                          <a:solidFill>
+                            <a:srgbClr val="111111"/>
+                          </a:solidFill>
+                        </a:rPr>
+                        <a:t>primary endpoint week</a:t>
+                      </a:r>
+                    </a:p>
+                  </a:txBody>
+                  <a:tcPr/>
+                </a:tc>
+                <a:tc>
+                  <a:txBody>
+                    <a:bodyPr/>
+                    <a:lstStyle/>
+                    <a:p>
+                      <a:r>
+                        <a:rPr sz="892" b="0">
+                          <a:solidFill>
+                            <a:srgbClr val="111111"/>
+                          </a:solidFill>
+                        </a:rPr>
+                        <a:t>12</a:t>
+                      </a:r>
+                    </a:p>
+                  </a:txBody>
+                  <a:tcPr/>
+                </a:tc>
+              </a:tr>
+              <a:tr h="104422">
+                <a:tc>
+                  <a:txBody>
+                    <a:bodyPr/>
+                    <a:lstStyle/>
+                    <a:p>
+                      <a:r>
+                        <a:rPr sz="892" b="0">
+                          <a:solidFill>
+                            <a:srgbClr val="111111"/>
+                          </a:solidFill>
+                        </a:rPr>
+                        <a:t>Protocol</a:t>
+                      </a:r>
+                    </a:p>
+                  </a:txBody>
+                  <a:tcPr/>
+                </a:tc>
+                <a:tc>
+                  <a:txBody>
+                    <a:bodyPr/>
+                    <a:lstStyle/>
+                    <a:p>
+                      <a:r>
+                        <a:rPr sz="892" b="0">
+                          <a:solidFill>
+                            <a:srgbClr val="111111"/>
+                          </a:solidFill>
+                        </a:rPr>
+                        <a:t>strata</a:t>
+                      </a:r>
+                    </a:p>
+                  </a:txBody>
+                  <a:tcPr/>
+                </a:tc>
+                <a:tc>
+                  <a:txBody>
+                    <a:bodyPr/>
+                    <a:lstStyle/>
+                    <a:p>
+                      <a:r>
+                        <a:rPr sz="892" b="0">
+                          <a:solidFill>
+                            <a:srgbClr val="111111"/>
+                          </a:solidFill>
+                        </a:rPr>
+                        <a:t>age_25_35, age_36_50, age_51_plus</a:t>
+                      </a:r>
+                    </a:p>
+                  </a:txBody>
+                  <a:tcPr/>
+                </a:tc>
+              </a:tr>
+              <a:tr h="104422">
+                <a:tc>
+                  <a:txBody>
+                    <a:bodyPr/>
+                    <a:lstStyle/>
+                    <a:p>
+                      <a:r>
+                        <a:rPr sz="892" b="0">
+                          <a:solidFill>
+                            <a:srgbClr val="111111"/>
+                          </a:solidFill>
+                        </a:rPr>
+                        <a:t>Protocol</a:t>
+                      </a:r>
+                    </a:p>
+                  </a:txBody>
+                  <a:tcPr/>
+                </a:tc>
+                <a:tc>
+                  <a:txBody>
+                    <a:bodyPr/>
+                    <a:lstStyle/>
+                    <a:p>
+                      <a:r>
+                        <a:rPr sz="892" b="0">
+                          <a:solidFill>
+                            <a:srgbClr val="111111"/>
+                          </a:solidFill>
+                        </a:rPr>
+                        <a:t>units randomized</a:t>
+                      </a:r>
+                    </a:p>
+                  </a:txBody>
+                  <a:tcPr/>
+                </a:tc>
+                <a:tc>
+                  <a:txBody>
+                    <a:bodyPr/>
+                    <a:lstStyle/>
+                    <a:p>
+                      <a:r>
+                        <a:rPr sz="892" b="0">
+                          <a:solidFill>
+                            <a:srgbClr val="111111"/>
+                          </a:solidFill>
+                        </a:rPr>
+                        <a:t>400</a:t>
+                      </a:r>
+                    </a:p>
+                  </a:txBody>
+                  <a:tcPr/>
+                </a:tc>
+              </a:tr>
+              <a:tr h="104422">
+                <a:tc>
+                  <a:txBody>
+                    <a:bodyPr/>
+                    <a:lstStyle/>
+                    <a:p>
+                      <a:r>
+                        <a:rPr sz="892" b="0">
+                          <a:solidFill>
+                            <a:srgbClr val="111111"/>
+                          </a:solidFill>
+                        </a:rPr>
+                        <a:t>Measurement</a:t>
+                      </a:r>
+                    </a:p>
+                  </a:txBody>
+                  <a:tcPr/>
+                </a:tc>
+                <a:tc>
+                  <a:txBody>
+                    <a:bodyPr/>
+                    <a:lstStyle/>
+                    <a:p>
+                      <a:r>
+                        <a:rPr sz="892" b="0">
+                          <a:solidFill>
+                            <a:srgbClr val="111111"/>
+                          </a:solidFill>
+                        </a:rPr>
+                        <a:t>minimum visits in window</a:t>
+                      </a:r>
+                    </a:p>
+                  </a:txBody>
+                  <a:tcPr/>
+                </a:tc>
+                <a:tc>
+                  <a:txBody>
+                    <a:bodyPr/>
+                    <a:lstStyle/>
+                    <a:p>
+                      <a:r>
+                        <a:rPr sz="892" b="0">
+                          <a:solidFill>
+                            <a:srgbClr val="111111"/>
+                          </a:solidFill>
+                        </a:rPr>
+                        <a:t>3</a:t>
+                      </a:r>
+                    </a:p>
+                  </a:txBody>
+                  <a:tcPr/>
+                </a:tc>
+              </a:tr>
+              <a:tr h="104422">
+                <a:tc>
+                  <a:txBody>
+                    <a:bodyPr/>
+                    <a:lstStyle/>
+                    <a:p>
+                      <a:r>
+                        <a:rPr sz="892" b="0">
+                          <a:solidFill>
+                            <a:srgbClr val="111111"/>
+                          </a:solidFill>
+                        </a:rPr>
+                        <a:t>Measurement</a:t>
+                      </a:r>
+                    </a:p>
+                  </a:txBody>
+                  <a:tcPr/>
+                </a:tc>
+                <a:tc>
+                  <a:txBody>
+                    <a:bodyPr/>
+                    <a:lstStyle/>
+                    <a:p>
+                      <a:r>
+                        <a:rPr sz="892" b="0">
+                          <a:solidFill>
+                            <a:srgbClr val="111111"/>
+                          </a:solidFill>
+                        </a:rPr>
+                        <a:t>retention at final week</a:t>
+                      </a:r>
+                    </a:p>
+                  </a:txBody>
+                  <a:tcPr/>
+                </a:tc>
+                <a:tc>
+                  <a:txBody>
+                    <a:bodyPr/>
+                    <a:lstStyle/>
+                    <a:p>
+                      <a:r>
+                        <a:rPr sz="892" b="0">
+                          <a:solidFill>
+                            <a:srgbClr val="111111"/>
+                          </a:solidFill>
+                        </a:rPr>
+                        <a:t>79.8%</a:t>
+                      </a:r>
+                    </a:p>
+                  </a:txBody>
+                  <a:tcPr/>
+                </a:tc>
+              </a:tr>
+              <a:tr h="104422">
+                <a:tc>
+                  <a:txBody>
+                    <a:bodyPr/>
+                    <a:lstStyle/>
+                    <a:p>
+                      <a:r>
+                        <a:rPr sz="892" b="0">
+                          <a:solidFill>
+                            <a:srgbClr val="111111"/>
+                          </a:solidFill>
+                        </a:rPr>
+                        <a:t>Analysis</a:t>
+                      </a:r>
+                    </a:p>
+                  </a:txBody>
+                  <a:tcPr/>
+                </a:tc>
+                <a:tc>
+                  <a:txBody>
+                    <a:bodyPr/>
+                    <a:lstStyle/>
+                    <a:p>
+                      <a:r>
+                        <a:rPr sz="892" b="0">
+                          <a:solidFill>
+                            <a:srgbClr val="111111"/>
+                          </a:solidFill>
+                        </a:rPr>
+                        <a:t>estimator</a:t>
+                      </a:r>
+                    </a:p>
+                  </a:txBody>
+                  <a:tcPr/>
+                </a:tc>
+                <a:tc>
+                  <a:txBody>
+                    <a:bodyPr/>
+                    <a:lstStyle/>
+                    <a:p>
+                      <a:r>
+                        <a:rPr sz="892" b="0">
+                          <a:solidFill>
+                            <a:srgbClr val="111111"/>
+                          </a:solidFill>
+                        </a:rPr>
+                        <a:t>ANCOVA (OLS on change, baseline-adjusted)</a:t>
+                      </a:r>
+                    </a:p>
+                  </a:txBody>
+                  <a:tcPr/>
+                </a:tc>
+              </a:tr>
+              <a:tr h="104422">
+                <a:tc>
+                  <a:txBody>
+                    <a:bodyPr/>
+                    <a:lstStyle/>
+                    <a:p>
+                      <a:r>
+                        <a:rPr sz="892" b="0">
+                          <a:solidFill>
+                            <a:srgbClr val="111111"/>
+                          </a:solidFill>
+                        </a:rPr>
+                        <a:t>Analysis</a:t>
+                      </a:r>
+                    </a:p>
+                  </a:txBody>
+                  <a:tcPr/>
+                </a:tc>
+                <a:tc>
+                  <a:txBody>
+                    <a:bodyPr/>
+                    <a:lstStyle/>
+                    <a:p>
+                      <a:r>
+                        <a:rPr sz="892" b="0">
+                          <a:solidFill>
+                            <a:srgbClr val="111111"/>
+                          </a:solidFill>
+                        </a:rPr>
+                        <a:t>interval mass</a:t>
+                      </a:r>
+                    </a:p>
+                  </a:txBody>
+                  <a:tcPr/>
+                </a:tc>
+                <a:tc>
+                  <a:txBody>
+                    <a:bodyPr/>
+                    <a:lstStyle/>
+                    <a:p>
+                      <a:r>
+                        <a:rPr sz="892" b="0">
+                          <a:solidFill>
+                            <a:srgbClr val="111111"/>
+                          </a:solidFill>
+                        </a:rPr>
+                        <a:t>90%</a:t>
+                      </a:r>
+                    </a:p>
+                  </a:txBody>
+                  <a:tcPr/>
+                </a:tc>
+              </a:tr>
+              <a:tr h="104422">
+                <a:tc>
+                  <a:txBody>
+                    <a:bodyPr/>
+                    <a:lstStyle/>
+                    <a:p>
+                      <a:r>
+                        <a:rPr sz="892" b="0">
+                          <a:solidFill>
+                            <a:srgbClr val="111111"/>
+                          </a:solidFill>
+                        </a:rPr>
+                        <a:t>Analysis</a:t>
+                      </a:r>
+                    </a:p>
+                  </a:txBody>
+                  <a:tcPr/>
+                </a:tc>
+                <a:tc>
+                  <a:txBody>
+                    <a:bodyPr/>
+                    <a:lstStyle/>
+                    <a:p>
+                      <a:r>
+                        <a:rPr sz="892" b="0">
+                          <a:solidFill>
+                            <a:srgbClr val="111111"/>
+                          </a:solidFill>
+                        </a:rPr>
+                        <a:t>pooled covariates</a:t>
+                      </a:r>
+                    </a:p>
+                  </a:txBody>
+                  <a:tcPr/>
+                </a:tc>
+                <a:tc>
+                  <a:txBody>
+                    <a:bodyPr/>
+                    <a:lstStyle/>
+                    <a:p>
+                      <a:r>
+                        <a:rPr sz="892" b="0">
+                          <a:solidFill>
+                            <a:srgbClr val="111111"/>
+                          </a:solidFill>
+                        </a:rPr>
+                        <a:t>baseline_centred, is_age_36_50, is_age_51_plus</a:t>
+                      </a:r>
+                    </a:p>
+                  </a:txBody>
+                  <a:tcPr/>
+                </a:tc>
+              </a:tr>
+              <a:tr h="104422">
+                <a:tc>
+                  <a:txBody>
+                    <a:bodyPr/>
+                    <a:lstStyle/>
+                    <a:p>
+                      <a:r>
+                        <a:rPr sz="892" b="0">
+                          <a:solidFill>
+                            <a:srgbClr val="111111"/>
+                          </a:solidFill>
+                        </a:rPr>
+                        <a:t>Analysis</a:t>
+                      </a:r>
+                    </a:p>
+                  </a:txBody>
+                  <a:tcPr/>
+                </a:tc>
+                <a:tc>
+                  <a:txBody>
+                    <a:bodyPr/>
+                    <a:lstStyle/>
+                    <a:p>
+                      <a:r>
+                        <a:rPr sz="892" b="0">
+                          <a:solidFill>
+                            <a:srgbClr val="111111"/>
+                          </a:solidFill>
+                        </a:rPr>
+                        <a:t>within-stratum covariates</a:t>
+                      </a:r>
+                    </a:p>
+                  </a:txBody>
+                  <a:tcPr/>
+                </a:tc>
+                <a:tc>
+                  <a:txBody>
+                    <a:bodyPr/>
+                    <a:lstStyle/>
+                    <a:p>
+                      <a:r>
+                        <a:rPr sz="892" b="0">
+                          <a:solidFill>
+                            <a:srgbClr val="111111"/>
+                          </a:solidFill>
+                        </a:rPr>
+                        <a:t>baseline_centred</a:t>
+                      </a:r>
+                    </a:p>
+                  </a:txBody>
+                  <a:tcPr/>
+                </a:tc>
+              </a:tr>
+              <a:tr h="104422">
+                <a:tc>
+                  <a:txBody>
+                    <a:bodyPr/>
+                    <a:lstStyle/>
+                    <a:p>
+                      <a:r>
+                        <a:rPr sz="892" b="0">
+                          <a:solidFill>
+                            <a:srgbClr val="111111"/>
+                          </a:solidFill>
+                        </a:rPr>
+                        <a:t>Safety monitoring</a:t>
+                      </a:r>
+                    </a:p>
+                  </a:txBody>
+                  <a:tcPr/>
+                </a:tc>
+                <a:tc>
+                  <a:txBody>
+                    <a:bodyPr/>
+                    <a:lstStyle/>
+                    <a:p>
+                      <a:r>
+                        <a:rPr sz="892" b="0">
+                          <a:solidFill>
+                            <a:srgbClr val="111111"/>
+                          </a:solidFill>
+                        </a:rPr>
+                        <a:t>clinical margin (mmHg)</a:t>
+                      </a:r>
+                    </a:p>
+                  </a:txBody>
+                  <a:tcPr/>
+                </a:tc>
+                <a:tc>
+                  <a:txBody>
+                    <a:bodyPr/>
+                    <a:lstStyle/>
+                    <a:p>
+                      <a:r>
+                        <a:rPr sz="892" b="0">
+                          <a:solidFill>
+                            <a:srgbClr val="111111"/>
+                          </a:solidFill>
+                        </a:rPr>
+                        <a:t>2</a:t>
+                      </a:r>
+                    </a:p>
+                  </a:txBody>
+                  <a:tcPr/>
+                </a:tc>
+              </a:tr>
+              <a:tr h="104426">
+                <a:tc>
+                  <a:txBody>
+                    <a:bodyPr/>
+                    <a:lstStyle/>
+                    <a:p>
+                      <a:r>
+                        <a:rPr sz="892" b="0">
+                          <a:solidFill>
+                            <a:srgbClr val="111111"/>
+                          </a:solidFill>
+                        </a:rPr>
+                        <a:t>Safety monitoring</a:t>
+                      </a:r>
+                    </a:p>
+                  </a:txBody>
+                  <a:tcPr/>
+                </a:tc>
+                <a:tc>
+                  <a:txBody>
+                    <a:bodyPr/>
+                    <a:lstStyle/>
+                    <a:p>
+                      <a:r>
+                        <a:rPr sz="892" b="0">
+                          <a:solidFill>
+                            <a:srgbClr val="111111"/>
+                          </a:solidFill>
+                        </a:rPr>
+                        <a:t>monitored contrasts</a:t>
+                      </a:r>
+                    </a:p>
+                  </a:txBody>
+                  <a:tcPr/>
+                </a:tc>
+                <a:tc>
+                  <a:txBody>
+                    <a:bodyPr/>
+                    <a:lstStyle/>
+                    <a:p>
+                      <a:r>
+                        <a:rPr sz="892" b="0">
+                          <a:solidFill>
+                            <a:srgbClr val="111111"/>
+                          </a:solidFill>
+                        </a:rPr>
+                        <a:t>12</a:t>
+                      </a:r>
+                    </a:p>
+                  </a:txBody>
+                  <a:tcPr/>
+                </a:tc>
+              </a:tr>
+            </a:tbl>
+          </a:graphicData>
+        </a:graphic>
+      </p:graphicFrame>
     </p:spTree>
   </p:cSld>
   <p:clrMapOvr>
@@ -5628,7 +7237,7 @@
                   <a:srgbClr val="111111"/>
                 </a:solidFill>
               </a:rPr>
-              <a:t>The estimated effect of the 40 mg dose versus control, pooled across age bands, is -1.53 mmHg (90% WALD -2.97 to -0.10 mmHg). For the age 51 and older band, the estimated effect of 40 mg versus control is 6.20 mmHg (90% WALD 3.98 to 8.42 mmHg).</a:t>
+              <a:t>The pooled estimate for 40 mg versus control is -1.53 mmHg (90% Wald interval, -2.97 to -0.10 mmHg). For participants aged 51 and older, the estimated contrast for 40 mg versus control is 6.20 mmHg (90% Wald interval, 3.98 to 8.42 mmHg).</a:t>
             </a:r>
           </a:p>
         </p:txBody>
@@ -5783,21 +7392,45 @@
                   <a:srgbClr val="111111"/>
                 </a:solidFill>
               </a:rPr>
-              <a:t>4. Model checking</a:t>
-            </a:r>
-          </a:p>
-        </p:txBody>
-      </p:sp>
-      <p:sp>
-        <p:nvSpPr>
-          <p:cNvPr id="3" name="TextBox 2"/>
-          <p:cNvSpPr txBox="1"/>
+              <a:t>3. Results (cont.)</a:t>
+            </a:r>
+          </a:p>
+        </p:txBody>
+      </p:sp>
+      <p:pic>
+        <p:nvPicPr>
+          <p:cNvPr id="3" name="Picture 2" descr="image.png"/>
+          <p:cNvPicPr>
+            <a:picLocks noChangeAspect="1"/>
+          </p:cNvPicPr>
           <p:nvPr/>
-        </p:nvSpPr>
+        </p:nvPicPr>
+        <p:blipFill>
+          <a:blip r:embed="rId2"/>
+          <a:stretch>
+            <a:fillRect/>
+          </a:stretch>
+        </p:blipFill>
         <p:spPr>
           <a:xfrm>
             <a:off x="812800" y="914400"/>
-            <a:ext cx="2540000" cy="889000"/>
+            <a:ext cx="9122190" cy="5130800"/>
+          </a:xfrm>
+          <a:prstGeom prst="rect">
+            <a:avLst/>
+          </a:prstGeom>
+        </p:spPr>
+      </p:pic>
+      <p:sp>
+        <p:nvSpPr>
+          <p:cNvPr id="4" name="TextBox 3"/>
+          <p:cNvSpPr txBox="1"/>
+          <p:nvPr/>
+        </p:nvSpPr>
+        <p:spPr>
+          <a:xfrm>
+            <a:off x="812800" y="6126480"/>
+            <a:ext cx="10566400" cy="254000"/>
           </a:xfrm>
           <a:prstGeom prst="rect">
             <a:avLst/>
@@ -5816,179 +7449,7 @@
                   <a:srgbClr val="555555"/>
                 </a:solidFill>
               </a:rPr>
-              <a:t>UNITS STILL ON STUDY AT THE FINAL WEEK</a:t>
-            </a:r>
-          </a:p>
-          <a:p>
-            <a:r>
-              <a:rPr sz="1520" b="1">
-                <a:solidFill>
-                  <a:srgbClr val="1A1A1A"/>
-                </a:solidFill>
-              </a:rPr>
-              <a:t>0.797</a:t>
-            </a:r>
-          </a:p>
-        </p:txBody>
-      </p:sp>
-      <p:sp>
-        <p:nvSpPr>
-          <p:cNvPr id="4" name="TextBox 3"/>
-          <p:cNvSpPr txBox="1"/>
-          <p:nvPr/>
-        </p:nvSpPr>
-        <p:spPr>
-          <a:xfrm>
-            <a:off x="3454400" y="914400"/>
-            <a:ext cx="2540000" cy="889000"/>
-          </a:xfrm>
-          <a:prstGeom prst="rect">
-            <a:avLst/>
-          </a:prstGeom>
-          <a:noFill/>
-        </p:spPr>
-        <p:txBody>
-          <a:bodyPr wrap="square">
-            <a:spAutoFit/>
-          </a:bodyPr>
-          <a:lstStyle/>
-          <a:p>
-            <a:r>
-              <a:rPr sz="892" b="0">
-                <a:solidFill>
-                  <a:srgbClr val="555555"/>
-                </a:solidFill>
-              </a:rPr>
-              <a:t>UNITS CONTRIBUTING TO THE PRIMARY ENDPOINT</a:t>
-            </a:r>
-          </a:p>
-          <a:p>
-            <a:r>
-              <a:rPr sz="1520" b="1">
-                <a:solidFill>
-                  <a:srgbClr val="1A1A1A"/>
-                </a:solidFill>
-              </a:rPr>
-              <a:t>372</a:t>
-            </a:r>
-          </a:p>
-        </p:txBody>
-      </p:sp>
-      <p:sp>
-        <p:nvSpPr>
-          <p:cNvPr id="5" name="TextBox 4"/>
-          <p:cNvSpPr txBox="1"/>
-          <p:nvPr/>
-        </p:nvSpPr>
-        <p:spPr>
-          <a:xfrm>
-            <a:off x="6096000" y="914400"/>
-            <a:ext cx="2540000" cy="889000"/>
-          </a:xfrm>
-          <a:prstGeom prst="rect">
-            <a:avLst/>
-          </a:prstGeom>
-          <a:noFill/>
-        </p:spPr>
-        <p:txBody>
-          <a:bodyPr wrap="square">
-            <a:spAutoFit/>
-          </a:bodyPr>
-          <a:lstStyle/>
-          <a:p>
-            <a:r>
-              <a:rPr sz="892" b="0">
-                <a:solidFill>
-                  <a:srgbClr val="555555"/>
-                </a:solidFill>
-              </a:rPr>
-              <a:t>UNITS RANDOMIZED IN BAND AGE 25 35</a:t>
-            </a:r>
-          </a:p>
-          <a:p>
-            <a:r>
-              <a:rPr sz="1520" b="1">
-                <a:solidFill>
-                  <a:srgbClr val="1A1A1A"/>
-                </a:solidFill>
-              </a:rPr>
-              <a:t>100</a:t>
-            </a:r>
-          </a:p>
-        </p:txBody>
-      </p:sp>
-      <p:sp>
-        <p:nvSpPr>
-          <p:cNvPr id="6" name="TextBox 5"/>
-          <p:cNvSpPr txBox="1"/>
-          <p:nvPr/>
-        </p:nvSpPr>
-        <p:spPr>
-          <a:xfrm>
-            <a:off x="8737600" y="914400"/>
-            <a:ext cx="2540000" cy="889000"/>
-          </a:xfrm>
-          <a:prstGeom prst="rect">
-            <a:avLst/>
-          </a:prstGeom>
-          <a:noFill/>
-        </p:spPr>
-        <p:txBody>
-          <a:bodyPr wrap="square">
-            <a:spAutoFit/>
-          </a:bodyPr>
-          <a:lstStyle/>
-          <a:p>
-            <a:r>
-              <a:rPr sz="892" b="0">
-                <a:solidFill>
-                  <a:srgbClr val="555555"/>
-                </a:solidFill>
-              </a:rPr>
-              <a:t>UNITS RANDOMIZED IN BAND AGE 36 50</a:t>
-            </a:r>
-          </a:p>
-          <a:p>
-            <a:r>
-              <a:rPr sz="1520" b="1">
-                <a:solidFill>
-                  <a:srgbClr val="1A1A1A"/>
-                </a:solidFill>
-              </a:rPr>
-              <a:t>160</a:t>
-            </a:r>
-          </a:p>
-        </p:txBody>
-      </p:sp>
-      <p:sp>
-        <p:nvSpPr>
-          <p:cNvPr id="7" name="TextBox 6"/>
-          <p:cNvSpPr txBox="1"/>
-          <p:nvPr/>
-        </p:nvSpPr>
-        <p:spPr>
-          <a:xfrm>
-            <a:off x="812800" y="1955800"/>
-            <a:ext cx="10566400" cy="508000"/>
-          </a:xfrm>
-          <a:prstGeom prst="rect">
-            <a:avLst/>
-          </a:prstGeom>
-          <a:noFill/>
-        </p:spPr>
-        <p:txBody>
-          <a:bodyPr wrap="square">
-            <a:spAutoFit/>
-          </a:bodyPr>
-          <a:lstStyle/>
-          <a:p>
-            <a:r>
-              <a:rPr sz="1050" b="0">
-                <a:solidFill>
-                  <a:srgbClr val="111111"/>
-                </a:solidFill>
-              </a:rPr>
-              <a:t>Model checking evaluates the fit of the analysis rather than the treatment effects. These diagnostics describe data behavior and sample retention across the study. Across all arms, 372 units contributed to the primary endpoint. The proportion of units still on study at the final week was 0.797. In the age strata, 100 units were randomized in band age 25 35. A total of 160 units were randomized in band age 36 50. In band age 51 plus, 140 units were randomized. The analysis leaves as an unresolved assumption that dropout is ignorable given baseline. A second unresolved assumption is that the pooled contrast answers the question. Diagnostic measures assess the consistency of the data with the fitted specification. These checks can only reduce confidence in the estimated numbers when discrepancies arise, never establish them. Meeting these diagnostics indicates the absence of detected fit failures rather than verification of the model assumptions.</a:t>
+              <a:t>Figure 1. Estimated quantities with their intervals</a:t>
             </a:r>
           </a:p>
         </p:txBody>
@@ -6039,54 +7500,665 @@
                   <a:srgbClr val="111111"/>
                 </a:solidFill>
               </a:rPr>
-              <a:t>4. Model checking (cont.)</a:t>
-            </a:r>
-          </a:p>
-        </p:txBody>
-      </p:sp>
-      <p:sp>
-        <p:nvSpPr>
-          <p:cNvPr id="3" name="TextBox 2"/>
-          <p:cNvSpPr txBox="1"/>
+              <a:t>3. Results (cont.)</a:t>
+            </a:r>
+          </a:p>
+        </p:txBody>
+      </p:sp>
+      <p:graphicFrame>
+        <p:nvGraphicFramePr>
+          <p:cNvPr id="3" name="Table 2"/>
+          <p:cNvGraphicFramePr>
+            <a:graphicFrameLocks noGrp="1"/>
+          </p:cNvGraphicFramePr>
           <p:nvPr/>
-        </p:nvSpPr>
-        <p:spPr>
-          <a:xfrm>
-            <a:off x="812800" y="914400"/>
-            <a:ext cx="10464800" cy="889000"/>
-          </a:xfrm>
-          <a:prstGeom prst="rect">
-            <a:avLst/>
-          </a:prstGeom>
-          <a:noFill/>
-        </p:spPr>
-        <p:txBody>
-          <a:bodyPr wrap="square">
-            <a:spAutoFit/>
-          </a:bodyPr>
-          <a:lstStyle/>
-          <a:p>
-            <a:r>
-              <a:rPr sz="892" b="0">
-                <a:solidFill>
-                  <a:srgbClr val="555555"/>
-                </a:solidFill>
-              </a:rPr>
-              <a:t>UNITS RANDOMIZED IN BAND AGE 51 PLUS</a:t>
-            </a:r>
-          </a:p>
-          <a:p>
-            <a:r>
-              <a:rPr sz="1520" b="1">
-                <a:solidFill>
-                  <a:srgbClr val="1A1A1A"/>
-                </a:solidFill>
-              </a:rPr>
-              <a:t>140</a:t>
-            </a:r>
-          </a:p>
-        </p:txBody>
-      </p:sp>
+        </p:nvGraphicFramePr>
+        <p:xfrm>
+          <a:off x="812800" y="914400"/>
+          <a:ext cx="10566400" cy="1828800"/>
+        </p:xfrm>
+        <a:graphic>
+          <a:graphicData uri="http://schemas.openxmlformats.org/drawingml/2006/table">
+            <a:tbl>
+              <a:tblPr firstRow="1" bandRow="1">
+                <a:tableStyleId>{5C22544A-7EE6-4342-B048-85BDC9FD1C3A}</a:tableStyleId>
+              </a:tblPr>
+              <a:tblGrid>
+                <a:gridCol w="1761066"/>
+                <a:gridCol w="1761066"/>
+                <a:gridCol w="1761066"/>
+                <a:gridCol w="1761066"/>
+                <a:gridCol w="1761066"/>
+                <a:gridCol w="1761070"/>
+              </a:tblGrid>
+              <a:tr h="304800">
+                <a:tc>
+                  <a:txBody>
+                    <a:bodyPr/>
+                    <a:lstStyle/>
+                    <a:p>
+                      <a:r>
+                        <a:rPr sz="892" b="1">
+                          <a:solidFill>
+                            <a:srgbClr val="111111"/>
+                          </a:solidFill>
+                        </a:rPr>
+                        <a:t>Quantity</a:t>
+                      </a:r>
+                    </a:p>
+                  </a:txBody>
+                  <a:tcPr/>
+                </a:tc>
+                <a:tc>
+                  <a:txBody>
+                    <a:bodyPr/>
+                    <a:lstStyle/>
+                    <a:p>
+                      <a:r>
+                        <a:rPr sz="892" b="1">
+                          <a:solidFill>
+                            <a:srgbClr val="111111"/>
+                          </a:solidFill>
+                        </a:rPr>
+                        <a:t>Estimate</a:t>
+                      </a:r>
+                    </a:p>
+                  </a:txBody>
+                  <a:tcPr/>
+                </a:tc>
+                <a:tc>
+                  <a:txBody>
+                    <a:bodyPr/>
+                    <a:lstStyle/>
+                    <a:p>
+                      <a:r>
+                        <a:rPr sz="892" b="1">
+                          <a:solidFill>
+                            <a:srgbClr val="111111"/>
+                          </a:solidFill>
+                        </a:rPr>
+                        <a:t>Unit</a:t>
+                      </a:r>
+                    </a:p>
+                  </a:txBody>
+                  <a:tcPr/>
+                </a:tc>
+                <a:tc>
+                  <a:txBody>
+                    <a:bodyPr/>
+                    <a:lstStyle/>
+                    <a:p>
+                      <a:r>
+                        <a:rPr sz="892" b="1">
+                          <a:solidFill>
+                            <a:srgbClr val="111111"/>
+                          </a:solidFill>
+                        </a:rPr>
+                        <a:t>Interval</a:t>
+                      </a:r>
+                    </a:p>
+                  </a:txBody>
+                  <a:tcPr/>
+                </a:tc>
+                <a:tc>
+                  <a:txBody>
+                    <a:bodyPr/>
+                    <a:lstStyle/>
+                    <a:p>
+                      <a:r>
+                        <a:rPr sz="892" b="1">
+                          <a:solidFill>
+                            <a:srgbClr val="111111"/>
+                          </a:solidFill>
+                        </a:rPr>
+                        <a:t>Threshold</a:t>
+                      </a:r>
+                    </a:p>
+                  </a:txBody>
+                  <a:tcPr/>
+                </a:tc>
+                <a:tc>
+                  <a:txBody>
+                    <a:bodyPr/>
+                    <a:lstStyle/>
+                    <a:p>
+                      <a:r>
+                        <a:rPr sz="892" b="1">
+                          <a:solidFill>
+                            <a:srgbClr val="111111"/>
+                          </a:solidFill>
+                        </a:rPr>
+                        <a:t>Relative to threshold</a:t>
+                      </a:r>
+                    </a:p>
+                  </a:txBody>
+                  <a:tcPr/>
+                </a:tc>
+              </a:tr>
+              <a:tr h="304800">
+                <a:tc>
+                  <a:txBody>
+                    <a:bodyPr/>
+                    <a:lstStyle/>
+                    <a:p>
+                      <a:r>
+                        <a:rPr sz="892" b="0">
+                          <a:solidFill>
+                            <a:srgbClr val="111111"/>
+                          </a:solidFill>
+                        </a:rPr>
+                        <a:t>40 mg vs control, pooled</a:t>
+                      </a:r>
+                    </a:p>
+                  </a:txBody>
+                  <a:tcPr/>
+                </a:tc>
+                <a:tc>
+                  <a:txBody>
+                    <a:bodyPr/>
+                    <a:lstStyle/>
+                    <a:p>
+                      <a:r>
+                        <a:rPr sz="892" b="0">
+                          <a:solidFill>
+                            <a:srgbClr val="111111"/>
+                          </a:solidFill>
+                        </a:rPr>
+                        <a:t>-1.53</a:t>
+                      </a:r>
+                    </a:p>
+                  </a:txBody>
+                  <a:tcPr/>
+                </a:tc>
+                <a:tc>
+                  <a:txBody>
+                    <a:bodyPr/>
+                    <a:lstStyle/>
+                    <a:p>
+                      <a:r>
+                        <a:rPr sz="892" b="0">
+                          <a:solidFill>
+                            <a:srgbClr val="111111"/>
+                          </a:solidFill>
+                        </a:rPr>
+                        <a:t>mmHg</a:t>
+                      </a:r>
+                    </a:p>
+                  </a:txBody>
+                  <a:tcPr/>
+                </a:tc>
+                <a:tc>
+                  <a:txBody>
+                    <a:bodyPr/>
+                    <a:lstStyle/>
+                    <a:p>
+                      <a:r>
+                        <a:rPr sz="892" b="0">
+                          <a:solidFill>
+                            <a:srgbClr val="111111"/>
+                          </a:solidFill>
+                        </a:rPr>
+                        <a:t>-2.97 to -0.10 (90% WALD)</a:t>
+                      </a:r>
+                    </a:p>
+                  </a:txBody>
+                  <a:tcPr/>
+                </a:tc>
+                <a:tc>
+                  <a:txBody>
+                    <a:bodyPr/>
+                    <a:lstStyle/>
+                    <a:p>
+                      <a:r>
+                        <a:rPr sz="892" b="0">
+                          <a:solidFill>
+                            <a:srgbClr val="111111"/>
+                          </a:solidFill>
+                        </a:rPr>
+                        <a:t>0.00</a:t>
+                      </a:r>
+                    </a:p>
+                  </a:txBody>
+                  <a:tcPr/>
+                </a:tc>
+                <a:tc>
+                  <a:txBody>
+                    <a:bodyPr/>
+                    <a:lstStyle/>
+                    <a:p>
+                      <a:r>
+                        <a:rPr sz="892" b="0">
+                          <a:solidFill>
+                            <a:srgbClr val="111111"/>
+                          </a:solidFill>
+                        </a:rPr>
+                        <a:t>below threshold</a:t>
+                      </a:r>
+                    </a:p>
+                  </a:txBody>
+                  <a:tcPr/>
+                </a:tc>
+              </a:tr>
+              <a:tr h="304800">
+                <a:tc>
+                  <a:txBody>
+                    <a:bodyPr/>
+                    <a:lstStyle/>
+                    <a:p>
+                      <a:r>
+                        <a:rPr sz="892" b="0">
+                          <a:solidFill>
+                            <a:srgbClr val="111111"/>
+                          </a:solidFill>
+                        </a:rPr>
+                        <a:t>20 mg vs control, pooled</a:t>
+                      </a:r>
+                    </a:p>
+                  </a:txBody>
+                  <a:tcPr/>
+                </a:tc>
+                <a:tc>
+                  <a:txBody>
+                    <a:bodyPr/>
+                    <a:lstStyle/>
+                    <a:p>
+                      <a:r>
+                        <a:rPr sz="892" b="0">
+                          <a:solidFill>
+                            <a:srgbClr val="111111"/>
+                          </a:solidFill>
+                        </a:rPr>
+                        <a:t>-4.80</a:t>
+                      </a:r>
+                    </a:p>
+                  </a:txBody>
+                  <a:tcPr/>
+                </a:tc>
+                <a:tc>
+                  <a:txBody>
+                    <a:bodyPr/>
+                    <a:lstStyle/>
+                    <a:p>
+                      <a:r>
+                        <a:rPr sz="892" b="0">
+                          <a:solidFill>
+                            <a:srgbClr val="111111"/>
+                          </a:solidFill>
+                        </a:rPr>
+                        <a:t>mmHg</a:t>
+                      </a:r>
+                    </a:p>
+                  </a:txBody>
+                  <a:tcPr/>
+                </a:tc>
+                <a:tc>
+                  <a:txBody>
+                    <a:bodyPr/>
+                    <a:lstStyle/>
+                    <a:p>
+                      <a:r>
+                        <a:rPr sz="892" b="0">
+                          <a:solidFill>
+                            <a:srgbClr val="111111"/>
+                          </a:solidFill>
+                        </a:rPr>
+                        <a:t>-6.17 to -3.44 (90% WALD)</a:t>
+                      </a:r>
+                    </a:p>
+                  </a:txBody>
+                  <a:tcPr/>
+                </a:tc>
+                <a:tc>
+                  <a:txBody>
+                    <a:bodyPr/>
+                    <a:lstStyle/>
+                    <a:p>
+                      <a:r>
+                        <a:rPr sz="892" b="0">
+                          <a:solidFill>
+                            <a:srgbClr val="111111"/>
+                          </a:solidFill>
+                        </a:rPr>
+                        <a:t>0.00</a:t>
+                      </a:r>
+                    </a:p>
+                  </a:txBody>
+                  <a:tcPr/>
+                </a:tc>
+                <a:tc>
+                  <a:txBody>
+                    <a:bodyPr/>
+                    <a:lstStyle/>
+                    <a:p>
+                      <a:r>
+                        <a:rPr sz="892" b="0">
+                          <a:solidFill>
+                            <a:srgbClr val="111111"/>
+                          </a:solidFill>
+                        </a:rPr>
+                        <a:t>below threshold</a:t>
+                      </a:r>
+                    </a:p>
+                  </a:txBody>
+                  <a:tcPr/>
+                </a:tc>
+              </a:tr>
+              <a:tr h="304800">
+                <a:tc>
+                  <a:txBody>
+                    <a:bodyPr/>
+                    <a:lstStyle/>
+                    <a:p>
+                      <a:r>
+                        <a:rPr sz="892" b="0">
+                          <a:solidFill>
+                            <a:srgbClr val="111111"/>
+                          </a:solidFill>
+                        </a:rPr>
+                        <a:t>10 mg vs control, pooled</a:t>
+                      </a:r>
+                    </a:p>
+                  </a:txBody>
+                  <a:tcPr/>
+                </a:tc>
+                <a:tc>
+                  <a:txBody>
+                    <a:bodyPr/>
+                    <a:lstStyle/>
+                    <a:p>
+                      <a:r>
+                        <a:rPr sz="892" b="0">
+                          <a:solidFill>
+                            <a:srgbClr val="111111"/>
+                          </a:solidFill>
+                        </a:rPr>
+                        <a:t>-5.27</a:t>
+                      </a:r>
+                    </a:p>
+                  </a:txBody>
+                  <a:tcPr/>
+                </a:tc>
+                <a:tc>
+                  <a:txBody>
+                    <a:bodyPr/>
+                    <a:lstStyle/>
+                    <a:p>
+                      <a:r>
+                        <a:rPr sz="892" b="0">
+                          <a:solidFill>
+                            <a:srgbClr val="111111"/>
+                          </a:solidFill>
+                        </a:rPr>
+                        <a:t>mmHg</a:t>
+                      </a:r>
+                    </a:p>
+                  </a:txBody>
+                  <a:tcPr/>
+                </a:tc>
+                <a:tc>
+                  <a:txBody>
+                    <a:bodyPr/>
+                    <a:lstStyle/>
+                    <a:p>
+                      <a:r>
+                        <a:rPr sz="892" b="0">
+                          <a:solidFill>
+                            <a:srgbClr val="111111"/>
+                          </a:solidFill>
+                        </a:rPr>
+                        <a:t>-6.63 to -3.91 (90% WALD)</a:t>
+                      </a:r>
+                    </a:p>
+                  </a:txBody>
+                  <a:tcPr/>
+                </a:tc>
+                <a:tc>
+                  <a:txBody>
+                    <a:bodyPr/>
+                    <a:lstStyle/>
+                    <a:p>
+                      <a:r>
+                        <a:rPr sz="892" b="0">
+                          <a:solidFill>
+                            <a:srgbClr val="111111"/>
+                          </a:solidFill>
+                        </a:rPr>
+                        <a:t>0.00</a:t>
+                      </a:r>
+                    </a:p>
+                  </a:txBody>
+                  <a:tcPr/>
+                </a:tc>
+                <a:tc>
+                  <a:txBody>
+                    <a:bodyPr/>
+                    <a:lstStyle/>
+                    <a:p>
+                      <a:r>
+                        <a:rPr sz="892" b="0">
+                          <a:solidFill>
+                            <a:srgbClr val="111111"/>
+                          </a:solidFill>
+                        </a:rPr>
+                        <a:t>below threshold</a:t>
+                      </a:r>
+                    </a:p>
+                  </a:txBody>
+                  <a:tcPr/>
+                </a:tc>
+              </a:tr>
+              <a:tr h="304800">
+                <a:tc>
+                  <a:txBody>
+                    <a:bodyPr/>
+                    <a:lstStyle/>
+                    <a:p>
+                      <a:r>
+                        <a:rPr sz="892" b="0">
+                          <a:solidFill>
+                            <a:srgbClr val="111111"/>
+                          </a:solidFill>
+                        </a:rPr>
+                        <a:t>40 mg vs control, age 51+</a:t>
+                      </a:r>
+                    </a:p>
+                  </a:txBody>
+                  <a:tcPr/>
+                </a:tc>
+                <a:tc>
+                  <a:txBody>
+                    <a:bodyPr/>
+                    <a:lstStyle/>
+                    <a:p>
+                      <a:r>
+                        <a:rPr sz="892" b="0">
+                          <a:solidFill>
+                            <a:srgbClr val="111111"/>
+                          </a:solidFill>
+                        </a:rPr>
+                        <a:t>6.20</a:t>
+                      </a:r>
+                    </a:p>
+                  </a:txBody>
+                  <a:tcPr/>
+                </a:tc>
+                <a:tc>
+                  <a:txBody>
+                    <a:bodyPr/>
+                    <a:lstStyle/>
+                    <a:p>
+                      <a:r>
+                        <a:rPr sz="892" b="0">
+                          <a:solidFill>
+                            <a:srgbClr val="111111"/>
+                          </a:solidFill>
+                        </a:rPr>
+                        <a:t>mmHg</a:t>
+                      </a:r>
+                    </a:p>
+                  </a:txBody>
+                  <a:tcPr/>
+                </a:tc>
+                <a:tc>
+                  <a:txBody>
+                    <a:bodyPr/>
+                    <a:lstStyle/>
+                    <a:p>
+                      <a:r>
+                        <a:rPr sz="892" b="0">
+                          <a:solidFill>
+                            <a:srgbClr val="111111"/>
+                          </a:solidFill>
+                        </a:rPr>
+                        <a:t>3.98 to 8.42 (90% WALD)</a:t>
+                      </a:r>
+                    </a:p>
+                  </a:txBody>
+                  <a:tcPr/>
+                </a:tc>
+                <a:tc>
+                  <a:txBody>
+                    <a:bodyPr/>
+                    <a:lstStyle/>
+                    <a:p>
+                      <a:r>
+                        <a:rPr sz="892" b="0">
+                          <a:solidFill>
+                            <a:srgbClr val="111111"/>
+                          </a:solidFill>
+                        </a:rPr>
+                        <a:t>0.00</a:t>
+                      </a:r>
+                    </a:p>
+                  </a:txBody>
+                  <a:tcPr/>
+                </a:tc>
+                <a:tc>
+                  <a:txBody>
+                    <a:bodyPr/>
+                    <a:lstStyle/>
+                    <a:p>
+                      <a:r>
+                        <a:rPr sz="892" b="0">
+                          <a:solidFill>
+                            <a:srgbClr val="111111"/>
+                          </a:solidFill>
+                        </a:rPr>
+                        <a:t>above threshold</a:t>
+                      </a:r>
+                    </a:p>
+                  </a:txBody>
+                  <a:tcPr/>
+                </a:tc>
+              </a:tr>
+              <a:tr h="304800">
+                <a:tc>
+                  <a:txBody>
+                    <a:bodyPr/>
+                    <a:lstStyle/>
+                    <a:p>
+                      <a:r>
+                        <a:rPr sz="892" b="0">
+                          <a:solidFill>
+                            <a:srgbClr val="111111"/>
+                          </a:solidFill>
+                        </a:rPr>
+                        <a:t>40 mg vs control, age 25-35</a:t>
+                      </a:r>
+                    </a:p>
+                  </a:txBody>
+                  <a:tcPr/>
+                </a:tc>
+                <a:tc>
+                  <a:txBody>
+                    <a:bodyPr/>
+                    <a:lstStyle/>
+                    <a:p>
+                      <a:r>
+                        <a:rPr sz="892" b="0">
+                          <a:solidFill>
+                            <a:srgbClr val="111111"/>
+                          </a:solidFill>
+                        </a:rPr>
+                        <a:t>-5.26</a:t>
+                      </a:r>
+                    </a:p>
+                  </a:txBody>
+                  <a:tcPr/>
+                </a:tc>
+                <a:tc>
+                  <a:txBody>
+                    <a:bodyPr/>
+                    <a:lstStyle/>
+                    <a:p>
+                      <a:r>
+                        <a:rPr sz="892" b="0">
+                          <a:solidFill>
+                            <a:srgbClr val="111111"/>
+                          </a:solidFill>
+                        </a:rPr>
+                        <a:t>mmHg</a:t>
+                      </a:r>
+                    </a:p>
+                  </a:txBody>
+                  <a:tcPr/>
+                </a:tc>
+                <a:tc>
+                  <a:txBody>
+                    <a:bodyPr/>
+                    <a:lstStyle/>
+                    <a:p>
+                      <a:r>
+                        <a:rPr sz="892" b="0">
+                          <a:solidFill>
+                            <a:srgbClr val="111111"/>
+                          </a:solidFill>
+                        </a:rPr>
+                        <a:t>-8.17 to -2.36 (90% WALD)</a:t>
+                      </a:r>
+                    </a:p>
+                  </a:txBody>
+                  <a:tcPr/>
+                </a:tc>
+                <a:tc>
+                  <a:txBody>
+                    <a:bodyPr/>
+                    <a:lstStyle/>
+                    <a:p>
+                      <a:r>
+                        <a:rPr sz="892" b="0">
+                          <a:solidFill>
+                            <a:srgbClr val="111111"/>
+                          </a:solidFill>
+                        </a:rPr>
+                        <a:t>0.00</a:t>
+                      </a:r>
+                    </a:p>
+                  </a:txBody>
+                  <a:tcPr/>
+                </a:tc>
+                <a:tc>
+                  <a:txBody>
+                    <a:bodyPr/>
+                    <a:lstStyle/>
+                    <a:p>
+                      <a:r>
+                        <a:rPr sz="892" b="0">
+                          <a:solidFill>
+                            <a:srgbClr val="111111"/>
+                          </a:solidFill>
+                        </a:rPr>
+                        <a:t>below threshold</a:t>
+                      </a:r>
+                    </a:p>
+                  </a:txBody>
+                  <a:tcPr/>
+                </a:tc>
+              </a:tr>
+            </a:tbl>
+          </a:graphicData>
+        </a:graphic>
+      </p:graphicFrame>
     </p:spTree>
   </p:cSld>
   <p:clrMapOvr>
@@ -6133,7 +8205,7 @@
                   <a:srgbClr val="111111"/>
                 </a:solidFill>
               </a:rPr>
-              <a:t>5. Discussion</a:t>
+              <a:t>4. Model checking</a:t>
             </a:r>
           </a:p>
         </p:txBody>
@@ -6147,6 +8219,178 @@
         <p:spPr>
           <a:xfrm>
             <a:off x="812800" y="914400"/>
+            <a:ext cx="2540000" cy="889000"/>
+          </a:xfrm>
+          <a:prstGeom prst="rect">
+            <a:avLst/>
+          </a:prstGeom>
+          <a:noFill/>
+        </p:spPr>
+        <p:txBody>
+          <a:bodyPr wrap="square">
+            <a:spAutoFit/>
+          </a:bodyPr>
+          <a:lstStyle/>
+          <a:p>
+            <a:r>
+              <a:rPr sz="892" b="0">
+                <a:solidFill>
+                  <a:srgbClr val="555555"/>
+                </a:solidFill>
+              </a:rPr>
+              <a:t>UNITS STILL ON STUDY AT THE FINAL WEEK</a:t>
+            </a:r>
+          </a:p>
+          <a:p>
+            <a:r>
+              <a:rPr sz="1520" b="1">
+                <a:solidFill>
+                  <a:srgbClr val="1A1A1A"/>
+                </a:solidFill>
+              </a:rPr>
+              <a:t>0.797</a:t>
+            </a:r>
+          </a:p>
+        </p:txBody>
+      </p:sp>
+      <p:sp>
+        <p:nvSpPr>
+          <p:cNvPr id="4" name="TextBox 3"/>
+          <p:cNvSpPr txBox="1"/>
+          <p:nvPr/>
+        </p:nvSpPr>
+        <p:spPr>
+          <a:xfrm>
+            <a:off x="3454400" y="914400"/>
+            <a:ext cx="2540000" cy="889000"/>
+          </a:xfrm>
+          <a:prstGeom prst="rect">
+            <a:avLst/>
+          </a:prstGeom>
+          <a:noFill/>
+        </p:spPr>
+        <p:txBody>
+          <a:bodyPr wrap="square">
+            <a:spAutoFit/>
+          </a:bodyPr>
+          <a:lstStyle/>
+          <a:p>
+            <a:r>
+              <a:rPr sz="892" b="0">
+                <a:solidFill>
+                  <a:srgbClr val="555555"/>
+                </a:solidFill>
+              </a:rPr>
+              <a:t>UNITS CONTRIBUTING TO THE PRIMARY ENDPOINT</a:t>
+            </a:r>
+          </a:p>
+          <a:p>
+            <a:r>
+              <a:rPr sz="1520" b="1">
+                <a:solidFill>
+                  <a:srgbClr val="1A1A1A"/>
+                </a:solidFill>
+              </a:rPr>
+              <a:t>372</a:t>
+            </a:r>
+          </a:p>
+        </p:txBody>
+      </p:sp>
+      <p:sp>
+        <p:nvSpPr>
+          <p:cNvPr id="5" name="TextBox 4"/>
+          <p:cNvSpPr txBox="1"/>
+          <p:nvPr/>
+        </p:nvSpPr>
+        <p:spPr>
+          <a:xfrm>
+            <a:off x="6096000" y="914400"/>
+            <a:ext cx="2540000" cy="889000"/>
+          </a:xfrm>
+          <a:prstGeom prst="rect">
+            <a:avLst/>
+          </a:prstGeom>
+          <a:noFill/>
+        </p:spPr>
+        <p:txBody>
+          <a:bodyPr wrap="square">
+            <a:spAutoFit/>
+          </a:bodyPr>
+          <a:lstStyle/>
+          <a:p>
+            <a:r>
+              <a:rPr sz="892" b="0">
+                <a:solidFill>
+                  <a:srgbClr val="555555"/>
+                </a:solidFill>
+              </a:rPr>
+              <a:t>UNITS RANDOMIZED IN BAND AGE 25 35</a:t>
+            </a:r>
+          </a:p>
+          <a:p>
+            <a:r>
+              <a:rPr sz="1520" b="1">
+                <a:solidFill>
+                  <a:srgbClr val="1A1A1A"/>
+                </a:solidFill>
+              </a:rPr>
+              <a:t>100</a:t>
+            </a:r>
+          </a:p>
+        </p:txBody>
+      </p:sp>
+      <p:sp>
+        <p:nvSpPr>
+          <p:cNvPr id="6" name="TextBox 5"/>
+          <p:cNvSpPr txBox="1"/>
+          <p:nvPr/>
+        </p:nvSpPr>
+        <p:spPr>
+          <a:xfrm>
+            <a:off x="8737600" y="914400"/>
+            <a:ext cx="2540000" cy="889000"/>
+          </a:xfrm>
+          <a:prstGeom prst="rect">
+            <a:avLst/>
+          </a:prstGeom>
+          <a:noFill/>
+        </p:spPr>
+        <p:txBody>
+          <a:bodyPr wrap="square">
+            <a:spAutoFit/>
+          </a:bodyPr>
+          <a:lstStyle/>
+          <a:p>
+            <a:r>
+              <a:rPr sz="892" b="0">
+                <a:solidFill>
+                  <a:srgbClr val="555555"/>
+                </a:solidFill>
+              </a:rPr>
+              <a:t>UNITS RANDOMIZED IN BAND AGE 36 50</a:t>
+            </a:r>
+          </a:p>
+          <a:p>
+            <a:r>
+              <a:rPr sz="1520" b="1">
+                <a:solidFill>
+                  <a:srgbClr val="1A1A1A"/>
+                </a:solidFill>
+              </a:rPr>
+              <a:t>160</a:t>
+            </a:r>
+          </a:p>
+        </p:txBody>
+      </p:sp>
+      <p:sp>
+        <p:nvSpPr>
+          <p:cNvPr id="7" name="TextBox 6"/>
+          <p:cNvSpPr txBox="1"/>
+          <p:nvPr/>
+        </p:nvSpPr>
+        <p:spPr>
+          <a:xfrm>
+            <a:off x="812800" y="1955800"/>
             <a:ext cx="10566400" cy="508000"/>
           </a:xfrm>
           <a:prstGeom prst="rect">
@@ -6166,7 +8410,7 @@
                   <a:srgbClr val="111111"/>
                 </a:solidFill>
               </a:rPr>
-              <a:t>The effect is identified via the backdoor route, allowing the estimated quantities to be interpreted as treatment effects rather than associations under the stated assumptions. For the pooled comparison of 10 mg against control, the estimated effect is -5.27 mmHg (90% WALD -6.63 to -3.91 mmHg). This interval lies entirely on the favourable side of the decision threshold, settling the question in that direction on these data. For the pooled comparison of 20 mg against control, the estimated effect is -4.80 mmHg (90% WALD -6.17 to -3.44 mmHg). This interval also falls entirely on the favourable side of the decision threshold. For the pooled comparison of 40 mg against control, the effect is -1.53 mmHg (90% WALD -2.97 to -0.10 mmHg), which likewise lies on the favourable side of the decision threshold. However, this pooled estimate for 40 mg should not be reported alone because it averages an age band that benefits with an age band that is harmed. In the age band 25 to 35, the effect of 40 mg compared with control is -5.26 mmHg (90% WALD -8.17 to -2.36 mmHg), falling on the favourable side of the decision threshold. In the age band 51 and older, the effect of 40 mg compared with control is 6.20 mmHg (90% WALD 3.98 to 8.42 mmHg), lying on the unfavourable side of the decision threshold. This contrast is what the pooled estimate conceals and what the safety boundary was monitored to detect. These evaluations remain conditional on the unresolved assumptions that dropout is ignorable given baseline and that the pooled contrast answers the question.</a:t>
+              <a:t>Diagnostic checks describe model fit and retention rather than the treatment effect itself. Units still on study at the final week were 0.797. There were 372 units contributing to the primary endpoint. There were 100 units randomized in the age 25 to 35 band, 160 units randomized in the age 36 to 50 band, and 140 units randomized in the age 51 plus band. These diagnostics monitor sample availability and stratum allocations across follow-up. Diagnostic checks can reduce confidence in the estimates, but they never establish them. Evaluating model fit does not verify the unresolved assumptions underlying the estimation. In particular, that dropout is ignorable given baseline remains an unresolved assumption. That the pooled contrast answers the question is likewise an unresolved assumption. Retention metrics and diagnostic numbers cannot verify whether dropout is ignorable given baseline. Similarly, checking the fit does not demonstrate that the pooled contrast answers the question. These checks evaluate the operational sample without validating the unmeasured identification conditions.</a:t>
             </a:r>
           </a:p>
         </p:txBody>

--- a/packages/axiom-dossier/examples/out/hyper3-full.pptx
+++ b/packages/axiom-dossier/examples/out/hyper3-full.pptx
@@ -19,6 +19,10 @@
     <p:sldId id="267" r:id="rId18"/>
     <p:sldId id="268" r:id="rId19"/>
     <p:sldId id="269" r:id="rId20"/>
+    <p:sldId id="270" r:id="rId21"/>
+    <p:sldId id="271" r:id="rId22"/>
+    <p:sldId id="272" r:id="rId23"/>
+    <p:sldId id="273" r:id="rId24"/>
   </p:sldIdLst>
   <p:sldSz cx="12192000" cy="6858000" type="screen4x3"/>
   <p:notesSz cx="6858000" cy="9144000"/>
@@ -3190,6 +3194,1179 @@
                   <a:srgbClr val="111111"/>
                 </a:solidFill>
               </a:rPr>
+              <a:t>3. Results (cont.)</a:t>
+            </a:r>
+          </a:p>
+        </p:txBody>
+      </p:sp>
+      <p:sp>
+        <p:nvSpPr>
+          <p:cNvPr id="3" name="TextBox 2"/>
+          <p:cNvSpPr txBox="1"/>
+          <p:nvPr/>
+        </p:nvSpPr>
+        <p:spPr>
+          <a:xfrm>
+            <a:off x="812800" y="914400"/>
+            <a:ext cx="10464800" cy="889000"/>
+          </a:xfrm>
+          <a:prstGeom prst="rect">
+            <a:avLst/>
+          </a:prstGeom>
+          <a:noFill/>
+        </p:spPr>
+        <p:txBody>
+          <a:bodyPr wrap="square">
+            <a:spAutoFit/>
+          </a:bodyPr>
+          <a:lstStyle/>
+          <a:p>
+            <a:r>
+              <a:rPr sz="892" b="0">
+                <a:solidFill>
+                  <a:srgbClr val="555555"/>
+                </a:solidFill>
+              </a:rPr>
+              <a:t>40 MG VS CONTROL, AGE 25-35</a:t>
+            </a:r>
+          </a:p>
+          <a:p>
+            <a:r>
+              <a:rPr sz="1520" b="1">
+                <a:solidFill>
+                  <a:srgbClr val="1A1A1A"/>
+                </a:solidFill>
+              </a:rPr>
+              <a:t>-5.26 mmHg</a:t>
+            </a:r>
+          </a:p>
+          <a:p>
+            <a:r>
+              <a:rPr sz="892" b="0">
+                <a:solidFill>
+                  <a:srgbClr val="555555"/>
+                </a:solidFill>
+              </a:rPr>
+              <a:t>[-8.2, -2.4] (90% WALD)</a:t>
+            </a:r>
+          </a:p>
+        </p:txBody>
+      </p:sp>
+    </p:spTree>
+  </p:cSld>
+  <p:clrMapOvr>
+    <a:masterClrMapping/>
+  </p:clrMapOvr>
+</p:sld>
+</file>
+
+<file path=ppt/slides/slide11.xml><?xml version="1.0" encoding="utf-8"?>
+<p:sld xmlns:a="http://schemas.openxmlformats.org/drawingml/2006/main" xmlns:p="http://schemas.openxmlformats.org/presentationml/2006/main" xmlns:r="http://schemas.openxmlformats.org/officeDocument/2006/relationships">
+  <p:cSld>
+    <p:spTree>
+      <p:nvGrpSpPr>
+        <p:cNvPr id="1" name=""/>
+        <p:cNvGrpSpPr/>
+        <p:nvPr/>
+      </p:nvGrpSpPr>
+      <p:grpSpPr/>
+      <p:sp>
+        <p:nvSpPr>
+          <p:cNvPr id="2" name="TextBox 1"/>
+          <p:cNvSpPr txBox="1"/>
+          <p:nvPr/>
+        </p:nvSpPr>
+        <p:spPr>
+          <a:xfrm>
+            <a:off x="812800" y="406400"/>
+            <a:ext cx="10566400" cy="431800"/>
+          </a:xfrm>
+          <a:prstGeom prst="rect">
+            <a:avLst/>
+          </a:prstGeom>
+          <a:noFill/>
+        </p:spPr>
+        <p:txBody>
+          <a:bodyPr wrap="square">
+            <a:spAutoFit/>
+          </a:bodyPr>
+          <a:lstStyle/>
+          <a:p>
+            <a:r>
+              <a:rPr sz="1350" b="1">
+                <a:solidFill>
+                  <a:srgbClr val="111111"/>
+                </a:solidFill>
+              </a:rPr>
+              <a:t>3. Results (cont.)</a:t>
+            </a:r>
+          </a:p>
+        </p:txBody>
+      </p:sp>
+      <p:pic>
+        <p:nvPicPr>
+          <p:cNvPr id="3" name="Picture 2" descr="image.png"/>
+          <p:cNvPicPr>
+            <a:picLocks noChangeAspect="1"/>
+          </p:cNvPicPr>
+          <p:nvPr/>
+        </p:nvPicPr>
+        <p:blipFill>
+          <a:blip r:embed="rId2"/>
+          <a:stretch>
+            <a:fillRect/>
+          </a:stretch>
+        </p:blipFill>
+        <p:spPr>
+          <a:xfrm>
+            <a:off x="812800" y="914400"/>
+            <a:ext cx="9122190" cy="5130800"/>
+          </a:xfrm>
+          <a:prstGeom prst="rect">
+            <a:avLst/>
+          </a:prstGeom>
+        </p:spPr>
+      </p:pic>
+      <p:sp>
+        <p:nvSpPr>
+          <p:cNvPr id="4" name="TextBox 3"/>
+          <p:cNvSpPr txBox="1"/>
+          <p:nvPr/>
+        </p:nvSpPr>
+        <p:spPr>
+          <a:xfrm>
+            <a:off x="812800" y="6126480"/>
+            <a:ext cx="10566400" cy="254000"/>
+          </a:xfrm>
+          <a:prstGeom prst="rect">
+            <a:avLst/>
+          </a:prstGeom>
+          <a:noFill/>
+        </p:spPr>
+        <p:txBody>
+          <a:bodyPr wrap="square">
+            <a:spAutoFit/>
+          </a:bodyPr>
+          <a:lstStyle/>
+          <a:p>
+            <a:r>
+              <a:rPr sz="892" b="0">
+                <a:solidFill>
+                  <a:srgbClr val="555555"/>
+                </a:solidFill>
+              </a:rPr>
+              <a:t>Figure 2. Estimated quantities with their intervals</a:t>
+            </a:r>
+          </a:p>
+        </p:txBody>
+      </p:sp>
+    </p:spTree>
+  </p:cSld>
+  <p:clrMapOvr>
+    <a:masterClrMapping/>
+  </p:clrMapOvr>
+</p:sld>
+</file>
+
+<file path=ppt/slides/slide12.xml><?xml version="1.0" encoding="utf-8"?>
+<p:sld xmlns:a="http://schemas.openxmlformats.org/drawingml/2006/main" xmlns:p="http://schemas.openxmlformats.org/presentationml/2006/main" xmlns:r="http://schemas.openxmlformats.org/officeDocument/2006/relationships">
+  <p:cSld>
+    <p:spTree>
+      <p:nvGrpSpPr>
+        <p:cNvPr id="1" name=""/>
+        <p:cNvGrpSpPr/>
+        <p:nvPr/>
+      </p:nvGrpSpPr>
+      <p:grpSpPr/>
+      <p:sp>
+        <p:nvSpPr>
+          <p:cNvPr id="2" name="TextBox 1"/>
+          <p:cNvSpPr txBox="1"/>
+          <p:nvPr/>
+        </p:nvSpPr>
+        <p:spPr>
+          <a:xfrm>
+            <a:off x="812800" y="406400"/>
+            <a:ext cx="10566400" cy="431800"/>
+          </a:xfrm>
+          <a:prstGeom prst="rect">
+            <a:avLst/>
+          </a:prstGeom>
+          <a:noFill/>
+        </p:spPr>
+        <p:txBody>
+          <a:bodyPr wrap="square">
+            <a:spAutoFit/>
+          </a:bodyPr>
+          <a:lstStyle/>
+          <a:p>
+            <a:r>
+              <a:rPr sz="1350" b="1">
+                <a:solidFill>
+                  <a:srgbClr val="111111"/>
+                </a:solidFill>
+              </a:rPr>
+              <a:t>3. Results (cont.)</a:t>
+            </a:r>
+          </a:p>
+        </p:txBody>
+      </p:sp>
+      <p:graphicFrame>
+        <p:nvGraphicFramePr>
+          <p:cNvPr id="3" name="Table 2"/>
+          <p:cNvGraphicFramePr>
+            <a:graphicFrameLocks noGrp="1"/>
+          </p:cNvGraphicFramePr>
+          <p:nvPr/>
+        </p:nvGraphicFramePr>
+        <p:xfrm>
+          <a:off x="812800" y="914400"/>
+          <a:ext cx="10566400" cy="1828800"/>
+        </p:xfrm>
+        <a:graphic>
+          <a:graphicData uri="http://schemas.openxmlformats.org/drawingml/2006/table">
+            <a:tbl>
+              <a:tblPr firstRow="1" bandRow="1">
+                <a:tableStyleId>{5C22544A-7EE6-4342-B048-85BDC9FD1C3A}</a:tableStyleId>
+              </a:tblPr>
+              <a:tblGrid>
+                <a:gridCol w="1761066"/>
+                <a:gridCol w="1761066"/>
+                <a:gridCol w="1761066"/>
+                <a:gridCol w="1761066"/>
+                <a:gridCol w="1761066"/>
+                <a:gridCol w="1761070"/>
+              </a:tblGrid>
+              <a:tr h="304800">
+                <a:tc>
+                  <a:txBody>
+                    <a:bodyPr/>
+                    <a:lstStyle/>
+                    <a:p>
+                      <a:r>
+                        <a:rPr sz="892" b="1">
+                          <a:solidFill>
+                            <a:srgbClr val="111111"/>
+                          </a:solidFill>
+                        </a:rPr>
+                        <a:t>Quantity</a:t>
+                      </a:r>
+                    </a:p>
+                  </a:txBody>
+                  <a:tcPr/>
+                </a:tc>
+                <a:tc>
+                  <a:txBody>
+                    <a:bodyPr/>
+                    <a:lstStyle/>
+                    <a:p>
+                      <a:r>
+                        <a:rPr sz="892" b="1">
+                          <a:solidFill>
+                            <a:srgbClr val="111111"/>
+                          </a:solidFill>
+                        </a:rPr>
+                        <a:t>Estimate</a:t>
+                      </a:r>
+                    </a:p>
+                  </a:txBody>
+                  <a:tcPr/>
+                </a:tc>
+                <a:tc>
+                  <a:txBody>
+                    <a:bodyPr/>
+                    <a:lstStyle/>
+                    <a:p>
+                      <a:r>
+                        <a:rPr sz="892" b="1">
+                          <a:solidFill>
+                            <a:srgbClr val="111111"/>
+                          </a:solidFill>
+                        </a:rPr>
+                        <a:t>Unit</a:t>
+                      </a:r>
+                    </a:p>
+                  </a:txBody>
+                  <a:tcPr/>
+                </a:tc>
+                <a:tc>
+                  <a:txBody>
+                    <a:bodyPr/>
+                    <a:lstStyle/>
+                    <a:p>
+                      <a:r>
+                        <a:rPr sz="892" b="1">
+                          <a:solidFill>
+                            <a:srgbClr val="111111"/>
+                          </a:solidFill>
+                        </a:rPr>
+                        <a:t>Interval</a:t>
+                      </a:r>
+                    </a:p>
+                  </a:txBody>
+                  <a:tcPr/>
+                </a:tc>
+                <a:tc>
+                  <a:txBody>
+                    <a:bodyPr/>
+                    <a:lstStyle/>
+                    <a:p>
+                      <a:r>
+                        <a:rPr sz="892" b="1">
+                          <a:solidFill>
+                            <a:srgbClr val="111111"/>
+                          </a:solidFill>
+                        </a:rPr>
+                        <a:t>Threshold</a:t>
+                      </a:r>
+                    </a:p>
+                  </a:txBody>
+                  <a:tcPr/>
+                </a:tc>
+                <a:tc>
+                  <a:txBody>
+                    <a:bodyPr/>
+                    <a:lstStyle/>
+                    <a:p>
+                      <a:r>
+                        <a:rPr sz="892" b="1">
+                          <a:solidFill>
+                            <a:srgbClr val="111111"/>
+                          </a:solidFill>
+                        </a:rPr>
+                        <a:t>Relative to threshold</a:t>
+                      </a:r>
+                    </a:p>
+                  </a:txBody>
+                  <a:tcPr/>
+                </a:tc>
+              </a:tr>
+              <a:tr h="304800">
+                <a:tc>
+                  <a:txBody>
+                    <a:bodyPr/>
+                    <a:lstStyle/>
+                    <a:p>
+                      <a:r>
+                        <a:rPr sz="892" b="0">
+                          <a:solidFill>
+                            <a:srgbClr val="111111"/>
+                          </a:solidFill>
+                        </a:rPr>
+                        <a:t>40 mg vs control, pooled</a:t>
+                      </a:r>
+                    </a:p>
+                  </a:txBody>
+                  <a:tcPr/>
+                </a:tc>
+                <a:tc>
+                  <a:txBody>
+                    <a:bodyPr/>
+                    <a:lstStyle/>
+                    <a:p>
+                      <a:r>
+                        <a:rPr sz="892" b="0">
+                          <a:solidFill>
+                            <a:srgbClr val="111111"/>
+                          </a:solidFill>
+                        </a:rPr>
+                        <a:t>-1.53</a:t>
+                      </a:r>
+                    </a:p>
+                  </a:txBody>
+                  <a:tcPr/>
+                </a:tc>
+                <a:tc>
+                  <a:txBody>
+                    <a:bodyPr/>
+                    <a:lstStyle/>
+                    <a:p>
+                      <a:r>
+                        <a:rPr sz="892" b="0">
+                          <a:solidFill>
+                            <a:srgbClr val="111111"/>
+                          </a:solidFill>
+                        </a:rPr>
+                        <a:t>mmHg</a:t>
+                      </a:r>
+                    </a:p>
+                  </a:txBody>
+                  <a:tcPr/>
+                </a:tc>
+                <a:tc>
+                  <a:txBody>
+                    <a:bodyPr/>
+                    <a:lstStyle/>
+                    <a:p>
+                      <a:r>
+                        <a:rPr sz="892" b="0">
+                          <a:solidFill>
+                            <a:srgbClr val="111111"/>
+                          </a:solidFill>
+                        </a:rPr>
+                        <a:t>-2.97 to -0.10 (90% WALD)</a:t>
+                      </a:r>
+                    </a:p>
+                  </a:txBody>
+                  <a:tcPr/>
+                </a:tc>
+                <a:tc>
+                  <a:txBody>
+                    <a:bodyPr/>
+                    <a:lstStyle/>
+                    <a:p>
+                      <a:r>
+                        <a:rPr sz="892" b="0">
+                          <a:solidFill>
+                            <a:srgbClr val="111111"/>
+                          </a:solidFill>
+                        </a:rPr>
+                        <a:t>0.00</a:t>
+                      </a:r>
+                    </a:p>
+                  </a:txBody>
+                  <a:tcPr/>
+                </a:tc>
+                <a:tc>
+                  <a:txBody>
+                    <a:bodyPr/>
+                    <a:lstStyle/>
+                    <a:p>
+                      <a:r>
+                        <a:rPr sz="892" b="0">
+                          <a:solidFill>
+                            <a:srgbClr val="111111"/>
+                          </a:solidFill>
+                        </a:rPr>
+                        <a:t>below threshold</a:t>
+                      </a:r>
+                    </a:p>
+                  </a:txBody>
+                  <a:tcPr/>
+                </a:tc>
+              </a:tr>
+              <a:tr h="304800">
+                <a:tc>
+                  <a:txBody>
+                    <a:bodyPr/>
+                    <a:lstStyle/>
+                    <a:p>
+                      <a:r>
+                        <a:rPr sz="892" b="0">
+                          <a:solidFill>
+                            <a:srgbClr val="111111"/>
+                          </a:solidFill>
+                        </a:rPr>
+                        <a:t>20 mg vs control, pooled</a:t>
+                      </a:r>
+                    </a:p>
+                  </a:txBody>
+                  <a:tcPr/>
+                </a:tc>
+                <a:tc>
+                  <a:txBody>
+                    <a:bodyPr/>
+                    <a:lstStyle/>
+                    <a:p>
+                      <a:r>
+                        <a:rPr sz="892" b="0">
+                          <a:solidFill>
+                            <a:srgbClr val="111111"/>
+                          </a:solidFill>
+                        </a:rPr>
+                        <a:t>-4.80</a:t>
+                      </a:r>
+                    </a:p>
+                  </a:txBody>
+                  <a:tcPr/>
+                </a:tc>
+                <a:tc>
+                  <a:txBody>
+                    <a:bodyPr/>
+                    <a:lstStyle/>
+                    <a:p>
+                      <a:r>
+                        <a:rPr sz="892" b="0">
+                          <a:solidFill>
+                            <a:srgbClr val="111111"/>
+                          </a:solidFill>
+                        </a:rPr>
+                        <a:t>mmHg</a:t>
+                      </a:r>
+                    </a:p>
+                  </a:txBody>
+                  <a:tcPr/>
+                </a:tc>
+                <a:tc>
+                  <a:txBody>
+                    <a:bodyPr/>
+                    <a:lstStyle/>
+                    <a:p>
+                      <a:r>
+                        <a:rPr sz="892" b="0">
+                          <a:solidFill>
+                            <a:srgbClr val="111111"/>
+                          </a:solidFill>
+                        </a:rPr>
+                        <a:t>-6.17 to -3.44 (90% WALD)</a:t>
+                      </a:r>
+                    </a:p>
+                  </a:txBody>
+                  <a:tcPr/>
+                </a:tc>
+                <a:tc>
+                  <a:txBody>
+                    <a:bodyPr/>
+                    <a:lstStyle/>
+                    <a:p>
+                      <a:r>
+                        <a:rPr sz="892" b="0">
+                          <a:solidFill>
+                            <a:srgbClr val="111111"/>
+                          </a:solidFill>
+                        </a:rPr>
+                        <a:t>0.00</a:t>
+                      </a:r>
+                    </a:p>
+                  </a:txBody>
+                  <a:tcPr/>
+                </a:tc>
+                <a:tc>
+                  <a:txBody>
+                    <a:bodyPr/>
+                    <a:lstStyle/>
+                    <a:p>
+                      <a:r>
+                        <a:rPr sz="892" b="0">
+                          <a:solidFill>
+                            <a:srgbClr val="111111"/>
+                          </a:solidFill>
+                        </a:rPr>
+                        <a:t>below threshold</a:t>
+                      </a:r>
+                    </a:p>
+                  </a:txBody>
+                  <a:tcPr/>
+                </a:tc>
+              </a:tr>
+              <a:tr h="304800">
+                <a:tc>
+                  <a:txBody>
+                    <a:bodyPr/>
+                    <a:lstStyle/>
+                    <a:p>
+                      <a:r>
+                        <a:rPr sz="892" b="0">
+                          <a:solidFill>
+                            <a:srgbClr val="111111"/>
+                          </a:solidFill>
+                        </a:rPr>
+                        <a:t>10 mg vs control, pooled</a:t>
+                      </a:r>
+                    </a:p>
+                  </a:txBody>
+                  <a:tcPr/>
+                </a:tc>
+                <a:tc>
+                  <a:txBody>
+                    <a:bodyPr/>
+                    <a:lstStyle/>
+                    <a:p>
+                      <a:r>
+                        <a:rPr sz="892" b="0">
+                          <a:solidFill>
+                            <a:srgbClr val="111111"/>
+                          </a:solidFill>
+                        </a:rPr>
+                        <a:t>-5.27</a:t>
+                      </a:r>
+                    </a:p>
+                  </a:txBody>
+                  <a:tcPr/>
+                </a:tc>
+                <a:tc>
+                  <a:txBody>
+                    <a:bodyPr/>
+                    <a:lstStyle/>
+                    <a:p>
+                      <a:r>
+                        <a:rPr sz="892" b="0">
+                          <a:solidFill>
+                            <a:srgbClr val="111111"/>
+                          </a:solidFill>
+                        </a:rPr>
+                        <a:t>mmHg</a:t>
+                      </a:r>
+                    </a:p>
+                  </a:txBody>
+                  <a:tcPr/>
+                </a:tc>
+                <a:tc>
+                  <a:txBody>
+                    <a:bodyPr/>
+                    <a:lstStyle/>
+                    <a:p>
+                      <a:r>
+                        <a:rPr sz="892" b="0">
+                          <a:solidFill>
+                            <a:srgbClr val="111111"/>
+                          </a:solidFill>
+                        </a:rPr>
+                        <a:t>-6.63 to -3.91 (90% WALD)</a:t>
+                      </a:r>
+                    </a:p>
+                  </a:txBody>
+                  <a:tcPr/>
+                </a:tc>
+                <a:tc>
+                  <a:txBody>
+                    <a:bodyPr/>
+                    <a:lstStyle/>
+                    <a:p>
+                      <a:r>
+                        <a:rPr sz="892" b="0">
+                          <a:solidFill>
+                            <a:srgbClr val="111111"/>
+                          </a:solidFill>
+                        </a:rPr>
+                        <a:t>0.00</a:t>
+                      </a:r>
+                    </a:p>
+                  </a:txBody>
+                  <a:tcPr/>
+                </a:tc>
+                <a:tc>
+                  <a:txBody>
+                    <a:bodyPr/>
+                    <a:lstStyle/>
+                    <a:p>
+                      <a:r>
+                        <a:rPr sz="892" b="0">
+                          <a:solidFill>
+                            <a:srgbClr val="111111"/>
+                          </a:solidFill>
+                        </a:rPr>
+                        <a:t>below threshold</a:t>
+                      </a:r>
+                    </a:p>
+                  </a:txBody>
+                  <a:tcPr/>
+                </a:tc>
+              </a:tr>
+              <a:tr h="304800">
+                <a:tc>
+                  <a:txBody>
+                    <a:bodyPr/>
+                    <a:lstStyle/>
+                    <a:p>
+                      <a:r>
+                        <a:rPr sz="892" b="0">
+                          <a:solidFill>
+                            <a:srgbClr val="111111"/>
+                          </a:solidFill>
+                        </a:rPr>
+                        <a:t>40 mg vs control, age 51+</a:t>
+                      </a:r>
+                    </a:p>
+                  </a:txBody>
+                  <a:tcPr/>
+                </a:tc>
+                <a:tc>
+                  <a:txBody>
+                    <a:bodyPr/>
+                    <a:lstStyle/>
+                    <a:p>
+                      <a:r>
+                        <a:rPr sz="892" b="0">
+                          <a:solidFill>
+                            <a:srgbClr val="111111"/>
+                          </a:solidFill>
+                        </a:rPr>
+                        <a:t>6.20</a:t>
+                      </a:r>
+                    </a:p>
+                  </a:txBody>
+                  <a:tcPr/>
+                </a:tc>
+                <a:tc>
+                  <a:txBody>
+                    <a:bodyPr/>
+                    <a:lstStyle/>
+                    <a:p>
+                      <a:r>
+                        <a:rPr sz="892" b="0">
+                          <a:solidFill>
+                            <a:srgbClr val="111111"/>
+                          </a:solidFill>
+                        </a:rPr>
+                        <a:t>mmHg</a:t>
+                      </a:r>
+                    </a:p>
+                  </a:txBody>
+                  <a:tcPr/>
+                </a:tc>
+                <a:tc>
+                  <a:txBody>
+                    <a:bodyPr/>
+                    <a:lstStyle/>
+                    <a:p>
+                      <a:r>
+                        <a:rPr sz="892" b="0">
+                          <a:solidFill>
+                            <a:srgbClr val="111111"/>
+                          </a:solidFill>
+                        </a:rPr>
+                        <a:t>3.98 to 8.42 (90% WALD)</a:t>
+                      </a:r>
+                    </a:p>
+                  </a:txBody>
+                  <a:tcPr/>
+                </a:tc>
+                <a:tc>
+                  <a:txBody>
+                    <a:bodyPr/>
+                    <a:lstStyle/>
+                    <a:p>
+                      <a:r>
+                        <a:rPr sz="892" b="0">
+                          <a:solidFill>
+                            <a:srgbClr val="111111"/>
+                          </a:solidFill>
+                        </a:rPr>
+                        <a:t>0.00</a:t>
+                      </a:r>
+                    </a:p>
+                  </a:txBody>
+                  <a:tcPr/>
+                </a:tc>
+                <a:tc>
+                  <a:txBody>
+                    <a:bodyPr/>
+                    <a:lstStyle/>
+                    <a:p>
+                      <a:r>
+                        <a:rPr sz="892" b="0">
+                          <a:solidFill>
+                            <a:srgbClr val="111111"/>
+                          </a:solidFill>
+                        </a:rPr>
+                        <a:t>above threshold</a:t>
+                      </a:r>
+                    </a:p>
+                  </a:txBody>
+                  <a:tcPr/>
+                </a:tc>
+              </a:tr>
+              <a:tr h="304800">
+                <a:tc>
+                  <a:txBody>
+                    <a:bodyPr/>
+                    <a:lstStyle/>
+                    <a:p>
+                      <a:r>
+                        <a:rPr sz="892" b="0">
+                          <a:solidFill>
+                            <a:srgbClr val="111111"/>
+                          </a:solidFill>
+                        </a:rPr>
+                        <a:t>40 mg vs control, age 25-35</a:t>
+                      </a:r>
+                    </a:p>
+                  </a:txBody>
+                  <a:tcPr/>
+                </a:tc>
+                <a:tc>
+                  <a:txBody>
+                    <a:bodyPr/>
+                    <a:lstStyle/>
+                    <a:p>
+                      <a:r>
+                        <a:rPr sz="892" b="0">
+                          <a:solidFill>
+                            <a:srgbClr val="111111"/>
+                          </a:solidFill>
+                        </a:rPr>
+                        <a:t>-5.26</a:t>
+                      </a:r>
+                    </a:p>
+                  </a:txBody>
+                  <a:tcPr/>
+                </a:tc>
+                <a:tc>
+                  <a:txBody>
+                    <a:bodyPr/>
+                    <a:lstStyle/>
+                    <a:p>
+                      <a:r>
+                        <a:rPr sz="892" b="0">
+                          <a:solidFill>
+                            <a:srgbClr val="111111"/>
+                          </a:solidFill>
+                        </a:rPr>
+                        <a:t>mmHg</a:t>
+                      </a:r>
+                    </a:p>
+                  </a:txBody>
+                  <a:tcPr/>
+                </a:tc>
+                <a:tc>
+                  <a:txBody>
+                    <a:bodyPr/>
+                    <a:lstStyle/>
+                    <a:p>
+                      <a:r>
+                        <a:rPr sz="892" b="0">
+                          <a:solidFill>
+                            <a:srgbClr val="111111"/>
+                          </a:solidFill>
+                        </a:rPr>
+                        <a:t>-8.17 to -2.36 (90% WALD)</a:t>
+                      </a:r>
+                    </a:p>
+                  </a:txBody>
+                  <a:tcPr/>
+                </a:tc>
+                <a:tc>
+                  <a:txBody>
+                    <a:bodyPr/>
+                    <a:lstStyle/>
+                    <a:p>
+                      <a:r>
+                        <a:rPr sz="892" b="0">
+                          <a:solidFill>
+                            <a:srgbClr val="111111"/>
+                          </a:solidFill>
+                        </a:rPr>
+                        <a:t>0.00</a:t>
+                      </a:r>
+                    </a:p>
+                  </a:txBody>
+                  <a:tcPr/>
+                </a:tc>
+                <a:tc>
+                  <a:txBody>
+                    <a:bodyPr/>
+                    <a:lstStyle/>
+                    <a:p>
+                      <a:r>
+                        <a:rPr sz="892" b="0">
+                          <a:solidFill>
+                            <a:srgbClr val="111111"/>
+                          </a:solidFill>
+                        </a:rPr>
+                        <a:t>below threshold</a:t>
+                      </a:r>
+                    </a:p>
+                  </a:txBody>
+                  <a:tcPr/>
+                </a:tc>
+              </a:tr>
+            </a:tbl>
+          </a:graphicData>
+        </a:graphic>
+      </p:graphicFrame>
+    </p:spTree>
+  </p:cSld>
+  <p:clrMapOvr>
+    <a:masterClrMapping/>
+  </p:clrMapOvr>
+</p:sld>
+</file>
+
+<file path=ppt/slides/slide13.xml><?xml version="1.0" encoding="utf-8"?>
+<p:sld xmlns:a="http://schemas.openxmlformats.org/drawingml/2006/main" xmlns:p="http://schemas.openxmlformats.org/presentationml/2006/main" xmlns:r="http://schemas.openxmlformats.org/officeDocument/2006/relationships">
+  <p:cSld>
+    <p:spTree>
+      <p:nvGrpSpPr>
+        <p:cNvPr id="1" name=""/>
+        <p:cNvGrpSpPr/>
+        <p:nvPr/>
+      </p:nvGrpSpPr>
+      <p:grpSpPr/>
+      <p:sp>
+        <p:nvSpPr>
+          <p:cNvPr id="2" name="TextBox 1"/>
+          <p:cNvSpPr txBox="1"/>
+          <p:nvPr/>
+        </p:nvSpPr>
+        <p:spPr>
+          <a:xfrm>
+            <a:off x="812800" y="406400"/>
+            <a:ext cx="10566400" cy="431800"/>
+          </a:xfrm>
+          <a:prstGeom prst="rect">
+            <a:avLst/>
+          </a:prstGeom>
+          <a:noFill/>
+        </p:spPr>
+        <p:txBody>
+          <a:bodyPr wrap="square">
+            <a:spAutoFit/>
+          </a:bodyPr>
+          <a:lstStyle/>
+          <a:p>
+            <a:r>
+              <a:rPr sz="1350" b="1">
+                <a:solidFill>
+                  <a:srgbClr val="111111"/>
+                </a:solidFill>
+              </a:rPr>
+              <a:t>4. Model checking</a:t>
+            </a:r>
+          </a:p>
+        </p:txBody>
+      </p:sp>
+      <p:sp>
+        <p:nvSpPr>
+          <p:cNvPr id="3" name="TextBox 2"/>
+          <p:cNvSpPr txBox="1"/>
+          <p:nvPr/>
+        </p:nvSpPr>
+        <p:spPr>
+          <a:xfrm>
+            <a:off x="812800" y="914400"/>
+            <a:ext cx="2540000" cy="889000"/>
+          </a:xfrm>
+          <a:prstGeom prst="rect">
+            <a:avLst/>
+          </a:prstGeom>
+          <a:noFill/>
+        </p:spPr>
+        <p:txBody>
+          <a:bodyPr wrap="square">
+            <a:spAutoFit/>
+          </a:bodyPr>
+          <a:lstStyle/>
+          <a:p>
+            <a:r>
+              <a:rPr sz="892" b="0">
+                <a:solidFill>
+                  <a:srgbClr val="555555"/>
+                </a:solidFill>
+              </a:rPr>
+              <a:t>UNITS STILL ON STUDY AT THE FINAL WEEK</a:t>
+            </a:r>
+          </a:p>
+          <a:p>
+            <a:r>
+              <a:rPr sz="1520" b="1">
+                <a:solidFill>
+                  <a:srgbClr val="1A1A1A"/>
+                </a:solidFill>
+              </a:rPr>
+              <a:t>0.797</a:t>
+            </a:r>
+          </a:p>
+        </p:txBody>
+      </p:sp>
+      <p:sp>
+        <p:nvSpPr>
+          <p:cNvPr id="4" name="TextBox 3"/>
+          <p:cNvSpPr txBox="1"/>
+          <p:nvPr/>
+        </p:nvSpPr>
+        <p:spPr>
+          <a:xfrm>
+            <a:off x="3454400" y="914400"/>
+            <a:ext cx="2540000" cy="889000"/>
+          </a:xfrm>
+          <a:prstGeom prst="rect">
+            <a:avLst/>
+          </a:prstGeom>
+          <a:noFill/>
+        </p:spPr>
+        <p:txBody>
+          <a:bodyPr wrap="square">
+            <a:spAutoFit/>
+          </a:bodyPr>
+          <a:lstStyle/>
+          <a:p>
+            <a:r>
+              <a:rPr sz="892" b="0">
+                <a:solidFill>
+                  <a:srgbClr val="555555"/>
+                </a:solidFill>
+              </a:rPr>
+              <a:t>UNITS CONTRIBUTING TO THE PRIMARY ENDPOINT</a:t>
+            </a:r>
+          </a:p>
+          <a:p>
+            <a:r>
+              <a:rPr sz="1520" b="1">
+                <a:solidFill>
+                  <a:srgbClr val="1A1A1A"/>
+                </a:solidFill>
+              </a:rPr>
+              <a:t>372</a:t>
+            </a:r>
+          </a:p>
+        </p:txBody>
+      </p:sp>
+      <p:sp>
+        <p:nvSpPr>
+          <p:cNvPr id="5" name="TextBox 4"/>
+          <p:cNvSpPr txBox="1"/>
+          <p:nvPr/>
+        </p:nvSpPr>
+        <p:spPr>
+          <a:xfrm>
+            <a:off x="6096000" y="914400"/>
+            <a:ext cx="2540000" cy="889000"/>
+          </a:xfrm>
+          <a:prstGeom prst="rect">
+            <a:avLst/>
+          </a:prstGeom>
+          <a:noFill/>
+        </p:spPr>
+        <p:txBody>
+          <a:bodyPr wrap="square">
+            <a:spAutoFit/>
+          </a:bodyPr>
+          <a:lstStyle/>
+          <a:p>
+            <a:r>
+              <a:rPr sz="892" b="0">
+                <a:solidFill>
+                  <a:srgbClr val="555555"/>
+                </a:solidFill>
+              </a:rPr>
+              <a:t>UNITS RANDOMIZED IN BAND AGE 25 35</a:t>
+            </a:r>
+          </a:p>
+          <a:p>
+            <a:r>
+              <a:rPr sz="1520" b="1">
+                <a:solidFill>
+                  <a:srgbClr val="1A1A1A"/>
+                </a:solidFill>
+              </a:rPr>
+              <a:t>100</a:t>
+            </a:r>
+          </a:p>
+        </p:txBody>
+      </p:sp>
+      <p:sp>
+        <p:nvSpPr>
+          <p:cNvPr id="6" name="TextBox 5"/>
+          <p:cNvSpPr txBox="1"/>
+          <p:nvPr/>
+        </p:nvSpPr>
+        <p:spPr>
+          <a:xfrm>
+            <a:off x="8737600" y="914400"/>
+            <a:ext cx="2540000" cy="889000"/>
+          </a:xfrm>
+          <a:prstGeom prst="rect">
+            <a:avLst/>
+          </a:prstGeom>
+          <a:noFill/>
+        </p:spPr>
+        <p:txBody>
+          <a:bodyPr wrap="square">
+            <a:spAutoFit/>
+          </a:bodyPr>
+          <a:lstStyle/>
+          <a:p>
+            <a:r>
+              <a:rPr sz="892" b="0">
+                <a:solidFill>
+                  <a:srgbClr val="555555"/>
+                </a:solidFill>
+              </a:rPr>
+              <a:t>UNITS RANDOMIZED IN BAND AGE 36 50</a:t>
+            </a:r>
+          </a:p>
+          <a:p>
+            <a:r>
+              <a:rPr sz="1520" b="1">
+                <a:solidFill>
+                  <a:srgbClr val="1A1A1A"/>
+                </a:solidFill>
+              </a:rPr>
+              <a:t>160</a:t>
+            </a:r>
+          </a:p>
+        </p:txBody>
+      </p:sp>
+      <p:sp>
+        <p:nvSpPr>
+          <p:cNvPr id="7" name="TextBox 6"/>
+          <p:cNvSpPr txBox="1"/>
+          <p:nvPr/>
+        </p:nvSpPr>
+        <p:spPr>
+          <a:xfrm>
+            <a:off x="812800" y="1955800"/>
+            <a:ext cx="10566400" cy="508000"/>
+          </a:xfrm>
+          <a:prstGeom prst="rect">
+            <a:avLst/>
+          </a:prstGeom>
+          <a:noFill/>
+        </p:spPr>
+        <p:txBody>
+          <a:bodyPr wrap="square">
+            <a:spAutoFit/>
+          </a:bodyPr>
+          <a:lstStyle/>
+          <a:p>
+            <a:r>
+              <a:rPr sz="1050" b="0">
+                <a:solidFill>
+                  <a:srgbClr val="111111"/>
+                </a:solidFill>
+              </a:rPr>
+              <a:t>Diagnostic checks assess sample retention and age distribution across the study. A check of this kind can lower confidence in an estimate and can never establish one. Recorded diagnostics for HYPER-3 are reported in Table 5. The units still on study at the final week is 0.797. The units contributing to the primary endpoint is 372. Across the age groupings, the units randomized in band age 25 35 is 100. The units randomized in band age 36 50 is 160. The units randomized in band age 51 plus is 140. These measures examine sample retention and cohort allocation, leaving identification conditions unexamined by these numbers.</a:t>
+            </a:r>
+          </a:p>
+        </p:txBody>
+      </p:sp>
+    </p:spTree>
+  </p:cSld>
+  <p:clrMapOvr>
+    <a:masterClrMapping/>
+  </p:clrMapOvr>
+</p:sld>
+</file>
+
+<file path=ppt/slides/slide14.xml><?xml version="1.0" encoding="utf-8"?>
+<p:sld xmlns:a="http://schemas.openxmlformats.org/drawingml/2006/main" xmlns:p="http://schemas.openxmlformats.org/presentationml/2006/main" xmlns:r="http://schemas.openxmlformats.org/officeDocument/2006/relationships">
+  <p:cSld>
+    <p:spTree>
+      <p:nvGrpSpPr>
+        <p:cNvPr id="1" name=""/>
+        <p:cNvGrpSpPr/>
+        <p:nvPr/>
+      </p:nvGrpSpPr>
+      <p:grpSpPr/>
+      <p:sp>
+        <p:nvSpPr>
+          <p:cNvPr id="2" name="TextBox 1"/>
+          <p:cNvSpPr txBox="1"/>
+          <p:nvPr/>
+        </p:nvSpPr>
+        <p:spPr>
+          <a:xfrm>
+            <a:off x="812800" y="406400"/>
+            <a:ext cx="10566400" cy="431800"/>
+          </a:xfrm>
+          <a:prstGeom prst="rect">
+            <a:avLst/>
+          </a:prstGeom>
+          <a:noFill/>
+        </p:spPr>
+        <p:txBody>
+          <a:bodyPr wrap="square">
+            <a:spAutoFit/>
+          </a:bodyPr>
+          <a:lstStyle/>
+          <a:p>
+            <a:r>
+              <a:rPr sz="1350" b="1">
+                <a:solidFill>
+                  <a:srgbClr val="111111"/>
+                </a:solidFill>
+              </a:rPr>
               <a:t>4. Model checking (cont.)</a:t>
             </a:r>
           </a:p>
@@ -3694,7 +4871,7 @@
 </p:sld>
 </file>
 
-<file path=ppt/slides/slide11.xml><?xml version="1.0" encoding="utf-8"?>
+<file path=ppt/slides/slide15.xml><?xml version="1.0" encoding="utf-8"?>
 <p:sld xmlns:a="http://schemas.openxmlformats.org/drawingml/2006/main" xmlns:p="http://schemas.openxmlformats.org/presentationml/2006/main" xmlns:r="http://schemas.openxmlformats.org/officeDocument/2006/relationships">
   <p:cSld>
     <p:spTree>
@@ -3765,7 +4942,7 @@
                   <a:srgbClr val="111111"/>
                 </a:solidFill>
               </a:rPr>
-              <a:t>The effect is identified via the backdoor route, which licenses interpreting these estimates as treatment effects rather than associations under the trial assumptions. For the 10 mg dose versus control, the pooled effect is -5.27 mmHg (90% WALD -6.63 to -3.91 mmHg), where the interval lies entirely below the 0.00 mmHg threshold on the favourable side. For the 20 mg dose versus control, the pooled effect is -4.80 mmHg (90% WALD -6.17 to -3.44 mmHg), with the interval also falling entirely below the 0.00 mmHg threshold on the favourable side. For the 40 mg dose versus control, the pooled effect is -1.53 mmHg (90% WALD -2.97 to -0.10 mmHg), with an interval located entirely below 0.00 mmHg on the favourable side. This pooled estimate for the 40 mg dose should not be evaluated alone, as it averages across an age band that benefits and an age band that is harmed. For participants in the age band 25-35, the 40 mg dose versus control yields an effect of -5.26 mmHg (90% WALD -8.17 to -2.36 mmHg), lying entirely below the 0.00 mmHg threshold on the favourable side. For participants in the age band 51+, the 40 mg dose versus control yields an effect of 6.20 mmHg (90% WALD 3.98 to 8.42 mmHg). Because this interval lies entirely above 0.00 mmHg on the unfavourable side, it reflects the harm contrast that the pooled figure conceals and that the safety boundary was designed to monitor. All of these conclusions remain conditional on two unresolved assumptions: that dropout is ignorable given baseline, and that the pooled contrast answers the question.</a:t>
+              <a:t>For 40 mg vs control, age 51+, the estimate settled above the threshold, on the unfavourable side. This contrasts with the pooled estimates for 40 mg vs control, 20 mg vs control, and 10 mg vs control, each of which settled below the threshold, on the favourable side. The estimate for 40 mg vs control, age 25-35, likewise settled below the threshold on the favourable side. While the pooled comparisons for all three daily doses agree in falling on the favourable side of the decision boundary, the age-stratified results reveal a clear split at the highest dose. The pooled estimate for 40 mg conceals the unfavourable direction observed specifically in the older cohort. This divergence raises the question of whether the 40 mg dose poses a risk to older participants even as younger cohorts show favourable outcomes. Through the backdoor route identified in the methods, the results license reading these quantities as treatment effects rather than unadjusted associations. They do not license inferences beyond the conditions specified by that identification strategy. Finally, these interpretations remain subject to 2 unresolved assumptions, the details and challenges of which are stated in the limitations section.</a:t>
             </a:r>
           </a:p>
         </p:txBody>
@@ -3778,7 +4955,7 @@
 </p:sld>
 </file>
 
-<file path=ppt/slides/slide12.xml><?xml version="1.0" encoding="utf-8"?>
+<file path=ppt/slides/slide16.xml><?xml version="1.0" encoding="utf-8"?>
 <p:sld xmlns:a="http://schemas.openxmlformats.org/drawingml/2006/main" xmlns:p="http://schemas.openxmlformats.org/presentationml/2006/main" xmlns:r="http://schemas.openxmlformats.org/officeDocument/2006/relationships">
   <p:cSld>
     <p:spTree>
@@ -3849,7 +5026,7 @@
                   <a:srgbClr val="111111"/>
                 </a:solidFill>
               </a:rPr>
-              <a:t>The selection of a dose for phase III and the assessment of harm cannot be resolved with a single pooled figure, conditional on dropout being ignorable given baseline and the pooled contrast answering the question. For the 40 mg dose versus control among participants aged 51 and older, the estimated effect is 6.20 mmHg (90% WALD 3.98 to 8.42 mmHg), which sits on the unfavorable side of the threshold. Four other findings sit on the favorable side of the threshold. The 40 mg dose versus control in the age 25 to 35 band is -5.26 mmHg (90% WALD -8.17 to -2.36 mmHg). Across pooled age bands, the 10 mg dose versus control is -5.27 mmHg (90% WALD -6.63 to -3.91 mmHg). The pooled 20 mg dose versus control is -4.80 mmHg (90% WALD -6.17 to -3.44 mmHg). The pooled 40 mg dose versus control is -1.53 mmHg (90% WALD -2.97 to -0.10 mmHg). A single pooled summary averages harm in one age stratum with benefit in another. Consequently, the pooled figure is not a substitute for the stratum-specific estimates, and the disaggregated findings form the substantive result. The effect is identified via the backdoor route. These conclusions hold under the unresolved assumptions that dropout is ignorable given baseline and that the pooled contrast answers the question.</a:t>
+              <a:t>The choice of a daily dose for phase III must account for evidence of harm at the highest dose within older age groups. Across the pooled analyses, the 10 mg, 20 mg, and 40 mg doses versus control all settled below the decision threshold on the favourable side. The 40 mg dose versus control also settled on the favourable side for participants aged 25 to 35. For participants aged 51 and older, however, the 40 mg dose versus control settled on the unfavourable side of the threshold at 6.20 mmHg (90% WALD 3.98 to 8.42 mmHg). A phase III recommendation therefore cannot rely on the pooled results without addressing this subgroup harm. The identified effects follow the identification strategy established in the methods. These conclusions remain conditional on two unresolved assumptions: that dropout is ignorable given baseline, and that the pooled contrast answers the question. What each assumption claims is detailed in the limitations section.</a:t>
             </a:r>
           </a:p>
         </p:txBody>
@@ -3862,7 +5039,7 @@
 </p:sld>
 </file>
 
-<file path=ppt/slides/slide13.xml><?xml version="1.0" encoding="utf-8"?>
+<file path=ppt/slides/slide17.xml><?xml version="1.0" encoding="utf-8"?>
 <p:sld xmlns:a="http://schemas.openxmlformats.org/drawingml/2006/main" xmlns:p="http://schemas.openxmlformats.org/presentationml/2006/main" xmlns:r="http://schemas.openxmlformats.org/officeDocument/2006/relationships">
   <p:cSld>
     <p:spTree>
@@ -3933,7 +5110,7 @@
                   <a:srgbClr val="111111"/>
                 </a:solidFill>
               </a:rPr>
-              <a:t>Two unresolved assumptions perform inferential work that the data alone cannot settle. Stating each assumption explicitly identifies what it licenses and what would challenge its validity. The first assumption is that dropout is ignorable given baseline measurements. Under this condition, units who left the study are assumed to differ from those who remained only through characteristics recorded prior to randomization. This assumption licenses evaluating treatment effects from the observed outcomes conditional on baseline adjustments. The ignorability of dropout remains an assumption and has not been verified. It would be challenged by a tipping-point analysis evaluating plausible departures from ignorability. The second assumption is that the pooled contrast answers the decision question. This assumes that a single summary measure across all age bands adequately describes the effect under evaluation. It licenses relying on the aggregate contrast rather than stratum-specific estimates to guide dose selection. This assumption is known to fail. It is challenged by treatment effect heterogeneity across the pre-specified age strata.</a:t>
+              <a:t>The analysis relies on two structural assumptions, the first of which is known to fail: that the pooled contrast answers the question. This assumption claims that a single number over all age bands describes the effect the decision is about, licensing an aggregate summary across the entire sample. It is challenged by heterogeneity across the pre-specified strata. Second, the analysis leaves unverified the assumption that dropout is ignorable given baseline. That assumption claims that units who left the study differ from those who stayed only through what was measured before randomization, licensing the identification of the effect despite study attrition. This ignorability condition would be challenged by a tipping-point analysis over plausible departures from ignorability. These two conditions define where the empirical framework holds and what specific evidence would challenge it.</a:t>
             </a:r>
           </a:p>
         </p:txBody>
@@ -3946,7 +5123,7 @@
 </p:sld>
 </file>
 
-<file path=ppt/slides/slide14.xml><?xml version="1.0" encoding="utf-8"?>
+<file path=ppt/slides/slide18.xml><?xml version="1.0" encoding="utf-8"?>
 <p:sld xmlns:a="http://schemas.openxmlformats.org/drawingml/2006/main" xmlns:p="http://schemas.openxmlformats.org/presentationml/2006/main" xmlns:r="http://schemas.openxmlformats.org/officeDocument/2006/relationships">
   <p:cSld>
     <p:spTree>
@@ -5051,7 +6228,7 @@
                             <a:srgbClr val="111111"/>
                           </a:solidFill>
                         </a:rPr>
-                        <a:t>962d1a7970f3f2dfdc0297e7d9d6d16dd568a5441fc1cfaa7c44837d40f9c2e5</a:t>
+                        <a:t>f6c953a837c79459cb14b031868abf7f0b1adb6e235b32abca19246ffd9d5ecc</a:t>
                       </a:r>
                     </a:p>
                   </a:txBody>
@@ -5429,7 +6606,7 @@
                   <a:srgbClr val="111111"/>
                 </a:solidFill>
               </a:rPr>
-              <a:t>The study addresses which of three daily doses should go into phase III and whether any of them is harming the people taking it. The effect of arm on change is identified via the backdoor route. Four hundred adults with elevated or stage-1 hypertension were randomized to standard of care or to one of three daily doses, stratified by age band. Seated systolic pressure was measured weekly, with endpoints averaging readings inside windows. Each dose was compared with control by ANCOVA on the change from baseline, adjusting for baseline pressure and for age band when pooled. For the pooled analysis, the 40 mg dose compared with control was -1.53 mmHg (90% WALD -2.97 to -0.10 mmHg), the 20 mg dose compared with control was -4.80 mmHg (90% WALD -6.17 to -3.44 mmHg), and the 10 mg dose compared with control was -5.27 mmHg (90% WALD -6.63 to -3.91 mmHg). Subgroup analysis of the 40 mg dose compared with control yielded 6.20 mmHg (90% WALD 3.98 to 8.42 mmHg) for age 51+ and -5.26 mmHg (90% WALD -8.17 to -2.36 mmHg) for age 25-35. Twelve harm contrasts were monitored at scheduled safety reviews. The strongest standing assumptions are that dropout is ignorable given baseline and that the pooled contrast answers the question.</a:t>
+              <a:t>Four hundred adults with elevated or stage-1 hypertension were randomized to evaluate three daily doses against standard of care. The trial addressed which daily dose should advance to phase III and whether any dose harms the participants. The target effect of treatment on change is identified via the backdoor route, under the strongest assumption that dropout is ignorable given baseline. Each dose was compared with control by ANCOVA on the change from baseline, adjusting for baseline pressure and age band for pooled contrasts. The pooled contrasts for 40 mg, 20 mg, and 10 mg against control all settled below the threshold on the favourable side, while the 40 mg contrast in the 51-and-older age band settled above the threshold on the unfavourable side at 6.20 mmHg (90% WALD 3.98 to 8.42 mmHg) and the 40 mg contrast in the 25-35 age band settled below the threshold on the favourable side. These findings indicate that while the pooled doses favour advancement, age-specific heterogeneity reveals harm in the oldest subgroup.</a:t>
             </a:r>
           </a:p>
         </p:txBody>
@@ -5442,7 +6619,7 @@
         </p:nvSpPr>
         <p:spPr>
           <a:xfrm>
-            <a:off x="812800" y="2006600"/>
+            <a:off x="812800" y="1854200"/>
             <a:ext cx="10566400" cy="508000"/>
           </a:xfrm>
           <a:prstGeom prst="rect">
@@ -5459,10 +6636,10 @@
             <a:r>
               <a:rPr sz="1050" b="0">
                 <a:solidFill>
-                  <a:srgbClr val="111111"/>
+                  <a:srgbClr val="1A1A1A"/>
                 </a:solidFill>
               </a:rPr>
-              <a:t>*Reported quantities:* 40 mg vs control, pooled; 20 mg vs control, pooled; 10 mg vs control, pooled; 40 mg vs control, age 51+</a:t>
+              <a:t>Reported quantities: 40 mg vs control, pooled; 20 mg vs control, pooled; 10 mg vs control, pooled; 40 mg vs control, age 51+</a:t>
             </a:r>
           </a:p>
         </p:txBody>
@@ -5546,7 +6723,7 @@
                   <a:srgbClr val="111111"/>
                 </a:solidFill>
               </a:rPr>
-              <a:t>This study evaluates which of three daily doses should advance to phase III and assesses whether any of the doses harms the participants taking it. The inquiry centers on the pooled contrast comparing the 40 mg dose against control. The decision criterion turns on a reference threshold of 0.00 mmHg. An interval estimate that lies entirely on one side of 0.00 mmHg settles the question. An interval that spans 0.00 mmHg leaves the question unsettled. In addition to average dose effects, the assessment requires determining whether harm occurs across the studied groups. The conclusions of the study are conditional throughout. Specifically, the findings depend on two unresolved assumptions: that dropout is ignorable given baseline and that the pooled contrast answers the question. These assumptions govern the interpretation of both the comparative efficacy and safety evaluations.</a:t>
+              <a:t>This report addresses which of three daily doses should go into phase III, and whether any of them is harming the people taking it. The quantity needed to answer the question is identified. The question is answered by 40 mg vs control, pooled. The decision turns on a threshold of 0.00 mmHg. An interval lying wholly on one side of 0.00 mmHg settles the question. An interval that spans 0.00 mmHg leaves the question unsettled rather than indicating that there is no effect.</a:t>
             </a:r>
           </a:p>
         </p:txBody>
@@ -5630,7 +6807,7 @@
                   <a:srgbClr val="111111"/>
                 </a:solidFill>
               </a:rPr>
-              <a:t>The target of estimation is the effect of treatment arm on change in blood pressure, identified via the backdoor route. In the trial protocol, 400 adults with elevated or stage-1 hypertension were randomized 2:1:1:1 to standard of care or to one of three daily doses, stratified by age band. The design estimates three contrasts against a shared control rather than evaluating active doses against one another. Seated systolic pressure was measured weekly. Both study endpoints average readings across a window—weeks 5–8 for safety and weeks 9–12 for the primary endpoint—rather than relying on a single visit. Averaging correlated readings reduces the variance of an individual endpoint, enabling the safety boundary to operate within strata. Each dose was compared with control using ANCOVA on the change from baseline, adjusting for baseline pressure, and for age band when the contrast was pooled across bands. Randomization licenses the intent-to-treat contrast. Adjusting for pre-randomization covariates provides precision without altering the identification established by randomization. Twelve harm contrasts, evaluating each dose against control overall and within each age band, were monitored at scheduled safety reviews against a posterior-probability boundary with a 2 mmHg clinical margin. Pre-specifying the age bands as monitored contrasts permits harm within a specific stratum to be identified prior to study completion.</a:t>
+              <a:t>To address the question set out in the introduction, 400 adults with elevated or stage-1 hypertension were randomized 2:1:1:1 to standard of care or to one of three daily doses, stratified by age band. Because the goal is to decide which dose to take forward, the design estimates three contrasts against a shared control rather than one against another, with protocol parameters recorded in Table 3. Seated systolic pressure was measured weekly, and endpoints average the readings inside a window—weeks 5–8 for safety and 9–12 for the primary—rather than reading a single visit. Averaging several correlated readings roughly halves the variance of a unit's endpoint, which is the difference between a safety boundary that can fire inside a stratum and one that cannot. The target of the analysis is the effect of arm on change, which is identified via the backdoor route. The graph turns on the arrows adherence -&gt; change, age -&gt; change, arm -&gt; adherence, arm -&gt; change, and baseline -&gt; change, as reported in Table 1 and displayed in Figure 1, where a hollow node was not measured and a dashed edge is an unmeasured common cause. Each dose was compared with control by ANCOVA on the change from baseline, adjusting for baseline pressure, and for age band when the contrast is pooled across bands. Randomization licenses the intent-to-treat contrast and nothing else. Adjusting for a pre-randomization covariate costs nothing and buys precision, whereas adjusting for anything measured afterwards would forfeit the identification the randomization provided. Twelve harm contrasts—each dose against control overall and inside each age band—were monitored at scheduled safety reviews against a posterior-probability boundary with a 2 mmHg clinical margin. A dose that helps on average can still harm one band, and pre-specifying the bands as monitored contrasts makes that visible before the trial ends, whereas no estimator applied at closeout would have found it earlier. The design relies on two unresolved standing assumptions listed in Table 2, named dropout is ignorable given baseline and the pooled contrast answers the question.</a:t>
             </a:r>
           </a:p>
         </p:txBody>
@@ -5643,7 +6820,7 @@
         </p:nvSpPr>
         <p:spPr>
           <a:xfrm>
-            <a:off x="812800" y="2159000"/>
+            <a:off x="812800" y="2616200"/>
             <a:ext cx="10566400" cy="508000"/>
           </a:xfrm>
           <a:prstGeom prst="rect">
@@ -5663,259 +6840,21 @@
                   <a:srgbClr val="111111"/>
                 </a:solidFill>
               </a:rPr>
-              <a:t>Assumptions this analysis rests on</a:t>
-            </a:r>
-          </a:p>
-        </p:txBody>
-      </p:sp>
-      <p:graphicFrame>
-        <p:nvGraphicFramePr>
-          <p:cNvPr id="5" name="Table 4"/>
-          <p:cNvGraphicFramePr>
-            <a:graphicFrameLocks noGrp="1"/>
-          </p:cNvGraphicFramePr>
-          <p:nvPr/>
-        </p:nvGraphicFramePr>
-        <p:xfrm>
-          <a:off x="812800" y="2413000"/>
-          <a:ext cx="10566400" cy="914400"/>
-        </p:xfrm>
-        <a:graphic>
-          <a:graphicData uri="http://schemas.openxmlformats.org/drawingml/2006/table">
-            <a:tbl>
-              <a:tblPr firstRow="1" bandRow="1">
-                <a:tableStyleId>{5C22544A-7EE6-4342-B048-85BDC9FD1C3A}</a:tableStyleId>
-              </a:tblPr>
-              <a:tblGrid>
-                <a:gridCol w="2641600"/>
-                <a:gridCol w="2641600"/>
-                <a:gridCol w="2641600"/>
-                <a:gridCol w="2641600"/>
-              </a:tblGrid>
-              <a:tr h="304800">
-                <a:tc>
-                  <a:txBody>
-                    <a:bodyPr/>
-                    <a:lstStyle/>
-                    <a:p>
-                      <a:r>
-                        <a:rPr sz="892" b="1">
-                          <a:solidFill>
-                            <a:srgbClr val="111111"/>
-                          </a:solidFill>
-                        </a:rPr>
-                        <a:t>Assumption</a:t>
-                      </a:r>
-                    </a:p>
-                  </a:txBody>
-                  <a:tcPr/>
-                </a:tc>
-                <a:tc>
-                  <a:txBody>
-                    <a:bodyPr/>
-                    <a:lstStyle/>
-                    <a:p>
-                      <a:r>
-                        <a:rPr sz="892" b="1">
-                          <a:solidFill>
-                            <a:srgbClr val="111111"/>
-                          </a:solidFill>
-                        </a:rPr>
-                        <a:t>Statement</a:t>
-                      </a:r>
-                    </a:p>
-                  </a:txBody>
-                  <a:tcPr/>
-                </a:tc>
-                <a:tc>
-                  <a:txBody>
-                    <a:bodyPr/>
-                    <a:lstStyle/>
-                    <a:p>
-                      <a:r>
-                        <a:rPr sz="892" b="1">
-                          <a:solidFill>
-                            <a:srgbClr val="111111"/>
-                          </a:solidFill>
-                        </a:rPr>
-                        <a:t>Status</a:t>
-                      </a:r>
-                    </a:p>
-                  </a:txBody>
-                  <a:tcPr/>
-                </a:tc>
-                <a:tc>
-                  <a:txBody>
-                    <a:bodyPr/>
-                    <a:lstStyle/>
-                    <a:p>
-                      <a:r>
-                        <a:rPr sz="892" b="1">
-                          <a:solidFill>
-                            <a:srgbClr val="111111"/>
-                          </a:solidFill>
-                        </a:rPr>
-                        <a:t>Challenged by</a:t>
-                      </a:r>
-                    </a:p>
-                  </a:txBody>
-                  <a:tcPr/>
-                </a:tc>
-              </a:tr>
-              <a:tr h="304800">
-                <a:tc>
-                  <a:txBody>
-                    <a:bodyPr/>
-                    <a:lstStyle/>
-                    <a:p>
-                      <a:r>
-                        <a:rPr sz="892" b="0">
-                          <a:solidFill>
-                            <a:srgbClr val="111111"/>
-                          </a:solidFill>
-                        </a:rPr>
-                        <a:t>dropout is ignorable given baseline</a:t>
-                      </a:r>
-                    </a:p>
-                  </a:txBody>
-                  <a:tcPr/>
-                </a:tc>
-                <a:tc>
-                  <a:txBody>
-                    <a:bodyPr/>
-                    <a:lstStyle/>
-                    <a:p>
-                      <a:r>
-                        <a:rPr sz="892" b="0">
-                          <a:solidFill>
-                            <a:srgbClr val="111111"/>
-                          </a:solidFill>
-                        </a:rPr>
-                        <a:t>units who left the study differ from those who stayed only through what was measured before randomization</a:t>
-                      </a:r>
-                    </a:p>
-                  </a:txBody>
-                  <a:tcPr/>
-                </a:tc>
-                <a:tc>
-                  <a:txBody>
-                    <a:bodyPr/>
-                    <a:lstStyle/>
-                    <a:p>
-                      <a:r>
-                        <a:rPr sz="892" b="0">
-                          <a:solidFill>
-                            <a:srgbClr val="111111"/>
-                          </a:solidFill>
-                        </a:rPr>
-                        <a:t>is assumed and has not been checked</a:t>
-                      </a:r>
-                    </a:p>
-                  </a:txBody>
-                  <a:tcPr/>
-                </a:tc>
-                <a:tc>
-                  <a:txBody>
-                    <a:bodyPr/>
-                    <a:lstStyle/>
-                    <a:p>
-                      <a:r>
-                        <a:rPr sz="892" b="0">
-                          <a:solidFill>
-                            <a:srgbClr val="111111"/>
-                          </a:solidFill>
-                        </a:rPr>
-                        <a:t>a tipping-point analysis over plausible departures from ignorability</a:t>
-                      </a:r>
-                    </a:p>
-                  </a:txBody>
-                  <a:tcPr/>
-                </a:tc>
-              </a:tr>
-              <a:tr h="304800">
-                <a:tc>
-                  <a:txBody>
-                    <a:bodyPr/>
-                    <a:lstStyle/>
-                    <a:p>
-                      <a:r>
-                        <a:rPr sz="892" b="0">
-                          <a:solidFill>
-                            <a:srgbClr val="111111"/>
-                          </a:solidFill>
-                        </a:rPr>
-                        <a:t>the pooled contrast answers the question</a:t>
-                      </a:r>
-                    </a:p>
-                  </a:txBody>
-                  <a:tcPr/>
-                </a:tc>
-                <a:tc>
-                  <a:txBody>
-                    <a:bodyPr/>
-                    <a:lstStyle/>
-                    <a:p>
-                      <a:r>
-                        <a:rPr sz="892" b="0">
-                          <a:solidFill>
-                            <a:srgbClr val="111111"/>
-                          </a:solidFill>
-                        </a:rPr>
-                        <a:t>a single number over all age bands describes the effect the decision is about</a:t>
-                      </a:r>
-                    </a:p>
-                  </a:txBody>
-                  <a:tcPr/>
-                </a:tc>
-                <a:tc>
-                  <a:txBody>
-                    <a:bodyPr/>
-                    <a:lstStyle/>
-                    <a:p>
-                      <a:r>
-                        <a:rPr sz="892" b="0">
-                          <a:solidFill>
-                            <a:srgbClr val="111111"/>
-                          </a:solidFill>
-                        </a:rPr>
-                        <a:t>is known to fail</a:t>
-                      </a:r>
-                    </a:p>
-                  </a:txBody>
-                  <a:tcPr/>
-                </a:tc>
-                <a:tc>
-                  <a:txBody>
-                    <a:bodyPr/>
-                    <a:lstStyle/>
-                    <a:p>
-                      <a:r>
-                        <a:rPr sz="892" b="0">
-                          <a:solidFill>
-                            <a:srgbClr val="111111"/>
-                          </a:solidFill>
-                        </a:rPr>
-                        <a:t>heterogeneity across the pre-specified strata</a:t>
-                      </a:r>
-                    </a:p>
-                  </a:txBody>
-                  <a:tcPr/>
-                </a:tc>
-              </a:tr>
-            </a:tbl>
-          </a:graphicData>
-        </a:graphic>
-      </p:graphicFrame>
-      <p:sp>
-        <p:nvSpPr>
-          <p:cNvPr id="6" name="TextBox 5"/>
+              <a:t>Protocol</a:t>
+            </a:r>
+          </a:p>
+        </p:txBody>
+      </p:sp>
+      <p:sp>
+        <p:nvSpPr>
+          <p:cNvPr id="5" name="TextBox 4"/>
           <p:cNvSpPr txBox="1"/>
           <p:nvPr/>
         </p:nvSpPr>
         <p:spPr>
           <a:xfrm>
-            <a:off x="812800" y="3479800"/>
-            <a:ext cx="10566400" cy="2565400"/>
+            <a:off x="812800" y="2870200"/>
+            <a:ext cx="10566400" cy="508000"/>
           </a:xfrm>
           <a:prstGeom prst="rect">
             <a:avLst/>
@@ -5929,1023 +6868,85 @@
           <a:lstStyle/>
           <a:p>
             <a:r>
-              <a:rPr sz="892" b="1">
-                <a:solidFill>
-                  <a:srgbClr val="1A1A1A"/>
-                </a:solidFill>
-              </a:rPr>
-              <a:t>assumption  </a:t>
-            </a:r>
-            <a:r>
-              <a:rPr sz="945" b="0">
+              <a:rPr sz="1050" b="0">
                 <a:solidFill>
                   <a:srgbClr val="111111"/>
                 </a:solidFill>
               </a:rPr>
-              <a:t>Adherence was not adjusted for: it lies on the path from arm to outcome, and conditioning on it would break the randomization.</a:t>
-            </a:r>
-          </a:p>
-          <a:p>
-            <a:r>
-              <a:rPr sz="892" b="1">
-                <a:solidFill>
-                  <a:srgbClr val="1A1A1A"/>
-                </a:solidFill>
-              </a:rPr>
-              <a:t>assumption  </a:t>
-            </a:r>
-            <a:r>
-              <a:rPr sz="945" b="0">
+              <a:t>`arm_i ~ blocked randomization within age band, allocation 2:1:1:1`</a:t>
+            </a:r>
+          </a:p>
+        </p:txBody>
+      </p:sp>
+      <p:sp>
+        <p:nvSpPr>
+          <p:cNvPr id="6" name="TextBox 5"/>
+          <p:cNvSpPr txBox="1"/>
+          <p:nvPr/>
+        </p:nvSpPr>
+        <p:spPr>
+          <a:xfrm>
+            <a:off x="812800" y="3124200"/>
+            <a:ext cx="10566400" cy="508000"/>
+          </a:xfrm>
+          <a:prstGeom prst="rect">
+            <a:avLst/>
+          </a:prstGeom>
+          <a:noFill/>
+        </p:spPr>
+        <p:txBody>
+          <a:bodyPr wrap="square">
+            <a:spAutoFit/>
+          </a:bodyPr>
+          <a:lstStyle/>
+          <a:p>
+            <a:r>
+              <a:rPr sz="1050" b="1">
                 <a:solidFill>
                   <a:srgbClr val="111111"/>
                 </a:solidFill>
               </a:rPr>
-              <a:t>The pooled 40 mg contrast is reported alongside the per-band contrasts, never instead of them.</a:t>
-            </a:r>
-          </a:p>
-        </p:txBody>
-      </p:sp>
-      <p:graphicFrame>
-        <p:nvGraphicFramePr>
-          <p:cNvPr id="7" name="Table 6"/>
-          <p:cNvGraphicFramePr>
-            <a:graphicFrameLocks noGrp="1"/>
-          </p:cNvGraphicFramePr>
+              <a:t>Analysis</a:t>
+            </a:r>
+          </a:p>
+        </p:txBody>
+      </p:sp>
+      <p:sp>
+        <p:nvSpPr>
+          <p:cNvPr id="7" name="TextBox 6"/>
+          <p:cNvSpPr txBox="1"/>
           <p:nvPr/>
-        </p:nvGraphicFramePr>
-        <p:xfrm>
-          <a:off x="812800" y="4165600"/>
-          <a:ext cx="10566400" cy="1879600"/>
-        </p:xfrm>
-        <a:graphic>
-          <a:graphicData uri="http://schemas.openxmlformats.org/drawingml/2006/table">
-            <a:tbl>
-              <a:tblPr firstRow="1" bandRow="1">
-                <a:tableStyleId>{5C22544A-7EE6-4342-B048-85BDC9FD1C3A}</a:tableStyleId>
-              </a:tblPr>
-              <a:tblGrid>
-                <a:gridCol w="3522133"/>
-                <a:gridCol w="3522133"/>
-                <a:gridCol w="3522134"/>
-              </a:tblGrid>
-              <a:tr h="104422">
-                <a:tc>
-                  <a:txBody>
-                    <a:bodyPr/>
-                    <a:lstStyle/>
-                    <a:p>
-                      <a:r>
-                        <a:rPr sz="892" b="1">
-                          <a:solidFill>
-                            <a:srgbClr val="111111"/>
-                          </a:solidFill>
-                        </a:rPr>
-                        <a:t>Step</a:t>
-                      </a:r>
-                    </a:p>
-                  </a:txBody>
-                  <a:tcPr/>
-                </a:tc>
-                <a:tc>
-                  <a:txBody>
-                    <a:bodyPr/>
-                    <a:lstStyle/>
-                    <a:p>
-                      <a:r>
-                        <a:rPr sz="892" b="1">
-                          <a:solidFill>
-                            <a:srgbClr val="111111"/>
-                          </a:solidFill>
-                        </a:rPr>
-                        <a:t>Parameter</a:t>
-                      </a:r>
-                    </a:p>
-                  </a:txBody>
-                  <a:tcPr/>
-                </a:tc>
-                <a:tc>
-                  <a:txBody>
-                    <a:bodyPr/>
-                    <a:lstStyle/>
-                    <a:p>
-                      <a:r>
-                        <a:rPr sz="892" b="1">
-                          <a:solidFill>
-                            <a:srgbClr val="111111"/>
-                          </a:solidFill>
-                        </a:rPr>
-                        <a:t>Value</a:t>
-                      </a:r>
-                    </a:p>
-                  </a:txBody>
-                  <a:tcPr/>
-                </a:tc>
-              </a:tr>
-              <a:tr h="104422">
-                <a:tc>
-                  <a:txBody>
-                    <a:bodyPr/>
-                    <a:lstStyle/>
-                    <a:p>
-                      <a:r>
-                        <a:rPr sz="892" b="0">
-                          <a:solidFill>
-                            <a:srgbClr val="111111"/>
-                          </a:solidFill>
-                        </a:rPr>
-                        <a:t>Identification</a:t>
-                      </a:r>
-                    </a:p>
-                  </a:txBody>
-                  <a:tcPr/>
-                </a:tc>
-                <a:tc>
-                  <a:txBody>
-                    <a:bodyPr/>
-                    <a:lstStyle/>
-                    <a:p>
-                      <a:r>
-                        <a:rPr sz="892" b="0">
-                          <a:solidFill>
-                            <a:srgbClr val="111111"/>
-                          </a:solidFill>
-                        </a:rPr>
-                        <a:t>route</a:t>
-                      </a:r>
-                    </a:p>
-                  </a:txBody>
-                  <a:tcPr/>
-                </a:tc>
-                <a:tc>
-                  <a:txBody>
-                    <a:bodyPr/>
-                    <a:lstStyle/>
-                    <a:p>
-                      <a:r>
-                        <a:rPr sz="892" b="0">
-                          <a:solidFill>
-                            <a:srgbClr val="111111"/>
-                          </a:solidFill>
-                        </a:rPr>
-                        <a:t>backdoor</a:t>
-                      </a:r>
-                    </a:p>
-                  </a:txBody>
-                  <a:tcPr/>
-                </a:tc>
-              </a:tr>
-              <a:tr h="104422">
-                <a:tc>
-                  <a:txBody>
-                    <a:bodyPr/>
-                    <a:lstStyle/>
-                    <a:p>
-                      <a:r>
-                        <a:rPr sz="892" b="0">
-                          <a:solidFill>
-                            <a:srgbClr val="111111"/>
-                          </a:solidFill>
-                        </a:rPr>
-                        <a:t>Identification</a:t>
-                      </a:r>
-                    </a:p>
-                  </a:txBody>
-                  <a:tcPr/>
-                </a:tc>
-                <a:tc>
-                  <a:txBody>
-                    <a:bodyPr/>
-                    <a:lstStyle/>
-                    <a:p>
-                      <a:r>
-                        <a:rPr sz="892" b="0">
-                          <a:solidFill>
-                            <a:srgbClr val="111111"/>
-                          </a:solidFill>
-                        </a:rPr>
-                        <a:t>status</a:t>
-                      </a:r>
-                    </a:p>
-                  </a:txBody>
-                  <a:tcPr/>
-                </a:tc>
-                <a:tc>
-                  <a:txBody>
-                    <a:bodyPr/>
-                    <a:lstStyle/>
-                    <a:p>
-                      <a:r>
-                        <a:rPr sz="892" b="0">
-                          <a:solidFill>
-                            <a:srgbClr val="111111"/>
-                          </a:solidFill>
-                        </a:rPr>
-                        <a:t>identified</a:t>
-                      </a:r>
-                    </a:p>
-                  </a:txBody>
-                  <a:tcPr/>
-                </a:tc>
-              </a:tr>
-              <a:tr h="104422">
-                <a:tc>
-                  <a:txBody>
-                    <a:bodyPr/>
-                    <a:lstStyle/>
-                    <a:p>
-                      <a:r>
-                        <a:rPr sz="892" b="0">
-                          <a:solidFill>
-                            <a:srgbClr val="111111"/>
-                          </a:solidFill>
-                        </a:rPr>
-                        <a:t>Protocol</a:t>
-                      </a:r>
-                    </a:p>
-                  </a:txBody>
-                  <a:tcPr/>
-                </a:tc>
-                <a:tc>
-                  <a:txBody>
-                    <a:bodyPr/>
-                    <a:lstStyle/>
-                    <a:p>
-                      <a:r>
-                        <a:rPr sz="892" b="0">
-                          <a:solidFill>
-                            <a:srgbClr val="111111"/>
-                          </a:solidFill>
-                        </a:rPr>
-                        <a:t>allocation</a:t>
-                      </a:r>
-                    </a:p>
-                  </a:txBody>
-                  <a:tcPr/>
-                </a:tc>
-                <a:tc>
-                  <a:txBody>
-                    <a:bodyPr/>
-                    <a:lstStyle/>
-                    <a:p>
-                      <a:r>
-                        <a:rPr sz="892" b="0">
-                          <a:solidFill>
-                            <a:srgbClr val="111111"/>
-                          </a:solidFill>
-                        </a:rPr>
-                        <a:t>2:1:1:1</a:t>
-                      </a:r>
-                    </a:p>
-                  </a:txBody>
-                  <a:tcPr/>
-                </a:tc>
-              </a:tr>
-              <a:tr h="104422">
-                <a:tc>
-                  <a:txBody>
-                    <a:bodyPr/>
-                    <a:lstStyle/>
-                    <a:p>
-                      <a:r>
-                        <a:rPr sz="892" b="0">
-                          <a:solidFill>
-                            <a:srgbClr val="111111"/>
-                          </a:solidFill>
-                        </a:rPr>
-                        <a:t>Protocol</a:t>
-                      </a:r>
-                    </a:p>
-                  </a:txBody>
-                  <a:tcPr/>
-                </a:tc>
-                <a:tc>
-                  <a:txBody>
-                    <a:bodyPr/>
-                    <a:lstStyle/>
-                    <a:p>
-                      <a:r>
-                        <a:rPr sz="892" b="0">
-                          <a:solidFill>
-                            <a:srgbClr val="111111"/>
-                          </a:solidFill>
-                        </a:rPr>
-                        <a:t>arms</a:t>
-                      </a:r>
-                    </a:p>
-                  </a:txBody>
-                  <a:tcPr/>
-                </a:tc>
-                <a:tc>
-                  <a:txBody>
-                    <a:bodyPr/>
-                    <a:lstStyle/>
-                    <a:p>
-                      <a:r>
-                        <a:rPr sz="892" b="0">
-                          <a:solidFill>
-                            <a:srgbClr val="111111"/>
-                          </a:solidFill>
-                        </a:rPr>
-                        <a:t>standard_of_care, dose_10, dose_20, dose_40</a:t>
-                      </a:r>
-                    </a:p>
-                  </a:txBody>
-                  <a:tcPr/>
-                </a:tc>
-              </a:tr>
-              <a:tr h="104422">
-                <a:tc>
-                  <a:txBody>
-                    <a:bodyPr/>
-                    <a:lstStyle/>
-                    <a:p>
-                      <a:r>
-                        <a:rPr sz="892" b="0">
-                          <a:solidFill>
-                            <a:srgbClr val="111111"/>
-                          </a:solidFill>
-                        </a:rPr>
-                        <a:t>Protocol</a:t>
-                      </a:r>
-                    </a:p>
-                  </a:txBody>
-                  <a:tcPr/>
-                </a:tc>
-                <a:tc>
-                  <a:txBody>
-                    <a:bodyPr/>
-                    <a:lstStyle/>
-                    <a:p>
-                      <a:r>
-                        <a:rPr sz="892" b="0">
-                          <a:solidFill>
-                            <a:srgbClr val="111111"/>
-                          </a:solidFill>
-                        </a:rPr>
-                        <a:t>enrollment weeks</a:t>
-                      </a:r>
-                    </a:p>
-                  </a:txBody>
-                  <a:tcPr/>
-                </a:tc>
-                <a:tc>
-                  <a:txBody>
-                    <a:bodyPr/>
-                    <a:lstStyle/>
-                    <a:p>
-                      <a:r>
-                        <a:rPr sz="892" b="0">
-                          <a:solidFill>
-                            <a:srgbClr val="111111"/>
-                          </a:solidFill>
-                        </a:rPr>
-                        <a:t>16</a:t>
-                      </a:r>
-                    </a:p>
-                  </a:txBody>
-                  <a:tcPr/>
-                </a:tc>
-              </a:tr>
-              <a:tr h="104422">
-                <a:tc>
-                  <a:txBody>
-                    <a:bodyPr/>
-                    <a:lstStyle/>
-                    <a:p>
-                      <a:r>
-                        <a:rPr sz="892" b="0">
-                          <a:solidFill>
-                            <a:srgbClr val="111111"/>
-                          </a:solidFill>
-                        </a:rPr>
-                        <a:t>Protocol</a:t>
-                      </a:r>
-                    </a:p>
-                  </a:txBody>
-                  <a:tcPr/>
-                </a:tc>
-                <a:tc>
-                  <a:txBody>
-                    <a:bodyPr/>
-                    <a:lstStyle/>
-                    <a:p>
-                      <a:r>
-                        <a:rPr sz="892" b="0">
-                          <a:solidFill>
-                            <a:srgbClr val="111111"/>
-                          </a:solidFill>
-                        </a:rPr>
-                        <a:t>follow-up weeks</a:t>
-                      </a:r>
-                    </a:p>
-                  </a:txBody>
-                  <a:tcPr/>
-                </a:tc>
-                <a:tc>
-                  <a:txBody>
-                    <a:bodyPr/>
-                    <a:lstStyle/>
-                    <a:p>
-                      <a:r>
-                        <a:rPr sz="892" b="0">
-                          <a:solidFill>
-                            <a:srgbClr val="111111"/>
-                          </a:solidFill>
-                        </a:rPr>
-                        <a:t>24</a:t>
-                      </a:r>
-                    </a:p>
-                  </a:txBody>
-                  <a:tcPr/>
-                </a:tc>
-              </a:tr>
-              <a:tr h="104422">
-                <a:tc>
-                  <a:txBody>
-                    <a:bodyPr/>
-                    <a:lstStyle/>
-                    <a:p>
-                      <a:r>
-                        <a:rPr sz="892" b="0">
-                          <a:solidFill>
-                            <a:srgbClr val="111111"/>
-                          </a:solidFill>
-                        </a:rPr>
-                        <a:t>Protocol</a:t>
-                      </a:r>
-                    </a:p>
-                  </a:txBody>
-                  <a:tcPr/>
-                </a:tc>
-                <a:tc>
-                  <a:txBody>
-                    <a:bodyPr/>
-                    <a:lstStyle/>
-                    <a:p>
-                      <a:r>
-                        <a:rPr sz="892" b="0">
-                          <a:solidFill>
-                            <a:srgbClr val="111111"/>
-                          </a:solidFill>
-                        </a:rPr>
-                        <a:t>primary endpoint week</a:t>
-                      </a:r>
-                    </a:p>
-                  </a:txBody>
-                  <a:tcPr/>
-                </a:tc>
-                <a:tc>
-                  <a:txBody>
-                    <a:bodyPr/>
-                    <a:lstStyle/>
-                    <a:p>
-                      <a:r>
-                        <a:rPr sz="892" b="0">
-                          <a:solidFill>
-                            <a:srgbClr val="111111"/>
-                          </a:solidFill>
-                        </a:rPr>
-                        <a:t>12</a:t>
-                      </a:r>
-                    </a:p>
-                  </a:txBody>
-                  <a:tcPr/>
-                </a:tc>
-              </a:tr>
-              <a:tr h="104422">
-                <a:tc>
-                  <a:txBody>
-                    <a:bodyPr/>
-                    <a:lstStyle/>
-                    <a:p>
-                      <a:r>
-                        <a:rPr sz="892" b="0">
-                          <a:solidFill>
-                            <a:srgbClr val="111111"/>
-                          </a:solidFill>
-                        </a:rPr>
-                        <a:t>Protocol</a:t>
-                      </a:r>
-                    </a:p>
-                  </a:txBody>
-                  <a:tcPr/>
-                </a:tc>
-                <a:tc>
-                  <a:txBody>
-                    <a:bodyPr/>
-                    <a:lstStyle/>
-                    <a:p>
-                      <a:r>
-                        <a:rPr sz="892" b="0">
-                          <a:solidFill>
-                            <a:srgbClr val="111111"/>
-                          </a:solidFill>
-                        </a:rPr>
-                        <a:t>strata</a:t>
-                      </a:r>
-                    </a:p>
-                  </a:txBody>
-                  <a:tcPr/>
-                </a:tc>
-                <a:tc>
-                  <a:txBody>
-                    <a:bodyPr/>
-                    <a:lstStyle/>
-                    <a:p>
-                      <a:r>
-                        <a:rPr sz="892" b="0">
-                          <a:solidFill>
-                            <a:srgbClr val="111111"/>
-                          </a:solidFill>
-                        </a:rPr>
-                        <a:t>age_25_35, age_36_50, age_51_plus</a:t>
-                      </a:r>
-                    </a:p>
-                  </a:txBody>
-                  <a:tcPr/>
-                </a:tc>
-              </a:tr>
-              <a:tr h="104422">
-                <a:tc>
-                  <a:txBody>
-                    <a:bodyPr/>
-                    <a:lstStyle/>
-                    <a:p>
-                      <a:r>
-                        <a:rPr sz="892" b="0">
-                          <a:solidFill>
-                            <a:srgbClr val="111111"/>
-                          </a:solidFill>
-                        </a:rPr>
-                        <a:t>Protocol</a:t>
-                      </a:r>
-                    </a:p>
-                  </a:txBody>
-                  <a:tcPr/>
-                </a:tc>
-                <a:tc>
-                  <a:txBody>
-                    <a:bodyPr/>
-                    <a:lstStyle/>
-                    <a:p>
-                      <a:r>
-                        <a:rPr sz="892" b="0">
-                          <a:solidFill>
-                            <a:srgbClr val="111111"/>
-                          </a:solidFill>
-                        </a:rPr>
-                        <a:t>units randomized</a:t>
-                      </a:r>
-                    </a:p>
-                  </a:txBody>
-                  <a:tcPr/>
-                </a:tc>
-                <a:tc>
-                  <a:txBody>
-                    <a:bodyPr/>
-                    <a:lstStyle/>
-                    <a:p>
-                      <a:r>
-                        <a:rPr sz="892" b="0">
-                          <a:solidFill>
-                            <a:srgbClr val="111111"/>
-                          </a:solidFill>
-                        </a:rPr>
-                        <a:t>400</a:t>
-                      </a:r>
-                    </a:p>
-                  </a:txBody>
-                  <a:tcPr/>
-                </a:tc>
-              </a:tr>
-              <a:tr h="104422">
-                <a:tc>
-                  <a:txBody>
-                    <a:bodyPr/>
-                    <a:lstStyle/>
-                    <a:p>
-                      <a:r>
-                        <a:rPr sz="892" b="0">
-                          <a:solidFill>
-                            <a:srgbClr val="111111"/>
-                          </a:solidFill>
-                        </a:rPr>
-                        <a:t>Measurement</a:t>
-                      </a:r>
-                    </a:p>
-                  </a:txBody>
-                  <a:tcPr/>
-                </a:tc>
-                <a:tc>
-                  <a:txBody>
-                    <a:bodyPr/>
-                    <a:lstStyle/>
-                    <a:p>
-                      <a:r>
-                        <a:rPr sz="892" b="0">
-                          <a:solidFill>
-                            <a:srgbClr val="111111"/>
-                          </a:solidFill>
-                        </a:rPr>
-                        <a:t>minimum visits in window</a:t>
-                      </a:r>
-                    </a:p>
-                  </a:txBody>
-                  <a:tcPr/>
-                </a:tc>
-                <a:tc>
-                  <a:txBody>
-                    <a:bodyPr/>
-                    <a:lstStyle/>
-                    <a:p>
-                      <a:r>
-                        <a:rPr sz="892" b="0">
-                          <a:solidFill>
-                            <a:srgbClr val="111111"/>
-                          </a:solidFill>
-                        </a:rPr>
-                        <a:t>3</a:t>
-                      </a:r>
-                    </a:p>
-                  </a:txBody>
-                  <a:tcPr/>
-                </a:tc>
-              </a:tr>
-              <a:tr h="104422">
-                <a:tc>
-                  <a:txBody>
-                    <a:bodyPr/>
-                    <a:lstStyle/>
-                    <a:p>
-                      <a:r>
-                        <a:rPr sz="892" b="0">
-                          <a:solidFill>
-                            <a:srgbClr val="111111"/>
-                          </a:solidFill>
-                        </a:rPr>
-                        <a:t>Measurement</a:t>
-                      </a:r>
-                    </a:p>
-                  </a:txBody>
-                  <a:tcPr/>
-                </a:tc>
-                <a:tc>
-                  <a:txBody>
-                    <a:bodyPr/>
-                    <a:lstStyle/>
-                    <a:p>
-                      <a:r>
-                        <a:rPr sz="892" b="0">
-                          <a:solidFill>
-                            <a:srgbClr val="111111"/>
-                          </a:solidFill>
-                        </a:rPr>
-                        <a:t>retention at final week</a:t>
-                      </a:r>
-                    </a:p>
-                  </a:txBody>
-                  <a:tcPr/>
-                </a:tc>
-                <a:tc>
-                  <a:txBody>
-                    <a:bodyPr/>
-                    <a:lstStyle/>
-                    <a:p>
-                      <a:r>
-                        <a:rPr sz="892" b="0">
-                          <a:solidFill>
-                            <a:srgbClr val="111111"/>
-                          </a:solidFill>
-                        </a:rPr>
-                        <a:t>79.8%</a:t>
-                      </a:r>
-                    </a:p>
-                  </a:txBody>
-                  <a:tcPr/>
-                </a:tc>
-              </a:tr>
-              <a:tr h="104422">
-                <a:tc>
-                  <a:txBody>
-                    <a:bodyPr/>
-                    <a:lstStyle/>
-                    <a:p>
-                      <a:r>
-                        <a:rPr sz="892" b="0">
-                          <a:solidFill>
-                            <a:srgbClr val="111111"/>
-                          </a:solidFill>
-                        </a:rPr>
-                        <a:t>Analysis</a:t>
-                      </a:r>
-                    </a:p>
-                  </a:txBody>
-                  <a:tcPr/>
-                </a:tc>
-                <a:tc>
-                  <a:txBody>
-                    <a:bodyPr/>
-                    <a:lstStyle/>
-                    <a:p>
-                      <a:r>
-                        <a:rPr sz="892" b="0">
-                          <a:solidFill>
-                            <a:srgbClr val="111111"/>
-                          </a:solidFill>
-                        </a:rPr>
-                        <a:t>estimator</a:t>
-                      </a:r>
-                    </a:p>
-                  </a:txBody>
-                  <a:tcPr/>
-                </a:tc>
-                <a:tc>
-                  <a:txBody>
-                    <a:bodyPr/>
-                    <a:lstStyle/>
-                    <a:p>
-                      <a:r>
-                        <a:rPr sz="892" b="0">
-                          <a:solidFill>
-                            <a:srgbClr val="111111"/>
-                          </a:solidFill>
-                        </a:rPr>
-                        <a:t>ANCOVA (OLS on change, baseline-adjusted)</a:t>
-                      </a:r>
-                    </a:p>
-                  </a:txBody>
-                  <a:tcPr/>
-                </a:tc>
-              </a:tr>
-              <a:tr h="104422">
-                <a:tc>
-                  <a:txBody>
-                    <a:bodyPr/>
-                    <a:lstStyle/>
-                    <a:p>
-                      <a:r>
-                        <a:rPr sz="892" b="0">
-                          <a:solidFill>
-                            <a:srgbClr val="111111"/>
-                          </a:solidFill>
-                        </a:rPr>
-                        <a:t>Analysis</a:t>
-                      </a:r>
-                    </a:p>
-                  </a:txBody>
-                  <a:tcPr/>
-                </a:tc>
-                <a:tc>
-                  <a:txBody>
-                    <a:bodyPr/>
-                    <a:lstStyle/>
-                    <a:p>
-                      <a:r>
-                        <a:rPr sz="892" b="0">
-                          <a:solidFill>
-                            <a:srgbClr val="111111"/>
-                          </a:solidFill>
-                        </a:rPr>
-                        <a:t>interval mass</a:t>
-                      </a:r>
-                    </a:p>
-                  </a:txBody>
-                  <a:tcPr/>
-                </a:tc>
-                <a:tc>
-                  <a:txBody>
-                    <a:bodyPr/>
-                    <a:lstStyle/>
-                    <a:p>
-                      <a:r>
-                        <a:rPr sz="892" b="0">
-                          <a:solidFill>
-                            <a:srgbClr val="111111"/>
-                          </a:solidFill>
-                        </a:rPr>
-                        <a:t>90%</a:t>
-                      </a:r>
-                    </a:p>
-                  </a:txBody>
-                  <a:tcPr/>
-                </a:tc>
-              </a:tr>
-              <a:tr h="104422">
-                <a:tc>
-                  <a:txBody>
-                    <a:bodyPr/>
-                    <a:lstStyle/>
-                    <a:p>
-                      <a:r>
-                        <a:rPr sz="892" b="0">
-                          <a:solidFill>
-                            <a:srgbClr val="111111"/>
-                          </a:solidFill>
-                        </a:rPr>
-                        <a:t>Analysis</a:t>
-                      </a:r>
-                    </a:p>
-                  </a:txBody>
-                  <a:tcPr/>
-                </a:tc>
-                <a:tc>
-                  <a:txBody>
-                    <a:bodyPr/>
-                    <a:lstStyle/>
-                    <a:p>
-                      <a:r>
-                        <a:rPr sz="892" b="0">
-                          <a:solidFill>
-                            <a:srgbClr val="111111"/>
-                          </a:solidFill>
-                        </a:rPr>
-                        <a:t>pooled covariates</a:t>
-                      </a:r>
-                    </a:p>
-                  </a:txBody>
-                  <a:tcPr/>
-                </a:tc>
-                <a:tc>
-                  <a:txBody>
-                    <a:bodyPr/>
-                    <a:lstStyle/>
-                    <a:p>
-                      <a:r>
-                        <a:rPr sz="892" b="0">
-                          <a:solidFill>
-                            <a:srgbClr val="111111"/>
-                          </a:solidFill>
-                        </a:rPr>
-                        <a:t>baseline_centred, is_age_36_50, is_age_51_plus</a:t>
-                      </a:r>
-                    </a:p>
-                  </a:txBody>
-                  <a:tcPr/>
-                </a:tc>
-              </a:tr>
-              <a:tr h="104422">
-                <a:tc>
-                  <a:txBody>
-                    <a:bodyPr/>
-                    <a:lstStyle/>
-                    <a:p>
-                      <a:r>
-                        <a:rPr sz="892" b="0">
-                          <a:solidFill>
-                            <a:srgbClr val="111111"/>
-                          </a:solidFill>
-                        </a:rPr>
-                        <a:t>Analysis</a:t>
-                      </a:r>
-                    </a:p>
-                  </a:txBody>
-                  <a:tcPr/>
-                </a:tc>
-                <a:tc>
-                  <a:txBody>
-                    <a:bodyPr/>
-                    <a:lstStyle/>
-                    <a:p>
-                      <a:r>
-                        <a:rPr sz="892" b="0">
-                          <a:solidFill>
-                            <a:srgbClr val="111111"/>
-                          </a:solidFill>
-                        </a:rPr>
-                        <a:t>within-stratum covariates</a:t>
-                      </a:r>
-                    </a:p>
-                  </a:txBody>
-                  <a:tcPr/>
-                </a:tc>
-                <a:tc>
-                  <a:txBody>
-                    <a:bodyPr/>
-                    <a:lstStyle/>
-                    <a:p>
-                      <a:r>
-                        <a:rPr sz="892" b="0">
-                          <a:solidFill>
-                            <a:srgbClr val="111111"/>
-                          </a:solidFill>
-                        </a:rPr>
-                        <a:t>baseline_centred</a:t>
-                      </a:r>
-                    </a:p>
-                  </a:txBody>
-                  <a:tcPr/>
-                </a:tc>
-              </a:tr>
-              <a:tr h="104422">
-                <a:tc>
-                  <a:txBody>
-                    <a:bodyPr/>
-                    <a:lstStyle/>
-                    <a:p>
-                      <a:r>
-                        <a:rPr sz="892" b="0">
-                          <a:solidFill>
-                            <a:srgbClr val="111111"/>
-                          </a:solidFill>
-                        </a:rPr>
-                        <a:t>Safety monitoring</a:t>
-                      </a:r>
-                    </a:p>
-                  </a:txBody>
-                  <a:tcPr/>
-                </a:tc>
-                <a:tc>
-                  <a:txBody>
-                    <a:bodyPr/>
-                    <a:lstStyle/>
-                    <a:p>
-                      <a:r>
-                        <a:rPr sz="892" b="0">
-                          <a:solidFill>
-                            <a:srgbClr val="111111"/>
-                          </a:solidFill>
-                        </a:rPr>
-                        <a:t>clinical margin (mmHg)</a:t>
-                      </a:r>
-                    </a:p>
-                  </a:txBody>
-                  <a:tcPr/>
-                </a:tc>
-                <a:tc>
-                  <a:txBody>
-                    <a:bodyPr/>
-                    <a:lstStyle/>
-                    <a:p>
-                      <a:r>
-                        <a:rPr sz="892" b="0">
-                          <a:solidFill>
-                            <a:srgbClr val="111111"/>
-                          </a:solidFill>
-                        </a:rPr>
-                        <a:t>2</a:t>
-                      </a:r>
-                    </a:p>
-                  </a:txBody>
-                  <a:tcPr/>
-                </a:tc>
-              </a:tr>
-              <a:tr h="104426">
-                <a:tc>
-                  <a:txBody>
-                    <a:bodyPr/>
-                    <a:lstStyle/>
-                    <a:p>
-                      <a:r>
-                        <a:rPr sz="892" b="0">
-                          <a:solidFill>
-                            <a:srgbClr val="111111"/>
-                          </a:solidFill>
-                        </a:rPr>
-                        <a:t>Safety monitoring</a:t>
-                      </a:r>
-                    </a:p>
-                  </a:txBody>
-                  <a:tcPr/>
-                </a:tc>
-                <a:tc>
-                  <a:txBody>
-                    <a:bodyPr/>
-                    <a:lstStyle/>
-                    <a:p>
-                      <a:r>
-                        <a:rPr sz="892" b="0">
-                          <a:solidFill>
-                            <a:srgbClr val="111111"/>
-                          </a:solidFill>
-                        </a:rPr>
-                        <a:t>monitored contrasts</a:t>
-                      </a:r>
-                    </a:p>
-                  </a:txBody>
-                  <a:tcPr/>
-                </a:tc>
-                <a:tc>
-                  <a:txBody>
-                    <a:bodyPr/>
-                    <a:lstStyle/>
-                    <a:p>
-                      <a:r>
-                        <a:rPr sz="892" b="0">
-                          <a:solidFill>
-                            <a:srgbClr val="111111"/>
-                          </a:solidFill>
-                        </a:rPr>
-                        <a:t>12</a:t>
-                      </a:r>
-                    </a:p>
-                  </a:txBody>
-                  <a:tcPr/>
-                </a:tc>
-              </a:tr>
-            </a:tbl>
-          </a:graphicData>
-        </a:graphic>
-      </p:graphicFrame>
+        </p:nvSpPr>
+        <p:spPr>
+          <a:xfrm>
+            <a:off x="812800" y="3378200"/>
+            <a:ext cx="10566400" cy="508000"/>
+          </a:xfrm>
+          <a:prstGeom prst="rect">
+            <a:avLst/>
+          </a:prstGeom>
+          <a:noFill/>
+        </p:spPr>
+        <p:txBody>
+          <a:bodyPr wrap="square">
+            <a:spAutoFit/>
+          </a:bodyPr>
+          <a:lstStyle/>
+          <a:p>
+            <a:r>
+              <a:rPr sz="1050" b="0">
+                <a:solidFill>
+                  <a:srgbClr val="111111"/>
+                </a:solidFill>
+              </a:rPr>
+              <a:t>`change_i = beta0 + tau * treated_i + beta1 * baseline_i + eps_i`
+`  pooled, add:  + sum_b gamma_b * 1[age_band_i = b]`
+`  change_i   = mean(SBP_i, weeks 9-12) - SBP_i(baseline)`
+`  tau        = the contrast reported; treated_i = 1 for the dose arm`</a:t>
+            </a:r>
+          </a:p>
+        </p:txBody>
+      </p:sp>
     </p:spTree>
   </p:cSld>
   <p:clrMapOvr>
@@ -6992,7 +6993,7 @@
                   <a:srgbClr val="111111"/>
                 </a:solidFill>
               </a:rPr>
-              <a:t>3. Results</a:t>
+              <a:t>2. Methods (cont.)</a:t>
             </a:r>
           </a:p>
         </p:txBody>
@@ -7006,218 +7007,6 @@
         <p:spPr>
           <a:xfrm>
             <a:off x="812800" y="914400"/>
-            <a:ext cx="2540000" cy="889000"/>
-          </a:xfrm>
-          <a:prstGeom prst="rect">
-            <a:avLst/>
-          </a:prstGeom>
-          <a:noFill/>
-        </p:spPr>
-        <p:txBody>
-          <a:bodyPr wrap="square">
-            <a:spAutoFit/>
-          </a:bodyPr>
-          <a:lstStyle/>
-          <a:p>
-            <a:r>
-              <a:rPr sz="892" b="0">
-                <a:solidFill>
-                  <a:srgbClr val="555555"/>
-                </a:solidFill>
-              </a:rPr>
-              <a:t>40 MG VS CONTROL, POOLED</a:t>
-            </a:r>
-          </a:p>
-          <a:p>
-            <a:r>
-              <a:rPr sz="1520" b="1">
-                <a:solidFill>
-                  <a:srgbClr val="1A1A1A"/>
-                </a:solidFill>
-              </a:rPr>
-              <a:t>-1.53 mmHg</a:t>
-            </a:r>
-          </a:p>
-          <a:p>
-            <a:r>
-              <a:rPr sz="892" b="0">
-                <a:solidFill>
-                  <a:srgbClr val="555555"/>
-                </a:solidFill>
-              </a:rPr>
-              <a:t>[-2.965, -0.1035] (90% WALD)</a:t>
-            </a:r>
-          </a:p>
-        </p:txBody>
-      </p:sp>
-      <p:sp>
-        <p:nvSpPr>
-          <p:cNvPr id="4" name="TextBox 3"/>
-          <p:cNvSpPr txBox="1"/>
-          <p:nvPr/>
-        </p:nvSpPr>
-        <p:spPr>
-          <a:xfrm>
-            <a:off x="3454400" y="914400"/>
-            <a:ext cx="2540000" cy="889000"/>
-          </a:xfrm>
-          <a:prstGeom prst="rect">
-            <a:avLst/>
-          </a:prstGeom>
-          <a:noFill/>
-        </p:spPr>
-        <p:txBody>
-          <a:bodyPr wrap="square">
-            <a:spAutoFit/>
-          </a:bodyPr>
-          <a:lstStyle/>
-          <a:p>
-            <a:r>
-              <a:rPr sz="892" b="0">
-                <a:solidFill>
-                  <a:srgbClr val="555555"/>
-                </a:solidFill>
-              </a:rPr>
-              <a:t>20 MG VS CONTROL, POOLED</a:t>
-            </a:r>
-          </a:p>
-          <a:p>
-            <a:r>
-              <a:rPr sz="1520" b="1">
-                <a:solidFill>
-                  <a:srgbClr val="1A1A1A"/>
-                </a:solidFill>
-              </a:rPr>
-              <a:t>-4.80 mmHg</a:t>
-            </a:r>
-          </a:p>
-          <a:p>
-            <a:r>
-              <a:rPr sz="892" b="0">
-                <a:solidFill>
-                  <a:srgbClr val="555555"/>
-                </a:solidFill>
-              </a:rPr>
-              <a:t>[-6.171, -3.437] (90% WALD)</a:t>
-            </a:r>
-          </a:p>
-        </p:txBody>
-      </p:sp>
-      <p:sp>
-        <p:nvSpPr>
-          <p:cNvPr id="5" name="TextBox 4"/>
-          <p:cNvSpPr txBox="1"/>
-          <p:nvPr/>
-        </p:nvSpPr>
-        <p:spPr>
-          <a:xfrm>
-            <a:off x="6096000" y="914400"/>
-            <a:ext cx="2540000" cy="889000"/>
-          </a:xfrm>
-          <a:prstGeom prst="rect">
-            <a:avLst/>
-          </a:prstGeom>
-          <a:noFill/>
-        </p:spPr>
-        <p:txBody>
-          <a:bodyPr wrap="square">
-            <a:spAutoFit/>
-          </a:bodyPr>
-          <a:lstStyle/>
-          <a:p>
-            <a:r>
-              <a:rPr sz="892" b="0">
-                <a:solidFill>
-                  <a:srgbClr val="555555"/>
-                </a:solidFill>
-              </a:rPr>
-              <a:t>10 MG VS CONTROL, POOLED</a:t>
-            </a:r>
-          </a:p>
-          <a:p>
-            <a:r>
-              <a:rPr sz="1520" b="1">
-                <a:solidFill>
-                  <a:srgbClr val="1A1A1A"/>
-                </a:solidFill>
-              </a:rPr>
-              <a:t>-5.27 mmHg</a:t>
-            </a:r>
-          </a:p>
-          <a:p>
-            <a:r>
-              <a:rPr sz="892" b="0">
-                <a:solidFill>
-                  <a:srgbClr val="555555"/>
-                </a:solidFill>
-              </a:rPr>
-              <a:t>[-6.631, -3.907] (90% WALD)</a:t>
-            </a:r>
-          </a:p>
-        </p:txBody>
-      </p:sp>
-      <p:sp>
-        <p:nvSpPr>
-          <p:cNvPr id="6" name="TextBox 5"/>
-          <p:cNvSpPr txBox="1"/>
-          <p:nvPr/>
-        </p:nvSpPr>
-        <p:spPr>
-          <a:xfrm>
-            <a:off x="8737600" y="914400"/>
-            <a:ext cx="2540000" cy="889000"/>
-          </a:xfrm>
-          <a:prstGeom prst="rect">
-            <a:avLst/>
-          </a:prstGeom>
-          <a:noFill/>
-        </p:spPr>
-        <p:txBody>
-          <a:bodyPr wrap="square">
-            <a:spAutoFit/>
-          </a:bodyPr>
-          <a:lstStyle/>
-          <a:p>
-            <a:r>
-              <a:rPr sz="892" b="0">
-                <a:solidFill>
-                  <a:srgbClr val="555555"/>
-                </a:solidFill>
-              </a:rPr>
-              <a:t>40 MG VS CONTROL, AGE 51+</a:t>
-            </a:r>
-          </a:p>
-          <a:p>
-            <a:r>
-              <a:rPr sz="1520" b="1">
-                <a:solidFill>
-                  <a:srgbClr val="1A1A1A"/>
-                </a:solidFill>
-              </a:rPr>
-              <a:t>6.20 mmHg</a:t>
-            </a:r>
-          </a:p>
-          <a:p>
-            <a:r>
-              <a:rPr sz="892" b="0">
-                <a:solidFill>
-                  <a:srgbClr val="555555"/>
-                </a:solidFill>
-              </a:rPr>
-              <a:t>[3.985, 8.424] (90% WALD)</a:t>
-            </a:r>
-          </a:p>
-        </p:txBody>
-      </p:sp>
-      <p:sp>
-        <p:nvSpPr>
-          <p:cNvPr id="7" name="TextBox 6"/>
-          <p:cNvSpPr txBox="1"/>
-          <p:nvPr/>
-        </p:nvSpPr>
-        <p:spPr>
-          <a:xfrm>
-            <a:off x="812800" y="1955800"/>
             <a:ext cx="10566400" cy="508000"/>
           </a:xfrm>
           <a:prstGeom prst="rect">
@@ -7232,12 +7021,561 @@
           <a:lstStyle/>
           <a:p>
             <a:r>
+              <a:rPr sz="1050" b="1">
+                <a:solidFill>
+                  <a:srgbClr val="111111"/>
+                </a:solidFill>
+              </a:rPr>
+              <a:t>Safety monitoring</a:t>
+            </a:r>
+          </a:p>
+        </p:txBody>
+      </p:sp>
+      <p:sp>
+        <p:nvSpPr>
+          <p:cNvPr id="4" name="TextBox 3"/>
+          <p:cNvSpPr txBox="1"/>
+          <p:nvPr/>
+        </p:nvSpPr>
+        <p:spPr>
+          <a:xfrm>
+            <a:off x="812800" y="1168400"/>
+            <a:ext cx="10566400" cy="508000"/>
+          </a:xfrm>
+          <a:prstGeom prst="rect">
+            <a:avLst/>
+          </a:prstGeom>
+          <a:noFill/>
+        </p:spPr>
+        <p:txBody>
+          <a:bodyPr wrap="square">
+            <a:spAutoFit/>
+          </a:bodyPr>
+          <a:lstStyle/>
+          <a:p>
+            <a:r>
               <a:rPr sz="1050" b="0">
                 <a:solidFill>
                   <a:srgbClr val="111111"/>
                 </a:solidFill>
               </a:rPr>
-              <a:t>The pooled estimate for 40 mg versus control is -1.53 mmHg (90% Wald interval, -2.97 to -0.10 mmHg). For participants aged 51 and older, the estimated contrast for 40 mg versus control is 6.20 mmHg (90% Wald interval, 3.98 to 8.42 mmHg).</a:t>
+              <a:t>`stop for harm at look k when`
+`  P(tau_g &gt; delta | data_k) &gt; b_k     for any monitored contrast g`
+`  delta = the clinical margin; b_k = the boundary at look k`</a:t>
+            </a:r>
+          </a:p>
+        </p:txBody>
+      </p:sp>
+      <p:sp>
+        <p:nvSpPr>
+          <p:cNvPr id="5" name="TextBox 4"/>
+          <p:cNvSpPr txBox="1"/>
+          <p:nvPr/>
+        </p:nvSpPr>
+        <p:spPr>
+          <a:xfrm>
+            <a:off x="812800" y="1651000"/>
+            <a:ext cx="10566400" cy="508000"/>
+          </a:xfrm>
+          <a:prstGeom prst="rect">
+            <a:avLst/>
+          </a:prstGeom>
+          <a:noFill/>
+        </p:spPr>
+        <p:txBody>
+          <a:bodyPr wrap="square">
+            <a:spAutoFit/>
+          </a:bodyPr>
+          <a:lstStyle/>
+          <a:p>
+            <a:r>
+              <a:rPr sz="1050" b="1">
+                <a:solidFill>
+                  <a:srgbClr val="111111"/>
+                </a:solidFill>
+              </a:rPr>
+              <a:t>The identification graph</a:t>
+            </a:r>
+          </a:p>
+        </p:txBody>
+      </p:sp>
+      <p:graphicFrame>
+        <p:nvGraphicFramePr>
+          <p:cNvPr id="6" name="Table 5"/>
+          <p:cNvGraphicFramePr>
+            <a:graphicFrameLocks noGrp="1"/>
+          </p:cNvGraphicFramePr>
+          <p:nvPr/>
+        </p:nvGraphicFramePr>
+        <p:xfrm>
+          <a:off x="812800" y="1905000"/>
+          <a:ext cx="10566400" cy="1828800"/>
+        </p:xfrm>
+        <a:graphic>
+          <a:graphicData uri="http://schemas.openxmlformats.org/drawingml/2006/table">
+            <a:tbl>
+              <a:tblPr firstRow="1" bandRow="1">
+                <a:tableStyleId>{5C22544A-7EE6-4342-B048-85BDC9FD1C3A}</a:tableStyleId>
+              </a:tblPr>
+              <a:tblGrid>
+                <a:gridCol w="2641600"/>
+                <a:gridCol w="2641600"/>
+                <a:gridCol w="2641600"/>
+                <a:gridCol w="2641600"/>
+              </a:tblGrid>
+              <a:tr h="304800">
+                <a:tc>
+                  <a:txBody>
+                    <a:bodyPr/>
+                    <a:lstStyle/>
+                    <a:p>
+                      <a:r>
+                        <a:rPr sz="892" b="1">
+                          <a:solidFill>
+                            <a:srgbClr val="111111"/>
+                          </a:solidFill>
+                        </a:rPr>
+                        <a:t>From</a:t>
+                      </a:r>
+                    </a:p>
+                  </a:txBody>
+                  <a:tcPr/>
+                </a:tc>
+                <a:tc>
+                  <a:txBody>
+                    <a:bodyPr/>
+                    <a:lstStyle/>
+                    <a:p>
+                      <a:r>
+                        <a:rPr sz="892" b="1">
+                          <a:solidFill>
+                            <a:srgbClr val="111111"/>
+                          </a:solidFill>
+                        </a:rPr>
+                        <a:t>Arrow</a:t>
+                      </a:r>
+                    </a:p>
+                  </a:txBody>
+                  <a:tcPr/>
+                </a:tc>
+                <a:tc>
+                  <a:txBody>
+                    <a:bodyPr/>
+                    <a:lstStyle/>
+                    <a:p>
+                      <a:r>
+                        <a:rPr sz="892" b="1">
+                          <a:solidFill>
+                            <a:srgbClr val="111111"/>
+                          </a:solidFill>
+                        </a:rPr>
+                        <a:t>To</a:t>
+                      </a:r>
+                    </a:p>
+                  </a:txBody>
+                  <a:tcPr/>
+                </a:tc>
+                <a:tc>
+                  <a:txBody>
+                    <a:bodyPr/>
+                    <a:lstStyle/>
+                    <a:p>
+                      <a:r>
+                        <a:rPr sz="892" b="1">
+                          <a:solidFill>
+                            <a:srgbClr val="111111"/>
+                          </a:solidFill>
+                        </a:rPr>
+                        <a:t>Kind</a:t>
+                      </a:r>
+                    </a:p>
+                  </a:txBody>
+                  <a:tcPr/>
+                </a:tc>
+              </a:tr>
+              <a:tr h="304800">
+                <a:tc>
+                  <a:txBody>
+                    <a:bodyPr/>
+                    <a:lstStyle/>
+                    <a:p>
+                      <a:r>
+                        <a:rPr sz="892" b="0">
+                          <a:solidFill>
+                            <a:srgbClr val="111111"/>
+                          </a:solidFill>
+                        </a:rPr>
+                        <a:t>adherence</a:t>
+                      </a:r>
+                    </a:p>
+                  </a:txBody>
+                  <a:tcPr/>
+                </a:tc>
+                <a:tc>
+                  <a:txBody>
+                    <a:bodyPr/>
+                    <a:lstStyle/>
+                    <a:p>
+                      <a:r>
+                        <a:rPr sz="892" b="0">
+                          <a:solidFill>
+                            <a:srgbClr val="111111"/>
+                          </a:solidFill>
+                        </a:rPr>
+                        <a:t>→</a:t>
+                      </a:r>
+                    </a:p>
+                  </a:txBody>
+                  <a:tcPr/>
+                </a:tc>
+                <a:tc>
+                  <a:txBody>
+                    <a:bodyPr/>
+                    <a:lstStyle/>
+                    <a:p>
+                      <a:r>
+                        <a:rPr sz="892" b="0">
+                          <a:solidFill>
+                            <a:srgbClr val="111111"/>
+                          </a:solidFill>
+                        </a:rPr>
+                        <a:t>change</a:t>
+                      </a:r>
+                    </a:p>
+                  </a:txBody>
+                  <a:tcPr/>
+                </a:tc>
+                <a:tc>
+                  <a:txBody>
+                    <a:bodyPr/>
+                    <a:lstStyle/>
+                    <a:p>
+                      <a:r>
+                        <a:rPr sz="892" b="0">
+                          <a:solidFill>
+                            <a:srgbClr val="111111"/>
+                          </a:solidFill>
+                        </a:rPr>
+                        <a:t>direct effect</a:t>
+                      </a:r>
+                    </a:p>
+                  </a:txBody>
+                  <a:tcPr/>
+                </a:tc>
+              </a:tr>
+              <a:tr h="304800">
+                <a:tc>
+                  <a:txBody>
+                    <a:bodyPr/>
+                    <a:lstStyle/>
+                    <a:p>
+                      <a:r>
+                        <a:rPr sz="892" b="0">
+                          <a:solidFill>
+                            <a:srgbClr val="111111"/>
+                          </a:solidFill>
+                        </a:rPr>
+                        <a:t>age</a:t>
+                      </a:r>
+                    </a:p>
+                  </a:txBody>
+                  <a:tcPr/>
+                </a:tc>
+                <a:tc>
+                  <a:txBody>
+                    <a:bodyPr/>
+                    <a:lstStyle/>
+                    <a:p>
+                      <a:r>
+                        <a:rPr sz="892" b="0">
+                          <a:solidFill>
+                            <a:srgbClr val="111111"/>
+                          </a:solidFill>
+                        </a:rPr>
+                        <a:t>→</a:t>
+                      </a:r>
+                    </a:p>
+                  </a:txBody>
+                  <a:tcPr/>
+                </a:tc>
+                <a:tc>
+                  <a:txBody>
+                    <a:bodyPr/>
+                    <a:lstStyle/>
+                    <a:p>
+                      <a:r>
+                        <a:rPr sz="892" b="0">
+                          <a:solidFill>
+                            <a:srgbClr val="111111"/>
+                          </a:solidFill>
+                        </a:rPr>
+                        <a:t>change</a:t>
+                      </a:r>
+                    </a:p>
+                  </a:txBody>
+                  <a:tcPr/>
+                </a:tc>
+                <a:tc>
+                  <a:txBody>
+                    <a:bodyPr/>
+                    <a:lstStyle/>
+                    <a:p>
+                      <a:r>
+                        <a:rPr sz="892" b="0">
+                          <a:solidFill>
+                            <a:srgbClr val="111111"/>
+                          </a:solidFill>
+                        </a:rPr>
+                        <a:t>direct effect</a:t>
+                      </a:r>
+                    </a:p>
+                  </a:txBody>
+                  <a:tcPr/>
+                </a:tc>
+              </a:tr>
+              <a:tr h="304800">
+                <a:tc>
+                  <a:txBody>
+                    <a:bodyPr/>
+                    <a:lstStyle/>
+                    <a:p>
+                      <a:r>
+                        <a:rPr sz="892" b="0">
+                          <a:solidFill>
+                            <a:srgbClr val="111111"/>
+                          </a:solidFill>
+                        </a:rPr>
+                        <a:t>arm</a:t>
+                      </a:r>
+                    </a:p>
+                  </a:txBody>
+                  <a:tcPr/>
+                </a:tc>
+                <a:tc>
+                  <a:txBody>
+                    <a:bodyPr/>
+                    <a:lstStyle/>
+                    <a:p>
+                      <a:r>
+                        <a:rPr sz="892" b="0">
+                          <a:solidFill>
+                            <a:srgbClr val="111111"/>
+                          </a:solidFill>
+                        </a:rPr>
+                        <a:t>→</a:t>
+                      </a:r>
+                    </a:p>
+                  </a:txBody>
+                  <a:tcPr/>
+                </a:tc>
+                <a:tc>
+                  <a:txBody>
+                    <a:bodyPr/>
+                    <a:lstStyle/>
+                    <a:p>
+                      <a:r>
+                        <a:rPr sz="892" b="0">
+                          <a:solidFill>
+                            <a:srgbClr val="111111"/>
+                          </a:solidFill>
+                        </a:rPr>
+                        <a:t>adherence</a:t>
+                      </a:r>
+                    </a:p>
+                  </a:txBody>
+                  <a:tcPr/>
+                </a:tc>
+                <a:tc>
+                  <a:txBody>
+                    <a:bodyPr/>
+                    <a:lstStyle/>
+                    <a:p>
+                      <a:r>
+                        <a:rPr sz="892" b="0">
+                          <a:solidFill>
+                            <a:srgbClr val="111111"/>
+                          </a:solidFill>
+                        </a:rPr>
+                        <a:t>direct effect</a:t>
+                      </a:r>
+                    </a:p>
+                  </a:txBody>
+                  <a:tcPr/>
+                </a:tc>
+              </a:tr>
+              <a:tr h="304800">
+                <a:tc>
+                  <a:txBody>
+                    <a:bodyPr/>
+                    <a:lstStyle/>
+                    <a:p>
+                      <a:r>
+                        <a:rPr sz="892" b="0">
+                          <a:solidFill>
+                            <a:srgbClr val="111111"/>
+                          </a:solidFill>
+                        </a:rPr>
+                        <a:t>arm</a:t>
+                      </a:r>
+                    </a:p>
+                  </a:txBody>
+                  <a:tcPr/>
+                </a:tc>
+                <a:tc>
+                  <a:txBody>
+                    <a:bodyPr/>
+                    <a:lstStyle/>
+                    <a:p>
+                      <a:r>
+                        <a:rPr sz="892" b="0">
+                          <a:solidFill>
+                            <a:srgbClr val="111111"/>
+                          </a:solidFill>
+                        </a:rPr>
+                        <a:t>→</a:t>
+                      </a:r>
+                    </a:p>
+                  </a:txBody>
+                  <a:tcPr/>
+                </a:tc>
+                <a:tc>
+                  <a:txBody>
+                    <a:bodyPr/>
+                    <a:lstStyle/>
+                    <a:p>
+                      <a:r>
+                        <a:rPr sz="892" b="0">
+                          <a:solidFill>
+                            <a:srgbClr val="111111"/>
+                          </a:solidFill>
+                        </a:rPr>
+                        <a:t>change</a:t>
+                      </a:r>
+                    </a:p>
+                  </a:txBody>
+                  <a:tcPr/>
+                </a:tc>
+                <a:tc>
+                  <a:txBody>
+                    <a:bodyPr/>
+                    <a:lstStyle/>
+                    <a:p>
+                      <a:r>
+                        <a:rPr sz="892" b="0">
+                          <a:solidFill>
+                            <a:srgbClr val="111111"/>
+                          </a:solidFill>
+                        </a:rPr>
+                        <a:t>direct effect</a:t>
+                      </a:r>
+                    </a:p>
+                  </a:txBody>
+                  <a:tcPr/>
+                </a:tc>
+              </a:tr>
+              <a:tr h="304800">
+                <a:tc>
+                  <a:txBody>
+                    <a:bodyPr/>
+                    <a:lstStyle/>
+                    <a:p>
+                      <a:r>
+                        <a:rPr sz="892" b="0">
+                          <a:solidFill>
+                            <a:srgbClr val="111111"/>
+                          </a:solidFill>
+                        </a:rPr>
+                        <a:t>baseline</a:t>
+                      </a:r>
+                    </a:p>
+                  </a:txBody>
+                  <a:tcPr/>
+                </a:tc>
+                <a:tc>
+                  <a:txBody>
+                    <a:bodyPr/>
+                    <a:lstStyle/>
+                    <a:p>
+                      <a:r>
+                        <a:rPr sz="892" b="0">
+                          <a:solidFill>
+                            <a:srgbClr val="111111"/>
+                          </a:solidFill>
+                        </a:rPr>
+                        <a:t>→</a:t>
+                      </a:r>
+                    </a:p>
+                  </a:txBody>
+                  <a:tcPr/>
+                </a:tc>
+                <a:tc>
+                  <a:txBody>
+                    <a:bodyPr/>
+                    <a:lstStyle/>
+                    <a:p>
+                      <a:r>
+                        <a:rPr sz="892" b="0">
+                          <a:solidFill>
+                            <a:srgbClr val="111111"/>
+                          </a:solidFill>
+                        </a:rPr>
+                        <a:t>change</a:t>
+                      </a:r>
+                    </a:p>
+                  </a:txBody>
+                  <a:tcPr/>
+                </a:tc>
+                <a:tc>
+                  <a:txBody>
+                    <a:bodyPr/>
+                    <a:lstStyle/>
+                    <a:p>
+                      <a:r>
+                        <a:rPr sz="892" b="0">
+                          <a:solidFill>
+                            <a:srgbClr val="111111"/>
+                          </a:solidFill>
+                        </a:rPr>
+                        <a:t>direct effect</a:t>
+                      </a:r>
+                    </a:p>
+                  </a:txBody>
+                  <a:tcPr/>
+                </a:tc>
+              </a:tr>
+            </a:tbl>
+          </a:graphicData>
+        </a:graphic>
+      </p:graphicFrame>
+      <p:sp>
+        <p:nvSpPr>
+          <p:cNvPr id="7" name="TextBox 6"/>
+          <p:cNvSpPr txBox="1"/>
+          <p:nvPr/>
+        </p:nvSpPr>
+        <p:spPr>
+          <a:xfrm>
+            <a:off x="812800" y="3886200"/>
+            <a:ext cx="10566400" cy="508000"/>
+          </a:xfrm>
+          <a:prstGeom prst="rect">
+            <a:avLst/>
+          </a:prstGeom>
+          <a:noFill/>
+        </p:spPr>
+        <p:txBody>
+          <a:bodyPr wrap="square">
+            <a:spAutoFit/>
+          </a:bodyPr>
+          <a:lstStyle/>
+          <a:p>
+            <a:r>
+              <a:rPr sz="1050" b="1">
+                <a:solidFill>
+                  <a:srgbClr val="111111"/>
+                </a:solidFill>
+              </a:rPr>
+              <a:t>Assumptions this analysis rests on</a:t>
             </a:r>
           </a:p>
         </p:txBody>
@@ -7288,21 +7626,259 @@
                   <a:srgbClr val="111111"/>
                 </a:solidFill>
               </a:rPr>
-              <a:t>3. Results (cont.)</a:t>
-            </a:r>
-          </a:p>
-        </p:txBody>
-      </p:sp>
-      <p:sp>
-        <p:nvSpPr>
-          <p:cNvPr id="3" name="TextBox 2"/>
+              <a:t>2. Methods (cont.)</a:t>
+            </a:r>
+          </a:p>
+        </p:txBody>
+      </p:sp>
+      <p:graphicFrame>
+        <p:nvGraphicFramePr>
+          <p:cNvPr id="3" name="Table 2"/>
+          <p:cNvGraphicFramePr>
+            <a:graphicFrameLocks noGrp="1"/>
+          </p:cNvGraphicFramePr>
+          <p:nvPr/>
+        </p:nvGraphicFramePr>
+        <p:xfrm>
+          <a:off x="812800" y="914400"/>
+          <a:ext cx="10566400" cy="914400"/>
+        </p:xfrm>
+        <a:graphic>
+          <a:graphicData uri="http://schemas.openxmlformats.org/drawingml/2006/table">
+            <a:tbl>
+              <a:tblPr firstRow="1" bandRow="1">
+                <a:tableStyleId>{5C22544A-7EE6-4342-B048-85BDC9FD1C3A}</a:tableStyleId>
+              </a:tblPr>
+              <a:tblGrid>
+                <a:gridCol w="2641600"/>
+                <a:gridCol w="2641600"/>
+                <a:gridCol w="2641600"/>
+                <a:gridCol w="2641600"/>
+              </a:tblGrid>
+              <a:tr h="304800">
+                <a:tc>
+                  <a:txBody>
+                    <a:bodyPr/>
+                    <a:lstStyle/>
+                    <a:p>
+                      <a:r>
+                        <a:rPr sz="892" b="1">
+                          <a:solidFill>
+                            <a:srgbClr val="111111"/>
+                          </a:solidFill>
+                        </a:rPr>
+                        <a:t>Assumption</a:t>
+                      </a:r>
+                    </a:p>
+                  </a:txBody>
+                  <a:tcPr/>
+                </a:tc>
+                <a:tc>
+                  <a:txBody>
+                    <a:bodyPr/>
+                    <a:lstStyle/>
+                    <a:p>
+                      <a:r>
+                        <a:rPr sz="892" b="1">
+                          <a:solidFill>
+                            <a:srgbClr val="111111"/>
+                          </a:solidFill>
+                        </a:rPr>
+                        <a:t>Statement</a:t>
+                      </a:r>
+                    </a:p>
+                  </a:txBody>
+                  <a:tcPr/>
+                </a:tc>
+                <a:tc>
+                  <a:txBody>
+                    <a:bodyPr/>
+                    <a:lstStyle/>
+                    <a:p>
+                      <a:r>
+                        <a:rPr sz="892" b="1">
+                          <a:solidFill>
+                            <a:srgbClr val="111111"/>
+                          </a:solidFill>
+                        </a:rPr>
+                        <a:t>Status</a:t>
+                      </a:r>
+                    </a:p>
+                  </a:txBody>
+                  <a:tcPr/>
+                </a:tc>
+                <a:tc>
+                  <a:txBody>
+                    <a:bodyPr/>
+                    <a:lstStyle/>
+                    <a:p>
+                      <a:r>
+                        <a:rPr sz="892" b="1">
+                          <a:solidFill>
+                            <a:srgbClr val="111111"/>
+                          </a:solidFill>
+                        </a:rPr>
+                        <a:t>Challenged by</a:t>
+                      </a:r>
+                    </a:p>
+                  </a:txBody>
+                  <a:tcPr/>
+                </a:tc>
+              </a:tr>
+              <a:tr h="304800">
+                <a:tc>
+                  <a:txBody>
+                    <a:bodyPr/>
+                    <a:lstStyle/>
+                    <a:p>
+                      <a:r>
+                        <a:rPr sz="892" b="0">
+                          <a:solidFill>
+                            <a:srgbClr val="111111"/>
+                          </a:solidFill>
+                        </a:rPr>
+                        <a:t>dropout is ignorable given baseline</a:t>
+                      </a:r>
+                    </a:p>
+                  </a:txBody>
+                  <a:tcPr/>
+                </a:tc>
+                <a:tc>
+                  <a:txBody>
+                    <a:bodyPr/>
+                    <a:lstStyle/>
+                    <a:p>
+                      <a:r>
+                        <a:rPr sz="892" b="0">
+                          <a:solidFill>
+                            <a:srgbClr val="111111"/>
+                          </a:solidFill>
+                        </a:rPr>
+                        <a:t>units who left the study differ from those who stayed only through what was measured before randomization</a:t>
+                      </a:r>
+                    </a:p>
+                  </a:txBody>
+                  <a:tcPr/>
+                </a:tc>
+                <a:tc>
+                  <a:txBody>
+                    <a:bodyPr/>
+                    <a:lstStyle/>
+                    <a:p>
+                      <a:r>
+                        <a:rPr sz="892" b="0">
+                          <a:solidFill>
+                            <a:srgbClr val="111111"/>
+                          </a:solidFill>
+                        </a:rPr>
+                        <a:t>is assumed and has not been checked</a:t>
+                      </a:r>
+                    </a:p>
+                  </a:txBody>
+                  <a:tcPr/>
+                </a:tc>
+                <a:tc>
+                  <a:txBody>
+                    <a:bodyPr/>
+                    <a:lstStyle/>
+                    <a:p>
+                      <a:r>
+                        <a:rPr sz="892" b="0">
+                          <a:solidFill>
+                            <a:srgbClr val="111111"/>
+                          </a:solidFill>
+                        </a:rPr>
+                        <a:t>a tipping-point analysis over plausible departures from ignorability</a:t>
+                      </a:r>
+                    </a:p>
+                  </a:txBody>
+                  <a:tcPr/>
+                </a:tc>
+              </a:tr>
+              <a:tr h="304800">
+                <a:tc>
+                  <a:txBody>
+                    <a:bodyPr/>
+                    <a:lstStyle/>
+                    <a:p>
+                      <a:r>
+                        <a:rPr sz="892" b="0">
+                          <a:solidFill>
+                            <a:srgbClr val="111111"/>
+                          </a:solidFill>
+                        </a:rPr>
+                        <a:t>the pooled contrast answers the question</a:t>
+                      </a:r>
+                    </a:p>
+                  </a:txBody>
+                  <a:tcPr/>
+                </a:tc>
+                <a:tc>
+                  <a:txBody>
+                    <a:bodyPr/>
+                    <a:lstStyle/>
+                    <a:p>
+                      <a:r>
+                        <a:rPr sz="892" b="0">
+                          <a:solidFill>
+                            <a:srgbClr val="111111"/>
+                          </a:solidFill>
+                        </a:rPr>
+                        <a:t>a single number over all age bands describes the effect the decision is about</a:t>
+                      </a:r>
+                    </a:p>
+                  </a:txBody>
+                  <a:tcPr/>
+                </a:tc>
+                <a:tc>
+                  <a:txBody>
+                    <a:bodyPr/>
+                    <a:lstStyle/>
+                    <a:p>
+                      <a:r>
+                        <a:rPr sz="892" b="0">
+                          <a:solidFill>
+                            <a:srgbClr val="111111"/>
+                          </a:solidFill>
+                        </a:rPr>
+                        <a:t>is known to fail</a:t>
+                      </a:r>
+                    </a:p>
+                  </a:txBody>
+                  <a:tcPr/>
+                </a:tc>
+                <a:tc>
+                  <a:txBody>
+                    <a:bodyPr/>
+                    <a:lstStyle/>
+                    <a:p>
+                      <a:r>
+                        <a:rPr sz="892" b="0">
+                          <a:solidFill>
+                            <a:srgbClr val="111111"/>
+                          </a:solidFill>
+                        </a:rPr>
+                        <a:t>heterogeneity across the pre-specified strata</a:t>
+                      </a:r>
+                    </a:p>
+                  </a:txBody>
+                  <a:tcPr/>
+                </a:tc>
+              </a:tr>
+            </a:tbl>
+          </a:graphicData>
+        </a:graphic>
+      </p:graphicFrame>
+      <p:sp>
+        <p:nvSpPr>
+          <p:cNvPr id="4" name="TextBox 3"/>
           <p:cNvSpPr txBox="1"/>
           <p:nvPr/>
         </p:nvSpPr>
         <p:spPr>
           <a:xfrm>
-            <a:off x="812800" y="914400"/>
-            <a:ext cx="10464800" cy="889000"/>
+            <a:off x="812800" y="1981200"/>
+            <a:ext cx="10566400" cy="4064000"/>
           </a:xfrm>
           <a:prstGeom prst="rect">
             <a:avLst/>
@@ -7316,32 +7892,38 @@
           <a:lstStyle/>
           <a:p>
             <a:r>
-              <a:rPr sz="892" b="0">
-                <a:solidFill>
-                  <a:srgbClr val="555555"/>
-                </a:solidFill>
-              </a:rPr>
-              <a:t>40 MG VS CONTROL, AGE 25-35</a:t>
-            </a:r>
-          </a:p>
-          <a:p>
-            <a:r>
-              <a:rPr sz="1520" b="1">
+              <a:rPr sz="892" b="1">
                 <a:solidFill>
                   <a:srgbClr val="1A1A1A"/>
                 </a:solidFill>
               </a:rPr>
-              <a:t>-5.26 mmHg</a:t>
-            </a:r>
-          </a:p>
-          <a:p>
-            <a:r>
-              <a:rPr sz="892" b="0">
+              <a:t>assumption  </a:t>
+            </a:r>
+            <a:r>
+              <a:rPr sz="945" b="0">
                 <a:solidFill>
-                  <a:srgbClr val="555555"/>
+                  <a:srgbClr val="111111"/>
                 </a:solidFill>
               </a:rPr>
-              <a:t>[-8.166, -2.363] (90% WALD)</a:t>
+              <a:t>Adherence was not adjusted for: it lies on the path from arm to outcome, and conditioning on it would break the randomization.</a:t>
+            </a:r>
+          </a:p>
+          <a:p>
+            <a:r>
+              <a:rPr sz="892" b="1">
+                <a:solidFill>
+                  <a:srgbClr val="1A1A1A"/>
+                </a:solidFill>
+              </a:rPr>
+              <a:t>assumption  </a:t>
+            </a:r>
+            <a:r>
+              <a:rPr sz="945" b="0">
+                <a:solidFill>
+                  <a:srgbClr val="111111"/>
+                </a:solidFill>
+              </a:rPr>
+              <a:t>The pooled 40 mg contrast is reported alongside the per-band contrasts, never instead of them.</a:t>
             </a:r>
           </a:p>
         </p:txBody>
@@ -7392,7 +7974,7 @@
                   <a:srgbClr val="111111"/>
                 </a:solidFill>
               </a:rPr>
-              <a:t>3. Results (cont.)</a:t>
+              <a:t>2. Methods (cont.)</a:t>
             </a:r>
           </a:p>
         </p:txBody>
@@ -7449,7 +8031,7 @@
                   <a:srgbClr val="555555"/>
                 </a:solidFill>
               </a:rPr>
-              <a:t>Figure 1. Estimated quantities with their intervals</a:t>
+              <a:t>Figure 1. The identification graph. A hollow node was not measured and a dashed edge is an unmeasured common cause; those two are what decide whether the effect is identifiable at all</a:t>
             </a:r>
           </a:p>
         </p:txBody>
@@ -7500,7 +8082,7 @@
                   <a:srgbClr val="111111"/>
                 </a:solidFill>
               </a:rPr>
-              <a:t>3. Results (cont.)</a:t>
+              <a:t>2. Methods (cont.)</a:t>
             </a:r>
           </a:p>
         </p:txBody>
@@ -7515,7 +8097,7 @@
         </p:nvGraphicFramePr>
         <p:xfrm>
           <a:off x="812800" y="914400"/>
-          <a:ext cx="10566400" cy="1828800"/>
+          <a:ext cx="10566400" cy="5130800"/>
         </p:xfrm>
         <a:graphic>
           <a:graphicData uri="http://schemas.openxmlformats.org/drawingml/2006/table">
@@ -7524,14 +8106,11 @@
                 <a:tableStyleId>{5C22544A-7EE6-4342-B048-85BDC9FD1C3A}</a:tableStyleId>
               </a:tblPr>
               <a:tblGrid>
-                <a:gridCol w="1761066"/>
-                <a:gridCol w="1761066"/>
-                <a:gridCol w="1761066"/>
-                <a:gridCol w="1761066"/>
-                <a:gridCol w="1761066"/>
-                <a:gridCol w="1761070"/>
+                <a:gridCol w="3522133"/>
+                <a:gridCol w="3522133"/>
+                <a:gridCol w="3522134"/>
               </a:tblGrid>
-              <a:tr h="304800">
+              <a:tr h="256540">
                 <a:tc>
                   <a:txBody>
                     <a:bodyPr/>
@@ -7543,7 +8122,7 @@
                             <a:srgbClr val="111111"/>
                           </a:solidFill>
                         </a:rPr>
-                        <a:t>Quantity</a:t>
+                        <a:t>Step</a:t>
                       </a:r>
                     </a:p>
                   </a:txBody>
@@ -7560,7 +8139,7 @@
                             <a:srgbClr val="111111"/>
                           </a:solidFill>
                         </a:rPr>
-                        <a:t>Estimate</a:t>
+                        <a:t>Parameter</a:t>
                       </a:r>
                     </a:p>
                   </a:txBody>
@@ -7577,578 +8156,1014 @@
                             <a:srgbClr val="111111"/>
                           </a:solidFill>
                         </a:rPr>
-                        <a:t>Unit</a:t>
-                      </a:r>
-                    </a:p>
-                  </a:txBody>
-                  <a:tcPr/>
-                </a:tc>
-                <a:tc>
-                  <a:txBody>
-                    <a:bodyPr/>
-                    <a:lstStyle/>
-                    <a:p>
-                      <a:r>
-                        <a:rPr sz="892" b="1">
-                          <a:solidFill>
-                            <a:srgbClr val="111111"/>
-                          </a:solidFill>
-                        </a:rPr>
-                        <a:t>Interval</a:t>
-                      </a:r>
-                    </a:p>
-                  </a:txBody>
-                  <a:tcPr/>
-                </a:tc>
-                <a:tc>
-                  <a:txBody>
-                    <a:bodyPr/>
-                    <a:lstStyle/>
-                    <a:p>
-                      <a:r>
-                        <a:rPr sz="892" b="1">
-                          <a:solidFill>
-                            <a:srgbClr val="111111"/>
-                          </a:solidFill>
-                        </a:rPr>
-                        <a:t>Threshold</a:t>
-                      </a:r>
-                    </a:p>
-                  </a:txBody>
-                  <a:tcPr/>
-                </a:tc>
-                <a:tc>
-                  <a:txBody>
-                    <a:bodyPr/>
-                    <a:lstStyle/>
-                    <a:p>
-                      <a:r>
-                        <a:rPr sz="892" b="1">
-                          <a:solidFill>
-                            <a:srgbClr val="111111"/>
-                          </a:solidFill>
-                        </a:rPr>
-                        <a:t>Relative to threshold</a:t>
+                        <a:t>Value</a:t>
                       </a:r>
                     </a:p>
                   </a:txBody>
                   <a:tcPr/>
                 </a:tc>
               </a:tr>
-              <a:tr h="304800">
-                <a:tc>
-                  <a:txBody>
-                    <a:bodyPr/>
-                    <a:lstStyle/>
-                    <a:p>
-                      <a:r>
-                        <a:rPr sz="892" b="0">
-                          <a:solidFill>
-                            <a:srgbClr val="111111"/>
-                          </a:solidFill>
-                        </a:rPr>
-                        <a:t>40 mg vs control, pooled</a:t>
-                      </a:r>
-                    </a:p>
-                  </a:txBody>
-                  <a:tcPr/>
-                </a:tc>
-                <a:tc>
-                  <a:txBody>
-                    <a:bodyPr/>
-                    <a:lstStyle/>
-                    <a:p>
-                      <a:r>
-                        <a:rPr sz="892" b="0">
-                          <a:solidFill>
-                            <a:srgbClr val="111111"/>
-                          </a:solidFill>
-                        </a:rPr>
-                        <a:t>-1.53</a:t>
-                      </a:r>
-                    </a:p>
-                  </a:txBody>
-                  <a:tcPr/>
-                </a:tc>
-                <a:tc>
-                  <a:txBody>
-                    <a:bodyPr/>
-                    <a:lstStyle/>
-                    <a:p>
-                      <a:r>
-                        <a:rPr sz="892" b="0">
-                          <a:solidFill>
-                            <a:srgbClr val="111111"/>
-                          </a:solidFill>
-                        </a:rPr>
-                        <a:t>mmHg</a:t>
-                      </a:r>
-                    </a:p>
-                  </a:txBody>
-                  <a:tcPr/>
-                </a:tc>
-                <a:tc>
-                  <a:txBody>
-                    <a:bodyPr/>
-                    <a:lstStyle/>
-                    <a:p>
-                      <a:r>
-                        <a:rPr sz="892" b="0">
-                          <a:solidFill>
-                            <a:srgbClr val="111111"/>
-                          </a:solidFill>
-                        </a:rPr>
-                        <a:t>-2.97 to -0.10 (90% WALD)</a:t>
-                      </a:r>
-                    </a:p>
-                  </a:txBody>
-                  <a:tcPr/>
-                </a:tc>
-                <a:tc>
-                  <a:txBody>
-                    <a:bodyPr/>
-                    <a:lstStyle/>
-                    <a:p>
-                      <a:r>
-                        <a:rPr sz="892" b="0">
-                          <a:solidFill>
-                            <a:srgbClr val="111111"/>
-                          </a:solidFill>
-                        </a:rPr>
-                        <a:t>0.00</a:t>
-                      </a:r>
-                    </a:p>
-                  </a:txBody>
-                  <a:tcPr/>
-                </a:tc>
-                <a:tc>
-                  <a:txBody>
-                    <a:bodyPr/>
-                    <a:lstStyle/>
-                    <a:p>
-                      <a:r>
-                        <a:rPr sz="892" b="0">
-                          <a:solidFill>
-                            <a:srgbClr val="111111"/>
-                          </a:solidFill>
-                        </a:rPr>
-                        <a:t>below threshold</a:t>
+              <a:tr h="256540">
+                <a:tc>
+                  <a:txBody>
+                    <a:bodyPr/>
+                    <a:lstStyle/>
+                    <a:p>
+                      <a:r>
+                        <a:rPr sz="892" b="0">
+                          <a:solidFill>
+                            <a:srgbClr val="111111"/>
+                          </a:solidFill>
+                        </a:rPr>
+                        <a:t>Identification</a:t>
+                      </a:r>
+                    </a:p>
+                  </a:txBody>
+                  <a:tcPr/>
+                </a:tc>
+                <a:tc>
+                  <a:txBody>
+                    <a:bodyPr/>
+                    <a:lstStyle/>
+                    <a:p>
+                      <a:r>
+                        <a:rPr sz="892" b="0">
+                          <a:solidFill>
+                            <a:srgbClr val="111111"/>
+                          </a:solidFill>
+                        </a:rPr>
+                        <a:t>graph</a:t>
+                      </a:r>
+                    </a:p>
+                  </a:txBody>
+                  <a:tcPr/>
+                </a:tc>
+                <a:tc>
+                  <a:txBody>
+                    <a:bodyPr/>
+                    <a:lstStyle/>
+                    <a:p>
+                      <a:r>
+                        <a:rPr sz="892" b="0">
+                          <a:solidFill>
+                            <a:srgbClr val="111111"/>
+                          </a:solidFill>
+                        </a:rPr>
+                        <a:t>adherence -&gt; change, age -&gt; change, arm -&gt; adherence, arm -&gt; change, baseline -&gt; change</a:t>
                       </a:r>
                     </a:p>
                   </a:txBody>
                   <a:tcPr/>
                 </a:tc>
               </a:tr>
-              <a:tr h="304800">
-                <a:tc>
-                  <a:txBody>
-                    <a:bodyPr/>
-                    <a:lstStyle/>
-                    <a:p>
-                      <a:r>
-                        <a:rPr sz="892" b="0">
-                          <a:solidFill>
-                            <a:srgbClr val="111111"/>
-                          </a:solidFill>
-                        </a:rPr>
-                        <a:t>20 mg vs control, pooled</a:t>
-                      </a:r>
-                    </a:p>
-                  </a:txBody>
-                  <a:tcPr/>
-                </a:tc>
-                <a:tc>
-                  <a:txBody>
-                    <a:bodyPr/>
-                    <a:lstStyle/>
-                    <a:p>
-                      <a:r>
-                        <a:rPr sz="892" b="0">
-                          <a:solidFill>
-                            <a:srgbClr val="111111"/>
-                          </a:solidFill>
-                        </a:rPr>
-                        <a:t>-4.80</a:t>
-                      </a:r>
-                    </a:p>
-                  </a:txBody>
-                  <a:tcPr/>
-                </a:tc>
-                <a:tc>
-                  <a:txBody>
-                    <a:bodyPr/>
-                    <a:lstStyle/>
-                    <a:p>
-                      <a:r>
-                        <a:rPr sz="892" b="0">
-                          <a:solidFill>
-                            <a:srgbClr val="111111"/>
-                          </a:solidFill>
-                        </a:rPr>
-                        <a:t>mmHg</a:t>
-                      </a:r>
-                    </a:p>
-                  </a:txBody>
-                  <a:tcPr/>
-                </a:tc>
-                <a:tc>
-                  <a:txBody>
-                    <a:bodyPr/>
-                    <a:lstStyle/>
-                    <a:p>
-                      <a:r>
-                        <a:rPr sz="892" b="0">
-                          <a:solidFill>
-                            <a:srgbClr val="111111"/>
-                          </a:solidFill>
-                        </a:rPr>
-                        <a:t>-6.17 to -3.44 (90% WALD)</a:t>
-                      </a:r>
-                    </a:p>
-                  </a:txBody>
-                  <a:tcPr/>
-                </a:tc>
-                <a:tc>
-                  <a:txBody>
-                    <a:bodyPr/>
-                    <a:lstStyle/>
-                    <a:p>
-                      <a:r>
-                        <a:rPr sz="892" b="0">
-                          <a:solidFill>
-                            <a:srgbClr val="111111"/>
-                          </a:solidFill>
-                        </a:rPr>
-                        <a:t>0.00</a:t>
-                      </a:r>
-                    </a:p>
-                  </a:txBody>
-                  <a:tcPr/>
-                </a:tc>
-                <a:tc>
-                  <a:txBody>
-                    <a:bodyPr/>
-                    <a:lstStyle/>
-                    <a:p>
-                      <a:r>
-                        <a:rPr sz="892" b="0">
-                          <a:solidFill>
-                            <a:srgbClr val="111111"/>
-                          </a:solidFill>
-                        </a:rPr>
-                        <a:t>below threshold</a:t>
+              <a:tr h="256540">
+                <a:tc>
+                  <a:txBody>
+                    <a:bodyPr/>
+                    <a:lstStyle/>
+                    <a:p>
+                      <a:r>
+                        <a:rPr sz="892" b="0">
+                          <a:solidFill>
+                            <a:srgbClr val="111111"/>
+                          </a:solidFill>
+                        </a:rPr>
+                        <a:t>Identification</a:t>
+                      </a:r>
+                    </a:p>
+                  </a:txBody>
+                  <a:tcPr/>
+                </a:tc>
+                <a:tc>
+                  <a:txBody>
+                    <a:bodyPr/>
+                    <a:lstStyle/>
+                    <a:p>
+                      <a:r>
+                        <a:rPr sz="892" b="0">
+                          <a:solidFill>
+                            <a:srgbClr val="111111"/>
+                          </a:solidFill>
+                        </a:rPr>
+                        <a:t>graph hash</a:t>
+                      </a:r>
+                    </a:p>
+                  </a:txBody>
+                  <a:tcPr/>
+                </a:tc>
+                <a:tc>
+                  <a:txBody>
+                    <a:bodyPr/>
+                    <a:lstStyle/>
+                    <a:p>
+                      <a:r>
+                        <a:rPr sz="892" b="0">
+                          <a:solidFill>
+                            <a:srgbClr val="111111"/>
+                          </a:solidFill>
+                        </a:rPr>
+                        <a:t>d02f82660e65</a:t>
                       </a:r>
                     </a:p>
                   </a:txBody>
                   <a:tcPr/>
                 </a:tc>
               </a:tr>
-              <a:tr h="304800">
-                <a:tc>
-                  <a:txBody>
-                    <a:bodyPr/>
-                    <a:lstStyle/>
-                    <a:p>
-                      <a:r>
-                        <a:rPr sz="892" b="0">
-                          <a:solidFill>
-                            <a:srgbClr val="111111"/>
-                          </a:solidFill>
-                        </a:rPr>
-                        <a:t>10 mg vs control, pooled</a:t>
-                      </a:r>
-                    </a:p>
-                  </a:txBody>
-                  <a:tcPr/>
-                </a:tc>
-                <a:tc>
-                  <a:txBody>
-                    <a:bodyPr/>
-                    <a:lstStyle/>
-                    <a:p>
-                      <a:r>
-                        <a:rPr sz="892" b="0">
-                          <a:solidFill>
-                            <a:srgbClr val="111111"/>
-                          </a:solidFill>
-                        </a:rPr>
-                        <a:t>-5.27</a:t>
-                      </a:r>
-                    </a:p>
-                  </a:txBody>
-                  <a:tcPr/>
-                </a:tc>
-                <a:tc>
-                  <a:txBody>
-                    <a:bodyPr/>
-                    <a:lstStyle/>
-                    <a:p>
-                      <a:r>
-                        <a:rPr sz="892" b="0">
-                          <a:solidFill>
-                            <a:srgbClr val="111111"/>
-                          </a:solidFill>
-                        </a:rPr>
-                        <a:t>mmHg</a:t>
-                      </a:r>
-                    </a:p>
-                  </a:txBody>
-                  <a:tcPr/>
-                </a:tc>
-                <a:tc>
-                  <a:txBody>
-                    <a:bodyPr/>
-                    <a:lstStyle/>
-                    <a:p>
-                      <a:r>
-                        <a:rPr sz="892" b="0">
-                          <a:solidFill>
-                            <a:srgbClr val="111111"/>
-                          </a:solidFill>
-                        </a:rPr>
-                        <a:t>-6.63 to -3.91 (90% WALD)</a:t>
-                      </a:r>
-                    </a:p>
-                  </a:txBody>
-                  <a:tcPr/>
-                </a:tc>
-                <a:tc>
-                  <a:txBody>
-                    <a:bodyPr/>
-                    <a:lstStyle/>
-                    <a:p>
-                      <a:r>
-                        <a:rPr sz="892" b="0">
-                          <a:solidFill>
-                            <a:srgbClr val="111111"/>
-                          </a:solidFill>
-                        </a:rPr>
-                        <a:t>0.00</a:t>
-                      </a:r>
-                    </a:p>
-                  </a:txBody>
-                  <a:tcPr/>
-                </a:tc>
-                <a:tc>
-                  <a:txBody>
-                    <a:bodyPr/>
-                    <a:lstStyle/>
-                    <a:p>
-                      <a:r>
-                        <a:rPr sz="892" b="0">
-                          <a:solidFill>
-                            <a:srgbClr val="111111"/>
-                          </a:solidFill>
-                        </a:rPr>
-                        <a:t>below threshold</a:t>
+              <a:tr h="256540">
+                <a:tc>
+                  <a:txBody>
+                    <a:bodyPr/>
+                    <a:lstStyle/>
+                    <a:p>
+                      <a:r>
+                        <a:rPr sz="892" b="0">
+                          <a:solidFill>
+                            <a:srgbClr val="111111"/>
+                          </a:solidFill>
+                        </a:rPr>
+                        <a:t>Identification</a:t>
+                      </a:r>
+                    </a:p>
+                  </a:txBody>
+                  <a:tcPr/>
+                </a:tc>
+                <a:tc>
+                  <a:txBody>
+                    <a:bodyPr/>
+                    <a:lstStyle/>
+                    <a:p>
+                      <a:r>
+                        <a:rPr sz="892" b="0">
+                          <a:solidFill>
+                            <a:srgbClr val="111111"/>
+                          </a:solidFill>
+                        </a:rPr>
+                        <a:t>route</a:t>
+                      </a:r>
+                    </a:p>
+                  </a:txBody>
+                  <a:tcPr/>
+                </a:tc>
+                <a:tc>
+                  <a:txBody>
+                    <a:bodyPr/>
+                    <a:lstStyle/>
+                    <a:p>
+                      <a:r>
+                        <a:rPr sz="892" b="0">
+                          <a:solidFill>
+                            <a:srgbClr val="111111"/>
+                          </a:solidFill>
+                        </a:rPr>
+                        <a:t>backdoor</a:t>
                       </a:r>
                     </a:p>
                   </a:txBody>
                   <a:tcPr/>
                 </a:tc>
               </a:tr>
-              <a:tr h="304800">
-                <a:tc>
-                  <a:txBody>
-                    <a:bodyPr/>
-                    <a:lstStyle/>
-                    <a:p>
-                      <a:r>
-                        <a:rPr sz="892" b="0">
-                          <a:solidFill>
-                            <a:srgbClr val="111111"/>
-                          </a:solidFill>
-                        </a:rPr>
-                        <a:t>40 mg vs control, age 51+</a:t>
-                      </a:r>
-                    </a:p>
-                  </a:txBody>
-                  <a:tcPr/>
-                </a:tc>
-                <a:tc>
-                  <a:txBody>
-                    <a:bodyPr/>
-                    <a:lstStyle/>
-                    <a:p>
-                      <a:r>
-                        <a:rPr sz="892" b="0">
-                          <a:solidFill>
-                            <a:srgbClr val="111111"/>
-                          </a:solidFill>
-                        </a:rPr>
-                        <a:t>6.20</a:t>
-                      </a:r>
-                    </a:p>
-                  </a:txBody>
-                  <a:tcPr/>
-                </a:tc>
-                <a:tc>
-                  <a:txBody>
-                    <a:bodyPr/>
-                    <a:lstStyle/>
-                    <a:p>
-                      <a:r>
-                        <a:rPr sz="892" b="0">
-                          <a:solidFill>
-                            <a:srgbClr val="111111"/>
-                          </a:solidFill>
-                        </a:rPr>
-                        <a:t>mmHg</a:t>
-                      </a:r>
-                    </a:p>
-                  </a:txBody>
-                  <a:tcPr/>
-                </a:tc>
-                <a:tc>
-                  <a:txBody>
-                    <a:bodyPr/>
-                    <a:lstStyle/>
-                    <a:p>
-                      <a:r>
-                        <a:rPr sz="892" b="0">
-                          <a:solidFill>
-                            <a:srgbClr val="111111"/>
-                          </a:solidFill>
-                        </a:rPr>
-                        <a:t>3.98 to 8.42 (90% WALD)</a:t>
-                      </a:r>
-                    </a:p>
-                  </a:txBody>
-                  <a:tcPr/>
-                </a:tc>
-                <a:tc>
-                  <a:txBody>
-                    <a:bodyPr/>
-                    <a:lstStyle/>
-                    <a:p>
-                      <a:r>
-                        <a:rPr sz="892" b="0">
-                          <a:solidFill>
-                            <a:srgbClr val="111111"/>
-                          </a:solidFill>
-                        </a:rPr>
-                        <a:t>0.00</a:t>
-                      </a:r>
-                    </a:p>
-                  </a:txBody>
-                  <a:tcPr/>
-                </a:tc>
-                <a:tc>
-                  <a:txBody>
-                    <a:bodyPr/>
-                    <a:lstStyle/>
-                    <a:p>
-                      <a:r>
-                        <a:rPr sz="892" b="0">
-                          <a:solidFill>
-                            <a:srgbClr val="111111"/>
-                          </a:solidFill>
-                        </a:rPr>
-                        <a:t>above threshold</a:t>
+              <a:tr h="256540">
+                <a:tc>
+                  <a:txBody>
+                    <a:bodyPr/>
+                    <a:lstStyle/>
+                    <a:p>
+                      <a:r>
+                        <a:rPr sz="892" b="0">
+                          <a:solidFill>
+                            <a:srgbClr val="111111"/>
+                          </a:solidFill>
+                        </a:rPr>
+                        <a:t>Identification</a:t>
+                      </a:r>
+                    </a:p>
+                  </a:txBody>
+                  <a:tcPr/>
+                </a:tc>
+                <a:tc>
+                  <a:txBody>
+                    <a:bodyPr/>
+                    <a:lstStyle/>
+                    <a:p>
+                      <a:r>
+                        <a:rPr sz="892" b="0">
+                          <a:solidFill>
+                            <a:srgbClr val="111111"/>
+                          </a:solidFill>
+                        </a:rPr>
+                        <a:t>status</a:t>
+                      </a:r>
+                    </a:p>
+                  </a:txBody>
+                  <a:tcPr/>
+                </a:tc>
+                <a:tc>
+                  <a:txBody>
+                    <a:bodyPr/>
+                    <a:lstStyle/>
+                    <a:p>
+                      <a:r>
+                        <a:rPr sz="892" b="0">
+                          <a:solidFill>
+                            <a:srgbClr val="111111"/>
+                          </a:solidFill>
+                        </a:rPr>
+                        <a:t>identified</a:t>
                       </a:r>
                     </a:p>
                   </a:txBody>
                   <a:tcPr/>
                 </a:tc>
               </a:tr>
-              <a:tr h="304800">
-                <a:tc>
-                  <a:txBody>
-                    <a:bodyPr/>
-                    <a:lstStyle/>
-                    <a:p>
-                      <a:r>
-                        <a:rPr sz="892" b="0">
-                          <a:solidFill>
-                            <a:srgbClr val="111111"/>
-                          </a:solidFill>
-                        </a:rPr>
-                        <a:t>40 mg vs control, age 25-35</a:t>
-                      </a:r>
-                    </a:p>
-                  </a:txBody>
-                  <a:tcPr/>
-                </a:tc>
-                <a:tc>
-                  <a:txBody>
-                    <a:bodyPr/>
-                    <a:lstStyle/>
-                    <a:p>
-                      <a:r>
-                        <a:rPr sz="892" b="0">
-                          <a:solidFill>
-                            <a:srgbClr val="111111"/>
-                          </a:solidFill>
-                        </a:rPr>
-                        <a:t>-5.26</a:t>
-                      </a:r>
-                    </a:p>
-                  </a:txBody>
-                  <a:tcPr/>
-                </a:tc>
-                <a:tc>
-                  <a:txBody>
-                    <a:bodyPr/>
-                    <a:lstStyle/>
-                    <a:p>
-                      <a:r>
-                        <a:rPr sz="892" b="0">
-                          <a:solidFill>
-                            <a:srgbClr val="111111"/>
-                          </a:solidFill>
-                        </a:rPr>
-                        <a:t>mmHg</a:t>
-                      </a:r>
-                    </a:p>
-                  </a:txBody>
-                  <a:tcPr/>
-                </a:tc>
-                <a:tc>
-                  <a:txBody>
-                    <a:bodyPr/>
-                    <a:lstStyle/>
-                    <a:p>
-                      <a:r>
-                        <a:rPr sz="892" b="0">
-                          <a:solidFill>
-                            <a:srgbClr val="111111"/>
-                          </a:solidFill>
-                        </a:rPr>
-                        <a:t>-8.17 to -2.36 (90% WALD)</a:t>
-                      </a:r>
-                    </a:p>
-                  </a:txBody>
-                  <a:tcPr/>
-                </a:tc>
-                <a:tc>
-                  <a:txBody>
-                    <a:bodyPr/>
-                    <a:lstStyle/>
-                    <a:p>
-                      <a:r>
-                        <a:rPr sz="892" b="0">
-                          <a:solidFill>
-                            <a:srgbClr val="111111"/>
-                          </a:solidFill>
-                        </a:rPr>
-                        <a:t>0.00</a:t>
-                      </a:r>
-                    </a:p>
-                  </a:txBody>
-                  <a:tcPr/>
-                </a:tc>
-                <a:tc>
-                  <a:txBody>
-                    <a:bodyPr/>
-                    <a:lstStyle/>
-                    <a:p>
-                      <a:r>
-                        <a:rPr sz="892" b="0">
-                          <a:solidFill>
-                            <a:srgbClr val="111111"/>
-                          </a:solidFill>
-                        </a:rPr>
-                        <a:t>below threshold</a:t>
+              <a:tr h="256540">
+                <a:tc>
+                  <a:txBody>
+                    <a:bodyPr/>
+                    <a:lstStyle/>
+                    <a:p>
+                      <a:r>
+                        <a:rPr sz="892" b="0">
+                          <a:solidFill>
+                            <a:srgbClr val="111111"/>
+                          </a:solidFill>
+                        </a:rPr>
+                        <a:t>Protocol</a:t>
+                      </a:r>
+                    </a:p>
+                  </a:txBody>
+                  <a:tcPr/>
+                </a:tc>
+                <a:tc>
+                  <a:txBody>
+                    <a:bodyPr/>
+                    <a:lstStyle/>
+                    <a:p>
+                      <a:r>
+                        <a:rPr sz="892" b="0">
+                          <a:solidFill>
+                            <a:srgbClr val="111111"/>
+                          </a:solidFill>
+                        </a:rPr>
+                        <a:t>allocation</a:t>
+                      </a:r>
+                    </a:p>
+                  </a:txBody>
+                  <a:tcPr/>
+                </a:tc>
+                <a:tc>
+                  <a:txBody>
+                    <a:bodyPr/>
+                    <a:lstStyle/>
+                    <a:p>
+                      <a:r>
+                        <a:rPr sz="892" b="0">
+                          <a:solidFill>
+                            <a:srgbClr val="111111"/>
+                          </a:solidFill>
+                        </a:rPr>
+                        <a:t>2:1:1:1</a:t>
+                      </a:r>
+                    </a:p>
+                  </a:txBody>
+                  <a:tcPr/>
+                </a:tc>
+              </a:tr>
+              <a:tr h="256540">
+                <a:tc>
+                  <a:txBody>
+                    <a:bodyPr/>
+                    <a:lstStyle/>
+                    <a:p>
+                      <a:r>
+                        <a:rPr sz="892" b="0">
+                          <a:solidFill>
+                            <a:srgbClr val="111111"/>
+                          </a:solidFill>
+                        </a:rPr>
+                        <a:t>Protocol</a:t>
+                      </a:r>
+                    </a:p>
+                  </a:txBody>
+                  <a:tcPr/>
+                </a:tc>
+                <a:tc>
+                  <a:txBody>
+                    <a:bodyPr/>
+                    <a:lstStyle/>
+                    <a:p>
+                      <a:r>
+                        <a:rPr sz="892" b="0">
+                          <a:solidFill>
+                            <a:srgbClr val="111111"/>
+                          </a:solidFill>
+                        </a:rPr>
+                        <a:t>arms</a:t>
+                      </a:r>
+                    </a:p>
+                  </a:txBody>
+                  <a:tcPr/>
+                </a:tc>
+                <a:tc>
+                  <a:txBody>
+                    <a:bodyPr/>
+                    <a:lstStyle/>
+                    <a:p>
+                      <a:r>
+                        <a:rPr sz="892" b="0">
+                          <a:solidFill>
+                            <a:srgbClr val="111111"/>
+                          </a:solidFill>
+                        </a:rPr>
+                        <a:t>standard_of_care, dose_10, dose_20, dose_40</a:t>
+                      </a:r>
+                    </a:p>
+                  </a:txBody>
+                  <a:tcPr/>
+                </a:tc>
+              </a:tr>
+              <a:tr h="256540">
+                <a:tc>
+                  <a:txBody>
+                    <a:bodyPr/>
+                    <a:lstStyle/>
+                    <a:p>
+                      <a:r>
+                        <a:rPr sz="892" b="0">
+                          <a:solidFill>
+                            <a:srgbClr val="111111"/>
+                          </a:solidFill>
+                        </a:rPr>
+                        <a:t>Protocol</a:t>
+                      </a:r>
+                    </a:p>
+                  </a:txBody>
+                  <a:tcPr/>
+                </a:tc>
+                <a:tc>
+                  <a:txBody>
+                    <a:bodyPr/>
+                    <a:lstStyle/>
+                    <a:p>
+                      <a:r>
+                        <a:rPr sz="892" b="0">
+                          <a:solidFill>
+                            <a:srgbClr val="111111"/>
+                          </a:solidFill>
+                        </a:rPr>
+                        <a:t>enrollment weeks</a:t>
+                      </a:r>
+                    </a:p>
+                  </a:txBody>
+                  <a:tcPr/>
+                </a:tc>
+                <a:tc>
+                  <a:txBody>
+                    <a:bodyPr/>
+                    <a:lstStyle/>
+                    <a:p>
+                      <a:r>
+                        <a:rPr sz="892" b="0">
+                          <a:solidFill>
+                            <a:srgbClr val="111111"/>
+                          </a:solidFill>
+                        </a:rPr>
+                        <a:t>16</a:t>
+                      </a:r>
+                    </a:p>
+                  </a:txBody>
+                  <a:tcPr/>
+                </a:tc>
+              </a:tr>
+              <a:tr h="256540">
+                <a:tc>
+                  <a:txBody>
+                    <a:bodyPr/>
+                    <a:lstStyle/>
+                    <a:p>
+                      <a:r>
+                        <a:rPr sz="892" b="0">
+                          <a:solidFill>
+                            <a:srgbClr val="111111"/>
+                          </a:solidFill>
+                        </a:rPr>
+                        <a:t>Protocol</a:t>
+                      </a:r>
+                    </a:p>
+                  </a:txBody>
+                  <a:tcPr/>
+                </a:tc>
+                <a:tc>
+                  <a:txBody>
+                    <a:bodyPr/>
+                    <a:lstStyle/>
+                    <a:p>
+                      <a:r>
+                        <a:rPr sz="892" b="0">
+                          <a:solidFill>
+                            <a:srgbClr val="111111"/>
+                          </a:solidFill>
+                        </a:rPr>
+                        <a:t>follow-up weeks</a:t>
+                      </a:r>
+                    </a:p>
+                  </a:txBody>
+                  <a:tcPr/>
+                </a:tc>
+                <a:tc>
+                  <a:txBody>
+                    <a:bodyPr/>
+                    <a:lstStyle/>
+                    <a:p>
+                      <a:r>
+                        <a:rPr sz="892" b="0">
+                          <a:solidFill>
+                            <a:srgbClr val="111111"/>
+                          </a:solidFill>
+                        </a:rPr>
+                        <a:t>24</a:t>
+                      </a:r>
+                    </a:p>
+                  </a:txBody>
+                  <a:tcPr/>
+                </a:tc>
+              </a:tr>
+              <a:tr h="256540">
+                <a:tc>
+                  <a:txBody>
+                    <a:bodyPr/>
+                    <a:lstStyle/>
+                    <a:p>
+                      <a:r>
+                        <a:rPr sz="892" b="0">
+                          <a:solidFill>
+                            <a:srgbClr val="111111"/>
+                          </a:solidFill>
+                        </a:rPr>
+                        <a:t>Protocol</a:t>
+                      </a:r>
+                    </a:p>
+                  </a:txBody>
+                  <a:tcPr/>
+                </a:tc>
+                <a:tc>
+                  <a:txBody>
+                    <a:bodyPr/>
+                    <a:lstStyle/>
+                    <a:p>
+                      <a:r>
+                        <a:rPr sz="892" b="0">
+                          <a:solidFill>
+                            <a:srgbClr val="111111"/>
+                          </a:solidFill>
+                        </a:rPr>
+                        <a:t>primary endpoint week</a:t>
+                      </a:r>
+                    </a:p>
+                  </a:txBody>
+                  <a:tcPr/>
+                </a:tc>
+                <a:tc>
+                  <a:txBody>
+                    <a:bodyPr/>
+                    <a:lstStyle/>
+                    <a:p>
+                      <a:r>
+                        <a:rPr sz="892" b="0">
+                          <a:solidFill>
+                            <a:srgbClr val="111111"/>
+                          </a:solidFill>
+                        </a:rPr>
+                        <a:t>12</a:t>
+                      </a:r>
+                    </a:p>
+                  </a:txBody>
+                  <a:tcPr/>
+                </a:tc>
+              </a:tr>
+              <a:tr h="256540">
+                <a:tc>
+                  <a:txBody>
+                    <a:bodyPr/>
+                    <a:lstStyle/>
+                    <a:p>
+                      <a:r>
+                        <a:rPr sz="892" b="0">
+                          <a:solidFill>
+                            <a:srgbClr val="111111"/>
+                          </a:solidFill>
+                        </a:rPr>
+                        <a:t>Protocol</a:t>
+                      </a:r>
+                    </a:p>
+                  </a:txBody>
+                  <a:tcPr/>
+                </a:tc>
+                <a:tc>
+                  <a:txBody>
+                    <a:bodyPr/>
+                    <a:lstStyle/>
+                    <a:p>
+                      <a:r>
+                        <a:rPr sz="892" b="0">
+                          <a:solidFill>
+                            <a:srgbClr val="111111"/>
+                          </a:solidFill>
+                        </a:rPr>
+                        <a:t>strata</a:t>
+                      </a:r>
+                    </a:p>
+                  </a:txBody>
+                  <a:tcPr/>
+                </a:tc>
+                <a:tc>
+                  <a:txBody>
+                    <a:bodyPr/>
+                    <a:lstStyle/>
+                    <a:p>
+                      <a:r>
+                        <a:rPr sz="892" b="0">
+                          <a:solidFill>
+                            <a:srgbClr val="111111"/>
+                          </a:solidFill>
+                        </a:rPr>
+                        <a:t>age_25_35, age_36_50, age_51_plus</a:t>
+                      </a:r>
+                    </a:p>
+                  </a:txBody>
+                  <a:tcPr/>
+                </a:tc>
+              </a:tr>
+              <a:tr h="256540">
+                <a:tc>
+                  <a:txBody>
+                    <a:bodyPr/>
+                    <a:lstStyle/>
+                    <a:p>
+                      <a:r>
+                        <a:rPr sz="892" b="0">
+                          <a:solidFill>
+                            <a:srgbClr val="111111"/>
+                          </a:solidFill>
+                        </a:rPr>
+                        <a:t>Protocol</a:t>
+                      </a:r>
+                    </a:p>
+                  </a:txBody>
+                  <a:tcPr/>
+                </a:tc>
+                <a:tc>
+                  <a:txBody>
+                    <a:bodyPr/>
+                    <a:lstStyle/>
+                    <a:p>
+                      <a:r>
+                        <a:rPr sz="892" b="0">
+                          <a:solidFill>
+                            <a:srgbClr val="111111"/>
+                          </a:solidFill>
+                        </a:rPr>
+                        <a:t>units randomized</a:t>
+                      </a:r>
+                    </a:p>
+                  </a:txBody>
+                  <a:tcPr/>
+                </a:tc>
+                <a:tc>
+                  <a:txBody>
+                    <a:bodyPr/>
+                    <a:lstStyle/>
+                    <a:p>
+                      <a:r>
+                        <a:rPr sz="892" b="0">
+                          <a:solidFill>
+                            <a:srgbClr val="111111"/>
+                          </a:solidFill>
+                        </a:rPr>
+                        <a:t>400</a:t>
+                      </a:r>
+                    </a:p>
+                  </a:txBody>
+                  <a:tcPr/>
+                </a:tc>
+              </a:tr>
+              <a:tr h="256540">
+                <a:tc>
+                  <a:txBody>
+                    <a:bodyPr/>
+                    <a:lstStyle/>
+                    <a:p>
+                      <a:r>
+                        <a:rPr sz="892" b="0">
+                          <a:solidFill>
+                            <a:srgbClr val="111111"/>
+                          </a:solidFill>
+                        </a:rPr>
+                        <a:t>Measurement</a:t>
+                      </a:r>
+                    </a:p>
+                  </a:txBody>
+                  <a:tcPr/>
+                </a:tc>
+                <a:tc>
+                  <a:txBody>
+                    <a:bodyPr/>
+                    <a:lstStyle/>
+                    <a:p>
+                      <a:r>
+                        <a:rPr sz="892" b="0">
+                          <a:solidFill>
+                            <a:srgbClr val="111111"/>
+                          </a:solidFill>
+                        </a:rPr>
+                        <a:t>minimum visits in window</a:t>
+                      </a:r>
+                    </a:p>
+                  </a:txBody>
+                  <a:tcPr/>
+                </a:tc>
+                <a:tc>
+                  <a:txBody>
+                    <a:bodyPr/>
+                    <a:lstStyle/>
+                    <a:p>
+                      <a:r>
+                        <a:rPr sz="892" b="0">
+                          <a:solidFill>
+                            <a:srgbClr val="111111"/>
+                          </a:solidFill>
+                        </a:rPr>
+                        <a:t>3</a:t>
+                      </a:r>
+                    </a:p>
+                  </a:txBody>
+                  <a:tcPr/>
+                </a:tc>
+              </a:tr>
+              <a:tr h="256540">
+                <a:tc>
+                  <a:txBody>
+                    <a:bodyPr/>
+                    <a:lstStyle/>
+                    <a:p>
+                      <a:r>
+                        <a:rPr sz="892" b="0">
+                          <a:solidFill>
+                            <a:srgbClr val="111111"/>
+                          </a:solidFill>
+                        </a:rPr>
+                        <a:t>Measurement</a:t>
+                      </a:r>
+                    </a:p>
+                  </a:txBody>
+                  <a:tcPr/>
+                </a:tc>
+                <a:tc>
+                  <a:txBody>
+                    <a:bodyPr/>
+                    <a:lstStyle/>
+                    <a:p>
+                      <a:r>
+                        <a:rPr sz="892" b="0">
+                          <a:solidFill>
+                            <a:srgbClr val="111111"/>
+                          </a:solidFill>
+                        </a:rPr>
+                        <a:t>retention at final week</a:t>
+                      </a:r>
+                    </a:p>
+                  </a:txBody>
+                  <a:tcPr/>
+                </a:tc>
+                <a:tc>
+                  <a:txBody>
+                    <a:bodyPr/>
+                    <a:lstStyle/>
+                    <a:p>
+                      <a:r>
+                        <a:rPr sz="892" b="0">
+                          <a:solidFill>
+                            <a:srgbClr val="111111"/>
+                          </a:solidFill>
+                        </a:rPr>
+                        <a:t>79.8%</a:t>
+                      </a:r>
+                    </a:p>
+                  </a:txBody>
+                  <a:tcPr/>
+                </a:tc>
+              </a:tr>
+              <a:tr h="256540">
+                <a:tc>
+                  <a:txBody>
+                    <a:bodyPr/>
+                    <a:lstStyle/>
+                    <a:p>
+                      <a:r>
+                        <a:rPr sz="892" b="0">
+                          <a:solidFill>
+                            <a:srgbClr val="111111"/>
+                          </a:solidFill>
+                        </a:rPr>
+                        <a:t>Analysis</a:t>
+                      </a:r>
+                    </a:p>
+                  </a:txBody>
+                  <a:tcPr/>
+                </a:tc>
+                <a:tc>
+                  <a:txBody>
+                    <a:bodyPr/>
+                    <a:lstStyle/>
+                    <a:p>
+                      <a:r>
+                        <a:rPr sz="892" b="0">
+                          <a:solidFill>
+                            <a:srgbClr val="111111"/>
+                          </a:solidFill>
+                        </a:rPr>
+                        <a:t>estimator</a:t>
+                      </a:r>
+                    </a:p>
+                  </a:txBody>
+                  <a:tcPr/>
+                </a:tc>
+                <a:tc>
+                  <a:txBody>
+                    <a:bodyPr/>
+                    <a:lstStyle/>
+                    <a:p>
+                      <a:r>
+                        <a:rPr sz="892" b="0">
+                          <a:solidFill>
+                            <a:srgbClr val="111111"/>
+                          </a:solidFill>
+                        </a:rPr>
+                        <a:t>ANCOVA (OLS on change, baseline-adjusted)</a:t>
+                      </a:r>
+                    </a:p>
+                  </a:txBody>
+                  <a:tcPr/>
+                </a:tc>
+              </a:tr>
+              <a:tr h="256540">
+                <a:tc>
+                  <a:txBody>
+                    <a:bodyPr/>
+                    <a:lstStyle/>
+                    <a:p>
+                      <a:r>
+                        <a:rPr sz="892" b="0">
+                          <a:solidFill>
+                            <a:srgbClr val="111111"/>
+                          </a:solidFill>
+                        </a:rPr>
+                        <a:t>Analysis</a:t>
+                      </a:r>
+                    </a:p>
+                  </a:txBody>
+                  <a:tcPr/>
+                </a:tc>
+                <a:tc>
+                  <a:txBody>
+                    <a:bodyPr/>
+                    <a:lstStyle/>
+                    <a:p>
+                      <a:r>
+                        <a:rPr sz="892" b="0">
+                          <a:solidFill>
+                            <a:srgbClr val="111111"/>
+                          </a:solidFill>
+                        </a:rPr>
+                        <a:t>interval mass</a:t>
+                      </a:r>
+                    </a:p>
+                  </a:txBody>
+                  <a:tcPr/>
+                </a:tc>
+                <a:tc>
+                  <a:txBody>
+                    <a:bodyPr/>
+                    <a:lstStyle/>
+                    <a:p>
+                      <a:r>
+                        <a:rPr sz="892" b="0">
+                          <a:solidFill>
+                            <a:srgbClr val="111111"/>
+                          </a:solidFill>
+                        </a:rPr>
+                        <a:t>90%</a:t>
+                      </a:r>
+                    </a:p>
+                  </a:txBody>
+                  <a:tcPr/>
+                </a:tc>
+              </a:tr>
+              <a:tr h="256540">
+                <a:tc>
+                  <a:txBody>
+                    <a:bodyPr/>
+                    <a:lstStyle/>
+                    <a:p>
+                      <a:r>
+                        <a:rPr sz="892" b="0">
+                          <a:solidFill>
+                            <a:srgbClr val="111111"/>
+                          </a:solidFill>
+                        </a:rPr>
+                        <a:t>Analysis</a:t>
+                      </a:r>
+                    </a:p>
+                  </a:txBody>
+                  <a:tcPr/>
+                </a:tc>
+                <a:tc>
+                  <a:txBody>
+                    <a:bodyPr/>
+                    <a:lstStyle/>
+                    <a:p>
+                      <a:r>
+                        <a:rPr sz="892" b="0">
+                          <a:solidFill>
+                            <a:srgbClr val="111111"/>
+                          </a:solidFill>
+                        </a:rPr>
+                        <a:t>pooled covariates</a:t>
+                      </a:r>
+                    </a:p>
+                  </a:txBody>
+                  <a:tcPr/>
+                </a:tc>
+                <a:tc>
+                  <a:txBody>
+                    <a:bodyPr/>
+                    <a:lstStyle/>
+                    <a:p>
+                      <a:r>
+                        <a:rPr sz="892" b="0">
+                          <a:solidFill>
+                            <a:srgbClr val="111111"/>
+                          </a:solidFill>
+                        </a:rPr>
+                        <a:t>baseline_centred, is_age_36_50, is_age_51_plus</a:t>
+                      </a:r>
+                    </a:p>
+                  </a:txBody>
+                  <a:tcPr/>
+                </a:tc>
+              </a:tr>
+              <a:tr h="256540">
+                <a:tc>
+                  <a:txBody>
+                    <a:bodyPr/>
+                    <a:lstStyle/>
+                    <a:p>
+                      <a:r>
+                        <a:rPr sz="892" b="0">
+                          <a:solidFill>
+                            <a:srgbClr val="111111"/>
+                          </a:solidFill>
+                        </a:rPr>
+                        <a:t>Analysis</a:t>
+                      </a:r>
+                    </a:p>
+                  </a:txBody>
+                  <a:tcPr/>
+                </a:tc>
+                <a:tc>
+                  <a:txBody>
+                    <a:bodyPr/>
+                    <a:lstStyle/>
+                    <a:p>
+                      <a:r>
+                        <a:rPr sz="892" b="0">
+                          <a:solidFill>
+                            <a:srgbClr val="111111"/>
+                          </a:solidFill>
+                        </a:rPr>
+                        <a:t>within-stratum covariates</a:t>
+                      </a:r>
+                    </a:p>
+                  </a:txBody>
+                  <a:tcPr/>
+                </a:tc>
+                <a:tc>
+                  <a:txBody>
+                    <a:bodyPr/>
+                    <a:lstStyle/>
+                    <a:p>
+                      <a:r>
+                        <a:rPr sz="892" b="0">
+                          <a:solidFill>
+                            <a:srgbClr val="111111"/>
+                          </a:solidFill>
+                        </a:rPr>
+                        <a:t>baseline_centred</a:t>
+                      </a:r>
+                    </a:p>
+                  </a:txBody>
+                  <a:tcPr/>
+                </a:tc>
+              </a:tr>
+              <a:tr h="256540">
+                <a:tc>
+                  <a:txBody>
+                    <a:bodyPr/>
+                    <a:lstStyle/>
+                    <a:p>
+                      <a:r>
+                        <a:rPr sz="892" b="0">
+                          <a:solidFill>
+                            <a:srgbClr val="111111"/>
+                          </a:solidFill>
+                        </a:rPr>
+                        <a:t>Safety monitoring</a:t>
+                      </a:r>
+                    </a:p>
+                  </a:txBody>
+                  <a:tcPr/>
+                </a:tc>
+                <a:tc>
+                  <a:txBody>
+                    <a:bodyPr/>
+                    <a:lstStyle/>
+                    <a:p>
+                      <a:r>
+                        <a:rPr sz="892" b="0">
+                          <a:solidFill>
+                            <a:srgbClr val="111111"/>
+                          </a:solidFill>
+                        </a:rPr>
+                        <a:t>clinical margin (mmHg)</a:t>
+                      </a:r>
+                    </a:p>
+                  </a:txBody>
+                  <a:tcPr/>
+                </a:tc>
+                <a:tc>
+                  <a:txBody>
+                    <a:bodyPr/>
+                    <a:lstStyle/>
+                    <a:p>
+                      <a:r>
+                        <a:rPr sz="892" b="0">
+                          <a:solidFill>
+                            <a:srgbClr val="111111"/>
+                          </a:solidFill>
+                        </a:rPr>
+                        <a:t>2</a:t>
+                      </a:r>
+                    </a:p>
+                  </a:txBody>
+                  <a:tcPr/>
+                </a:tc>
+              </a:tr>
+              <a:tr h="256540">
+                <a:tc>
+                  <a:txBody>
+                    <a:bodyPr/>
+                    <a:lstStyle/>
+                    <a:p>
+                      <a:r>
+                        <a:rPr sz="892" b="0">
+                          <a:solidFill>
+                            <a:srgbClr val="111111"/>
+                          </a:solidFill>
+                        </a:rPr>
+                        <a:t>Safety monitoring</a:t>
+                      </a:r>
+                    </a:p>
+                  </a:txBody>
+                  <a:tcPr/>
+                </a:tc>
+                <a:tc>
+                  <a:txBody>
+                    <a:bodyPr/>
+                    <a:lstStyle/>
+                    <a:p>
+                      <a:r>
+                        <a:rPr sz="892" b="0">
+                          <a:solidFill>
+                            <a:srgbClr val="111111"/>
+                          </a:solidFill>
+                        </a:rPr>
+                        <a:t>monitored contrasts</a:t>
+                      </a:r>
+                    </a:p>
+                  </a:txBody>
+                  <a:tcPr/>
+                </a:tc>
+                <a:tc>
+                  <a:txBody>
+                    <a:bodyPr/>
+                    <a:lstStyle/>
+                    <a:p>
+                      <a:r>
+                        <a:rPr sz="892" b="0">
+                          <a:solidFill>
+                            <a:srgbClr val="111111"/>
+                          </a:solidFill>
+                        </a:rPr>
+                        <a:t>12</a:t>
                       </a:r>
                     </a:p>
                   </a:txBody>
@@ -8205,7 +9220,7 @@
                   <a:srgbClr val="111111"/>
                 </a:solidFill>
               </a:rPr>
-              <a:t>4. Model checking</a:t>
+              <a:t>3. Results</a:t>
             </a:r>
           </a:p>
         </p:txBody>
@@ -8238,7 +9253,7 @@
                   <a:srgbClr val="555555"/>
                 </a:solidFill>
               </a:rPr>
-              <a:t>UNITS STILL ON STUDY AT THE FINAL WEEK</a:t>
+              <a:t>40 MG VS CONTROL, POOLED</a:t>
             </a:r>
           </a:p>
           <a:p>
@@ -8248,7 +9263,17 @@
                   <a:srgbClr val="1A1A1A"/>
                 </a:solidFill>
               </a:rPr>
-              <a:t>0.797</a:t>
+              <a:t>-1.53 mmHg</a:t>
+            </a:r>
+          </a:p>
+          <a:p>
+            <a:r>
+              <a:rPr sz="892" b="0">
+                <a:solidFill>
+                  <a:srgbClr val="555555"/>
+                </a:solidFill>
+              </a:rPr>
+              <a:t>[-3.0, -0.1] (90% WALD)</a:t>
             </a:r>
           </a:p>
         </p:txBody>
@@ -8281,7 +9306,7 @@
                   <a:srgbClr val="555555"/>
                 </a:solidFill>
               </a:rPr>
-              <a:t>UNITS CONTRIBUTING TO THE PRIMARY ENDPOINT</a:t>
+              <a:t>20 MG VS CONTROL, POOLED</a:t>
             </a:r>
           </a:p>
           <a:p>
@@ -8291,7 +9316,17 @@
                   <a:srgbClr val="1A1A1A"/>
                 </a:solidFill>
               </a:rPr>
-              <a:t>372</a:t>
+              <a:t>-4.80 mmHg</a:t>
+            </a:r>
+          </a:p>
+          <a:p>
+            <a:r>
+              <a:rPr sz="892" b="0">
+                <a:solidFill>
+                  <a:srgbClr val="555555"/>
+                </a:solidFill>
+              </a:rPr>
+              <a:t>[-6.2, -3.4] (90% WALD)</a:t>
             </a:r>
           </a:p>
         </p:txBody>
@@ -8324,7 +9359,7 @@
                   <a:srgbClr val="555555"/>
                 </a:solidFill>
               </a:rPr>
-              <a:t>UNITS RANDOMIZED IN BAND AGE 25 35</a:t>
+              <a:t>10 MG VS CONTROL, POOLED</a:t>
             </a:r>
           </a:p>
           <a:p>
@@ -8334,7 +9369,17 @@
                   <a:srgbClr val="1A1A1A"/>
                 </a:solidFill>
               </a:rPr>
-              <a:t>100</a:t>
+              <a:t>-5.27 mmHg</a:t>
+            </a:r>
+          </a:p>
+          <a:p>
+            <a:r>
+              <a:rPr sz="892" b="0">
+                <a:solidFill>
+                  <a:srgbClr val="555555"/>
+                </a:solidFill>
+              </a:rPr>
+              <a:t>[-6.6, -3.9] (90% WALD)</a:t>
             </a:r>
           </a:p>
         </p:txBody>
@@ -8367,7 +9412,7 @@
                   <a:srgbClr val="555555"/>
                 </a:solidFill>
               </a:rPr>
-              <a:t>UNITS RANDOMIZED IN BAND AGE 36 50</a:t>
+              <a:t>40 MG VS CONTROL, AGE 51+</a:t>
             </a:r>
           </a:p>
           <a:p>
@@ -8377,7 +9422,17 @@
                   <a:srgbClr val="1A1A1A"/>
                 </a:solidFill>
               </a:rPr>
-              <a:t>160</a:t>
+              <a:t>6.20 mmHg</a:t>
+            </a:r>
+          </a:p>
+          <a:p>
+            <a:r>
+              <a:rPr sz="892" b="0">
+                <a:solidFill>
+                  <a:srgbClr val="555555"/>
+                </a:solidFill>
+              </a:rPr>
+              <a:t>[4.0, 8.4] (90% WALD)</a:t>
             </a:r>
           </a:p>
         </p:txBody>
@@ -8410,7 +9465,7 @@
                   <a:srgbClr val="111111"/>
                 </a:solidFill>
               </a:rPr>
-              <a:t>Diagnostic checks describe model fit and retention rather than the treatment effect itself. Units still on study at the final week were 0.797. There were 372 units contributing to the primary endpoint. There were 100 units randomized in the age 25 to 35 band, 160 units randomized in the age 36 to 50 band, and 140 units randomized in the age 51 plus band. These diagnostics monitor sample availability and stratum allocations across follow-up. Diagnostic checks can reduce confidence in the estimates, but they never establish them. Evaluating model fit does not verify the unresolved assumptions underlying the estimation. In particular, that dropout is ignorable given baseline remains an unresolved assumption. That the pooled contrast answers the question is likewise an unresolved assumption. Retention metrics and diagnostic numbers cannot verify whether dropout is ignorable given baseline. Similarly, checking the fit does not demonstrate that the pooled contrast answers the question. These checks evaluate the operational sample without validating the unmeasured identification conditions.</a:t>
+              <a:t>The HYPER-3 results evaluate the dose comparisons relative to control under the identification strategy established in the methods. The estimated quantities are presented in Table 4. For 40 mg vs control, the pooled estimate is -1.53 mmHg (90% WALD -2.97 to -0.10 mmHg). For 20 mg vs control, the pooled estimate is -4.80 mmHg (90% WALD -6.17 to -3.44 mmHg). For 10 mg vs control, the pooled estimate is -5.27 mmHg (90% WALD -6.63 to -3.91 mmHg). The analysis of the 40 mg dose also reports estimates by age stratum. For 40 mg vs control, age 51+, the estimate is 6.20 mmHg (90% WALD 3.98 to 8.42 mmHg). For 40 mg vs control, age 25-35, the estimate is -5.26 mmHg (90% WALD -8.17 to -2.36 mmHg). The estimated quantities with their intervals are shown in Figure 2.</a:t>
             </a:r>
           </a:p>
         </p:txBody>
